--- a/Clase 06 Metodos de Clasificacion_Logit & KNN/C6_Clasificacion_Bayes_Logit_kNN.pptx
+++ b/Clase 06 Metodos de Clasificacion_Logit & KNN/C6_Clasificacion_Bayes_Logit_kNN.pptx
@@ -5,7 +5,7 @@
     <p:sldMasterId id="2147483648" r:id="rId1"/>
   </p:sldMasterIdLst>
   <p:notesMasterIdLst>
-    <p:notesMasterId r:id="rId44"/>
+    <p:notesMasterId r:id="rId39"/>
   </p:notesMasterIdLst>
   <p:sldIdLst>
     <p:sldId id="489" r:id="rId2"/>
@@ -19,37 +19,32 @@
     <p:sldId id="275" r:id="rId10"/>
     <p:sldId id="412" r:id="rId11"/>
     <p:sldId id="413" r:id="rId12"/>
-    <p:sldId id="322" r:id="rId13"/>
-    <p:sldId id="268" r:id="rId14"/>
-    <p:sldId id="260" r:id="rId15"/>
-    <p:sldId id="414" r:id="rId16"/>
-    <p:sldId id="266" r:id="rId17"/>
-    <p:sldId id="276" r:id="rId18"/>
-    <p:sldId id="323" r:id="rId19"/>
-    <p:sldId id="304" r:id="rId20"/>
-    <p:sldId id="272" r:id="rId21"/>
-    <p:sldId id="338" r:id="rId22"/>
-    <p:sldId id="415" r:id="rId23"/>
-    <p:sldId id="416" r:id="rId24"/>
-    <p:sldId id="277" r:id="rId25"/>
-    <p:sldId id="278" r:id="rId26"/>
-    <p:sldId id="279" r:id="rId27"/>
-    <p:sldId id="280" r:id="rId28"/>
-    <p:sldId id="281" r:id="rId29"/>
-    <p:sldId id="522" r:id="rId30"/>
-    <p:sldId id="325" r:id="rId31"/>
-    <p:sldId id="521" r:id="rId32"/>
-    <p:sldId id="305" r:id="rId33"/>
-    <p:sldId id="261" r:id="rId34"/>
-    <p:sldId id="417" r:id="rId35"/>
-    <p:sldId id="408" r:id="rId36"/>
-    <p:sldId id="284" r:id="rId37"/>
-    <p:sldId id="523" r:id="rId38"/>
-    <p:sldId id="319" r:id="rId39"/>
-    <p:sldId id="324" r:id="rId40"/>
-    <p:sldId id="337" r:id="rId41"/>
-    <p:sldId id="300" r:id="rId42"/>
-    <p:sldId id="496" r:id="rId43"/>
+    <p:sldId id="486" r:id="rId13"/>
+    <p:sldId id="323" r:id="rId14"/>
+    <p:sldId id="304" r:id="rId15"/>
+    <p:sldId id="272" r:id="rId16"/>
+    <p:sldId id="338" r:id="rId17"/>
+    <p:sldId id="415" r:id="rId18"/>
+    <p:sldId id="416" r:id="rId19"/>
+    <p:sldId id="277" r:id="rId20"/>
+    <p:sldId id="278" r:id="rId21"/>
+    <p:sldId id="279" r:id="rId22"/>
+    <p:sldId id="280" r:id="rId23"/>
+    <p:sldId id="281" r:id="rId24"/>
+    <p:sldId id="522" r:id="rId25"/>
+    <p:sldId id="524" r:id="rId26"/>
+    <p:sldId id="525" r:id="rId27"/>
+    <p:sldId id="305" r:id="rId28"/>
+    <p:sldId id="261" r:id="rId29"/>
+    <p:sldId id="417" r:id="rId30"/>
+    <p:sldId id="408" r:id="rId31"/>
+    <p:sldId id="284" r:id="rId32"/>
+    <p:sldId id="523" r:id="rId33"/>
+    <p:sldId id="319" r:id="rId34"/>
+    <p:sldId id="324" r:id="rId35"/>
+    <p:sldId id="337" r:id="rId36"/>
+    <p:sldId id="300" r:id="rId37"/>
+    <p:sldId id="496" r:id="rId38"/>
   </p:sldIdLst>
   <p:sldSz cx="12192000" cy="6858000"/>
   <p:notesSz cx="6858000" cy="9144000"/>
@@ -168,16 +163,7 @@
             <p14:sldId id="275"/>
             <p14:sldId id="412"/>
             <p14:sldId id="413"/>
-          </p14:sldIdLst>
-        </p14:section>
-        <p14:section name="Clasificador de Bayes" id="{75D31724-3B6C-E842-978D-4FEEBABBFA4D}">
-          <p14:sldIdLst>
-            <p14:sldId id="322"/>
-            <p14:sldId id="268"/>
-            <p14:sldId id="260"/>
-            <p14:sldId id="414"/>
-            <p14:sldId id="266"/>
-            <p14:sldId id="276"/>
+            <p14:sldId id="486"/>
             <p14:sldId id="323"/>
           </p14:sldIdLst>
         </p14:section>
@@ -202,8 +188,8 @@
         <p14:section name="Aplicacion Logit" id="{A93DBF9C-5601-B84F-AF0F-1BE4C76D83D4}">
           <p14:sldIdLst>
             <p14:sldId id="522"/>
-            <p14:sldId id="325"/>
-            <p14:sldId id="521"/>
+            <p14:sldId id="524"/>
+            <p14:sldId id="525"/>
           </p14:sldIdLst>
         </p14:section>
         <p14:section name="Vecinos ceranos" id="{5623DDE8-0602-0D4F-AFA1-3B05F3F0BCCE}">
@@ -241,7 +227,7 @@
 <file path=ppt/revisionInfo.xml><?xml version="1.0" encoding="utf-8"?>
 <p1510:revInfo xmlns:a="http://schemas.openxmlformats.org/drawingml/2006/main" xmlns:r="http://schemas.openxmlformats.org/officeDocument/2006/relationships" xmlns:p1510="http://schemas.microsoft.com/office/powerpoint/2015/10/main">
   <p1510:revLst>
-    <p1510:client id="{5E9345E9-0D70-6546-B18B-FC85DE87023D}" v="1" dt="2026-08-03T19:27:31.973"/>
+    <p1510:client id="{5E9345E9-0D70-6546-B18B-FC85DE87023D}" v="11" dt="2026-08-07T19:30:31.743"/>
   </p1510:revLst>
 </p1510:revInfo>
 </file>
@@ -250,11 +236,54 @@
 <pc:chgInfo xmlns:a="http://schemas.openxmlformats.org/drawingml/2006/main" xmlns:r="http://schemas.openxmlformats.org/officeDocument/2006/relationships" xmlns:ac="http://schemas.microsoft.com/office/drawing/2013/main/command" xmlns:pc="http://schemas.microsoft.com/office/powerpoint/2013/main/command">
   <pc:docChgLst>
     <pc:chgData name="María Noelia Romero" userId="2133f5768dfc5791" providerId="LiveId" clId="{0168CA65-A813-5033-94B8-EF4605FC29D1}"/>
-    <pc:docChg chg="undo custSel addSld delSld modSld modSection">
-      <pc:chgData name="María Noelia Romero" userId="2133f5768dfc5791" providerId="LiveId" clId="{0168CA65-A813-5033-94B8-EF4605FC29D1}" dt="2026-08-03T19:30:20.367" v="776" actId="20577"/>
+    <pc:docChg chg="undo custSel addSld delSld modSld delSection modSection">
+      <pc:chgData name="María Noelia Romero" userId="2133f5768dfc5791" providerId="LiveId" clId="{0168CA65-A813-5033-94B8-EF4605FC29D1}" dt="2026-08-07T19:30:34.246" v="891" actId="2696"/>
       <pc:docMkLst>
         <pc:docMk/>
       </pc:docMkLst>
+      <pc:sldChg chg="modSp mod">
+        <pc:chgData name="María Noelia Romero" userId="2133f5768dfc5791" providerId="LiveId" clId="{0168CA65-A813-5033-94B8-EF4605FC29D1}" dt="2026-08-07T19:29:53.263" v="888" actId="20577"/>
+        <pc:sldMkLst>
+          <pc:docMk/>
+          <pc:sldMk cId="4169880411" sldId="259"/>
+        </pc:sldMkLst>
+        <pc:spChg chg="mod">
+          <ac:chgData name="María Noelia Romero" userId="2133f5768dfc5791" providerId="LiveId" clId="{0168CA65-A813-5033-94B8-EF4605FC29D1}" dt="2026-08-07T19:29:53.263" v="888" actId="20577"/>
+          <ac:spMkLst>
+            <pc:docMk/>
+            <pc:sldMk cId="4169880411" sldId="259"/>
+            <ac:spMk id="3" creationId="{F3A8327E-74B0-5F1D-D3E8-C9714B43F83E}"/>
+          </ac:spMkLst>
+        </pc:spChg>
+      </pc:sldChg>
+      <pc:sldChg chg="del">
+        <pc:chgData name="María Noelia Romero" userId="2133f5768dfc5791" providerId="LiveId" clId="{0168CA65-A813-5033-94B8-EF4605FC29D1}" dt="2026-08-07T19:29:02.899" v="830" actId="2696"/>
+        <pc:sldMkLst>
+          <pc:docMk/>
+          <pc:sldMk cId="847493722" sldId="260"/>
+        </pc:sldMkLst>
+      </pc:sldChg>
+      <pc:sldChg chg="del">
+        <pc:chgData name="María Noelia Romero" userId="2133f5768dfc5791" providerId="LiveId" clId="{0168CA65-A813-5033-94B8-EF4605FC29D1}" dt="2026-08-07T19:29:03.084" v="832" actId="2696"/>
+        <pc:sldMkLst>
+          <pc:docMk/>
+          <pc:sldMk cId="3902103125" sldId="266"/>
+        </pc:sldMkLst>
+      </pc:sldChg>
+      <pc:sldChg chg="del">
+        <pc:chgData name="María Noelia Romero" userId="2133f5768dfc5791" providerId="LiveId" clId="{0168CA65-A813-5033-94B8-EF4605FC29D1}" dt="2026-08-07T19:29:02.787" v="829" actId="2696"/>
+        <pc:sldMkLst>
+          <pc:docMk/>
+          <pc:sldMk cId="3981839531" sldId="268"/>
+        </pc:sldMkLst>
+      </pc:sldChg>
+      <pc:sldChg chg="del">
+        <pc:chgData name="María Noelia Romero" userId="2133f5768dfc5791" providerId="LiveId" clId="{0168CA65-A813-5033-94B8-EF4605FC29D1}" dt="2026-08-07T19:29:03.198" v="833" actId="2696"/>
+        <pc:sldMkLst>
+          <pc:docMk/>
+          <pc:sldMk cId="3870464886" sldId="276"/>
+        </pc:sldMkLst>
+      </pc:sldChg>
       <pc:sldChg chg="modSp mod">
         <pc:chgData name="María Noelia Romero" userId="2133f5768dfc5791" providerId="LiveId" clId="{0168CA65-A813-5033-94B8-EF4605FC29D1}" dt="2026-08-03T19:27:57.020" v="774" actId="20577"/>
         <pc:sldMkLst>
@@ -270,11 +299,62 @@
           </ac:spMkLst>
         </pc:spChg>
       </pc:sldChg>
-      <pc:sldChg chg="modSp add del mod">
-        <pc:chgData name="María Noelia Romero" userId="2133f5768dfc5791" providerId="LiveId" clId="{0168CA65-A813-5033-94B8-EF4605FC29D1}" dt="2026-08-03T19:27:12.164" v="769" actId="2696"/>
+      <pc:sldChg chg="del">
+        <pc:chgData name="María Noelia Romero" userId="2133f5768dfc5791" providerId="LiveId" clId="{0168CA65-A813-5033-94B8-EF4605FC29D1}" dt="2026-08-07T19:29:02.622" v="828" actId="2696"/>
         <pc:sldMkLst>
           <pc:docMk/>
-          <pc:sldMk cId="116316082" sldId="470"/>
+          <pc:sldMk cId="190179224" sldId="322"/>
+        </pc:sldMkLst>
+      </pc:sldChg>
+      <pc:sldChg chg="add del">
+        <pc:chgData name="María Noelia Romero" userId="2133f5768dfc5791" providerId="LiveId" clId="{0168CA65-A813-5033-94B8-EF4605FC29D1}" dt="2026-08-07T19:29:13.763" v="836"/>
+        <pc:sldMkLst>
+          <pc:docMk/>
+          <pc:sldMk cId="468922351" sldId="323"/>
+        </pc:sldMkLst>
+      </pc:sldChg>
+      <pc:sldChg chg="del">
+        <pc:chgData name="María Noelia Romero" userId="2133f5768dfc5791" providerId="LiveId" clId="{0168CA65-A813-5033-94B8-EF4605FC29D1}" dt="2026-08-07T19:30:34.233" v="890" actId="2696"/>
+        <pc:sldMkLst>
+          <pc:docMk/>
+          <pc:sldMk cId="3185084906" sldId="325"/>
+        </pc:sldMkLst>
+      </pc:sldChg>
+      <pc:sldChg chg="addSp modSp mod modAnim">
+        <pc:chgData name="María Noelia Romero" userId="2133f5768dfc5791" providerId="LiveId" clId="{0168CA65-A813-5033-94B8-EF4605FC29D1}" dt="2026-08-07T19:18:41.251" v="827"/>
+        <pc:sldMkLst>
+          <pc:docMk/>
+          <pc:sldMk cId="1608015502" sldId="412"/>
+        </pc:sldMkLst>
+        <pc:spChg chg="mod">
+          <ac:chgData name="María Noelia Romero" userId="2133f5768dfc5791" providerId="LiveId" clId="{0168CA65-A813-5033-94B8-EF4605FC29D1}" dt="2026-08-07T19:14:36.404" v="777" actId="20577"/>
+          <ac:spMkLst>
+            <pc:docMk/>
+            <pc:sldMk cId="1608015502" sldId="412"/>
+            <ac:spMk id="3" creationId="{2885BA2C-08DB-A513-3E4A-8786DAF39244}"/>
+          </ac:spMkLst>
+        </pc:spChg>
+        <pc:spChg chg="add mod">
+          <ac:chgData name="María Noelia Romero" userId="2133f5768dfc5791" providerId="LiveId" clId="{0168CA65-A813-5033-94B8-EF4605FC29D1}" dt="2026-08-07T19:18:31.881" v="826" actId="2711"/>
+          <ac:spMkLst>
+            <pc:docMk/>
+            <pc:sldMk cId="1608015502" sldId="412"/>
+            <ac:spMk id="5" creationId="{F4572CC1-6704-9D8F-3A20-A1C0327FD652}"/>
+          </ac:spMkLst>
+        </pc:spChg>
+      </pc:sldChg>
+      <pc:sldChg chg="del">
+        <pc:chgData name="María Noelia Romero" userId="2133f5768dfc5791" providerId="LiveId" clId="{0168CA65-A813-5033-94B8-EF4605FC29D1}" dt="2026-08-07T19:29:03.007" v="831" actId="2696"/>
+        <pc:sldMkLst>
+          <pc:docMk/>
+          <pc:sldMk cId="2633605042" sldId="414"/>
+        </pc:sldMkLst>
+      </pc:sldChg>
+      <pc:sldChg chg="add">
+        <pc:chgData name="María Noelia Romero" userId="2133f5768dfc5791" providerId="LiveId" clId="{0168CA65-A813-5033-94B8-EF4605FC29D1}" dt="2026-08-07T19:29:13.763" v="836"/>
+        <pc:sldMkLst>
+          <pc:docMk/>
+          <pc:sldMk cId="3186348293" sldId="486"/>
         </pc:sldMkLst>
       </pc:sldChg>
       <pc:sldChg chg="modSp mod">
@@ -291,6 +371,27 @@
             <ac:spMk id="3" creationId="{C1F55BDD-1493-5FB8-8EDB-106F9B362918}"/>
           </ac:spMkLst>
         </pc:spChg>
+      </pc:sldChg>
+      <pc:sldChg chg="del">
+        <pc:chgData name="María Noelia Romero" userId="2133f5768dfc5791" providerId="LiveId" clId="{0168CA65-A813-5033-94B8-EF4605FC29D1}" dt="2026-08-07T19:30:34.246" v="891" actId="2696"/>
+        <pc:sldMkLst>
+          <pc:docMk/>
+          <pc:sldMk cId="1769995523" sldId="521"/>
+        </pc:sldMkLst>
+      </pc:sldChg>
+      <pc:sldChg chg="add">
+        <pc:chgData name="María Noelia Romero" userId="2133f5768dfc5791" providerId="LiveId" clId="{0168CA65-A813-5033-94B8-EF4605FC29D1}" dt="2026-08-07T19:30:31.742" v="889"/>
+        <pc:sldMkLst>
+          <pc:docMk/>
+          <pc:sldMk cId="3421950475" sldId="524"/>
+        </pc:sldMkLst>
+      </pc:sldChg>
+      <pc:sldChg chg="add">
+        <pc:chgData name="María Noelia Romero" userId="2133f5768dfc5791" providerId="LiveId" clId="{0168CA65-A813-5033-94B8-EF4605FC29D1}" dt="2026-08-07T19:30:31.742" v="889"/>
+        <pc:sldMkLst>
+          <pc:docMk/>
+          <pc:sldMk cId="658863819" sldId="525"/>
+        </pc:sldMkLst>
       </pc:sldChg>
     </pc:docChg>
   </pc:docChgLst>
@@ -4075,7 +4176,7 @@
           <a:p>
             <a:fld id="{87047155-560D-CC43-A75F-B08C641787EA}" type="datetimeFigureOut">
               <a:rPr lang="en-US" smtClean="0"/>
-              <a:t>8/3/26</a:t>
+              <a:t>8/7/26</a:t>
             </a:fld>
             <a:endParaRPr lang="en-US"/>
           </a:p>
@@ -4491,7 +4592,7 @@
           <a:p>
             <a:fld id="{7E630DE0-2491-4445-BD47-B1B1930FC5EF}" type="slidenum">
               <a:rPr lang="en-US" smtClean="0"/>
-              <a:t>34</a:t>
+              <a:t>29</a:t>
             </a:fld>
             <a:endParaRPr lang="en-US"/>
           </a:p>
@@ -4575,7 +4676,7 @@
           <a:p>
             <a:fld id="{7E630DE0-2491-4445-BD47-B1B1930FC5EF}" type="slidenum">
               <a:rPr lang="en-US" smtClean="0"/>
-              <a:t>36</a:t>
+              <a:t>31</a:t>
             </a:fld>
             <a:endParaRPr lang="en-US"/>
           </a:p>
@@ -4693,7 +4794,7 @@
           <a:p>
             <a:fld id="{7E630DE0-2491-4445-BD47-B1B1930FC5EF}" type="slidenum">
               <a:rPr lang="en-US" smtClean="0"/>
-              <a:t>39</a:t>
+              <a:t>34</a:t>
             </a:fld>
             <a:endParaRPr lang="en-US"/>
           </a:p>
@@ -4777,7 +4878,7 @@
           <a:p>
             <a:fld id="{A7ED07FA-7792-F649-B523-FCAF9068A01B}" type="slidenum">
               <a:rPr lang="es-ES_tradnl" smtClean="0"/>
-              <a:t>40</a:t>
+              <a:t>35</a:t>
             </a:fld>
             <a:endParaRPr lang="es-ES_tradnl"/>
           </a:p>
@@ -5176,90 +5277,6 @@
           <a:bodyPr/>
           <a:lstStyle/>
           <a:p>
-            <a:endParaRPr lang="es-ES_tradnl" dirty="0"/>
-          </a:p>
-        </p:txBody>
-      </p:sp>
-      <p:sp>
-        <p:nvSpPr>
-          <p:cNvPr id="4" name="Slide Number Placeholder 3"/>
-          <p:cNvSpPr>
-            <a:spLocks noGrp="1"/>
-          </p:cNvSpPr>
-          <p:nvPr>
-            <p:ph type="sldNum" sz="quarter" idx="5"/>
-          </p:nvPr>
-        </p:nvSpPr>
-        <p:spPr/>
-        <p:txBody>
-          <a:bodyPr/>
-          <a:lstStyle/>
-          <a:p>
-            <a:fld id="{7E630DE0-2491-4445-BD47-B1B1930FC5EF}" type="slidenum">
-              <a:rPr lang="en-US" smtClean="0"/>
-              <a:t>12</a:t>
-            </a:fld>
-            <a:endParaRPr lang="en-US"/>
-          </a:p>
-        </p:txBody>
-      </p:sp>
-    </p:spTree>
-    <p:extLst>
-      <p:ext uri="{BB962C8B-B14F-4D97-AF65-F5344CB8AC3E}">
-        <p14:creationId xmlns:p14="http://schemas.microsoft.com/office/powerpoint/2010/main" val="78767791"/>
-      </p:ext>
-    </p:extLst>
-  </p:cSld>
-  <p:clrMapOvr>
-    <a:masterClrMapping/>
-  </p:clrMapOvr>
-</p:notes>
-</file>
-
-<file path=ppt/notesSlides/notesSlide7.xml><?xml version="1.0" encoding="utf-8"?>
-<p:notes xmlns:a="http://schemas.openxmlformats.org/drawingml/2006/main" xmlns:r="http://schemas.openxmlformats.org/officeDocument/2006/relationships" xmlns:p="http://schemas.openxmlformats.org/presentationml/2006/main">
-  <p:cSld>
-    <p:spTree>
-      <p:nvGrpSpPr>
-        <p:cNvPr id="1" name=""/>
-        <p:cNvGrpSpPr/>
-        <p:nvPr/>
-      </p:nvGrpSpPr>
-      <p:grpSpPr>
-        <a:xfrm>
-          <a:off x="0" y="0"/>
-          <a:ext cx="0" cy="0"/>
-          <a:chOff x="0" y="0"/>
-          <a:chExt cx="0" cy="0"/>
-        </a:xfrm>
-      </p:grpSpPr>
-      <p:sp>
-        <p:nvSpPr>
-          <p:cNvPr id="2" name="Slide Image Placeholder 1"/>
-          <p:cNvSpPr>
-            <a:spLocks noGrp="1" noRot="1" noChangeAspect="1"/>
-          </p:cNvSpPr>
-          <p:nvPr>
-            <p:ph type="sldImg"/>
-          </p:nvPr>
-        </p:nvSpPr>
-        <p:spPr/>
-      </p:sp>
-      <p:sp>
-        <p:nvSpPr>
-          <p:cNvPr id="3" name="Notes Placeholder 2"/>
-          <p:cNvSpPr>
-            <a:spLocks noGrp="1"/>
-          </p:cNvSpPr>
-          <p:nvPr>
-            <p:ph type="body" idx="1"/>
-          </p:nvPr>
-        </p:nvSpPr>
-        <p:spPr/>
-        <p:txBody>
-          <a:bodyPr/>
-          <a:lstStyle/>
-          <a:p>
             <a:pPr marL="0" marR="0" lvl="0" indent="0" algn="l" defTabSz="914400" rtl="0" eaLnBrk="1" fontAlgn="auto" latinLnBrk="0" hangingPunct="1">
               <a:lnSpc>
                 <a:spcPct val="100000"/>
@@ -5320,7 +5337,7 @@
           <a:p>
             <a:fld id="{7E630DE0-2491-4445-BD47-B1B1930FC5EF}" type="slidenum">
               <a:rPr lang="en-US" smtClean="0"/>
-              <a:t>18</a:t>
+              <a:t>13</a:t>
             </a:fld>
             <a:endParaRPr lang="en-US"/>
           </a:p>
@@ -5339,7 +5356,7 @@
 </p:notes>
 </file>
 
-<file path=ppt/notesSlides/notesSlide8.xml><?xml version="1.0" encoding="utf-8"?>
+<file path=ppt/notesSlides/notesSlide7.xml><?xml version="1.0" encoding="utf-8"?>
 <p:notes xmlns:a="http://schemas.openxmlformats.org/drawingml/2006/main" xmlns:r="http://schemas.openxmlformats.org/officeDocument/2006/relationships" xmlns:p="http://schemas.openxmlformats.org/presentationml/2006/main">
   <p:cSld>
     <p:spTree>
@@ -5404,7 +5421,7 @@
           <a:p>
             <a:fld id="{7E630DE0-2491-4445-BD47-B1B1930FC5EF}" type="slidenum">
               <a:rPr lang="en-US" smtClean="0"/>
-              <a:t>25</a:t>
+              <a:t>20</a:t>
             </a:fld>
             <a:endParaRPr lang="en-US"/>
           </a:p>
@@ -5423,7 +5440,7 @@
 </p:notes>
 </file>
 
-<file path=ppt/notesSlides/notesSlide9.xml><?xml version="1.0" encoding="utf-8"?>
+<file path=ppt/notesSlides/notesSlide8.xml><?xml version="1.0" encoding="utf-8"?>
 <p:notes xmlns:a="http://schemas.openxmlformats.org/drawingml/2006/main" xmlns:r="http://schemas.openxmlformats.org/officeDocument/2006/relationships" xmlns:p="http://schemas.openxmlformats.org/presentationml/2006/main">
   <p:cSld>
     <p:spTree>
@@ -5505,7 +5522,7 @@
           <a:p>
             <a:fld id="{7E630DE0-2491-4445-BD47-B1B1930FC5EF}" type="slidenum">
               <a:rPr lang="en-US" smtClean="0"/>
-              <a:t>30</a:t>
+              <a:t>25</a:t>
             </a:fld>
             <a:endParaRPr lang="en-US"/>
           </a:p>
@@ -5515,6 +5532,123 @@
     <p:extLst>
       <p:ext uri="{BB962C8B-B14F-4D97-AF65-F5344CB8AC3E}">
         <p14:creationId xmlns:p14="http://schemas.microsoft.com/office/powerpoint/2010/main" val="1330222732"/>
+      </p:ext>
+    </p:extLst>
+  </p:cSld>
+  <p:clrMapOvr>
+    <a:masterClrMapping/>
+  </p:clrMapOvr>
+</p:notes>
+</file>
+
+<file path=ppt/notesSlides/notesSlide9.xml><?xml version="1.0" encoding="utf-8"?>
+<p:notes xmlns:a="http://schemas.openxmlformats.org/drawingml/2006/main" xmlns:r="http://schemas.openxmlformats.org/officeDocument/2006/relationships" xmlns:p="http://schemas.openxmlformats.org/presentationml/2006/main">
+  <p:cSld>
+    <p:spTree>
+      <p:nvGrpSpPr>
+        <p:cNvPr id="1" name=""/>
+        <p:cNvGrpSpPr/>
+        <p:nvPr/>
+      </p:nvGrpSpPr>
+      <p:grpSpPr>
+        <a:xfrm>
+          <a:off x="0" y="0"/>
+          <a:ext cx="0" cy="0"/>
+          <a:chOff x="0" y="0"/>
+          <a:chExt cx="0" cy="0"/>
+        </a:xfrm>
+      </p:grpSpPr>
+      <p:sp>
+        <p:nvSpPr>
+          <p:cNvPr id="2" name="Marcador de imagen de diapositiva 1"/>
+          <p:cNvSpPr>
+            <a:spLocks noGrp="1" noRot="1" noChangeAspect="1"/>
+          </p:cNvSpPr>
+          <p:nvPr>
+            <p:ph type="sldImg"/>
+          </p:nvPr>
+        </p:nvSpPr>
+        <p:spPr/>
+      </p:sp>
+      <p:sp>
+        <p:nvSpPr>
+          <p:cNvPr id="3" name="Marcador de notas 2"/>
+          <p:cNvSpPr>
+            <a:spLocks noGrp="1"/>
+          </p:cNvSpPr>
+          <p:nvPr>
+            <p:ph type="body" idx="1"/>
+          </p:nvPr>
+        </p:nvSpPr>
+        <p:spPr/>
+        <p:txBody>
+          <a:bodyPr/>
+          <a:lstStyle/>
+          <a:p>
+            <a:r>
+              <a:rPr lang="es-ES_tradnl" b="1" dirty="0"/>
+              <a:t>Interpretación: </a:t>
+            </a:r>
+            <a:r>
+              <a:rPr lang="es-ES_tradnl" b="0" dirty="0"/>
+              <a:t>“Si el delito más grave del caso fue un delito contra la propiedad con violencia, las probabilidades de reincidencia violenta son 176% mayores, manteniendo todas las demás variables constantes.” (p.579)</a:t>
+            </a:r>
+          </a:p>
+          <a:p>
+            <a:pPr marL="0" marR="0" lvl="0" indent="0" algn="l" defTabSz="914400" rtl="0" eaLnBrk="1" fontAlgn="auto" latinLnBrk="0" hangingPunct="1">
+              <a:lnSpc>
+                <a:spcPct val="100000"/>
+              </a:lnSpc>
+              <a:spcBef>
+                <a:spcPts val="0"/>
+              </a:spcBef>
+              <a:spcAft>
+                <a:spcPts val="0"/>
+              </a:spcAft>
+              <a:buClrTx/>
+              <a:buSzTx/>
+              <a:buFontTx/>
+              <a:buNone/>
+              <a:tabLst/>
+              <a:defRPr/>
+            </a:pPr>
+            <a:r>
+              <a:rPr lang="es-ES_tradnl" b="0" dirty="0"/>
+              <a:t>“El país de nacimiento muestra que nacer en algunos países conlleva un gran aumento en la probabilidad de violencia. Los perpetradores nacidos en las Antillas Neerlandesas, Aruba o Surinam tienen aproximadamente un 30 % más de probabilidades de reincidencia, independientemente de las demás características.” (p.579 y 580)</a:t>
+            </a:r>
+          </a:p>
+          <a:p>
+            <a:endParaRPr lang="es-ES_tradnl" b="0" dirty="0"/>
+          </a:p>
+        </p:txBody>
+      </p:sp>
+      <p:sp>
+        <p:nvSpPr>
+          <p:cNvPr id="4" name="Marcador de número de diapositiva 3"/>
+          <p:cNvSpPr>
+            <a:spLocks noGrp="1"/>
+          </p:cNvSpPr>
+          <p:nvPr>
+            <p:ph type="sldNum" sz="quarter" idx="5"/>
+          </p:nvPr>
+        </p:nvSpPr>
+        <p:spPr/>
+        <p:txBody>
+          <a:bodyPr/>
+          <a:lstStyle/>
+          <a:p>
+            <a:fld id="{7E630DE0-2491-4445-BD47-B1B1930FC5EF}" type="slidenum">
+              <a:rPr lang="en-US" smtClean="0"/>
+              <a:t>26</a:t>
+            </a:fld>
+            <a:endParaRPr lang="en-US"/>
+          </a:p>
+        </p:txBody>
+      </p:sp>
+    </p:spTree>
+    <p:extLst>
+      <p:ext uri="{BB962C8B-B14F-4D97-AF65-F5344CB8AC3E}">
+        <p14:creationId xmlns:p14="http://schemas.microsoft.com/office/powerpoint/2010/main" val="3048783414"/>
       </p:ext>
     </p:extLst>
   </p:cSld>
@@ -5671,7 +5805,7 @@
           <a:p>
             <a:fld id="{A7EB1630-065F-844C-B6A7-8C58AC6D2693}" type="datetimeFigureOut">
               <a:rPr lang="en-US" smtClean="0"/>
-              <a:t>8/3/26</a:t>
+              <a:t>8/7/26</a:t>
             </a:fld>
             <a:endParaRPr lang="en-US"/>
           </a:p>
@@ -5869,7 +6003,7 @@
           <a:p>
             <a:fld id="{A7EB1630-065F-844C-B6A7-8C58AC6D2693}" type="datetimeFigureOut">
               <a:rPr lang="en-US" smtClean="0"/>
-              <a:t>8/3/26</a:t>
+              <a:t>8/7/26</a:t>
             </a:fld>
             <a:endParaRPr lang="en-US"/>
           </a:p>
@@ -6077,7 +6211,7 @@
           <a:p>
             <a:fld id="{A7EB1630-065F-844C-B6A7-8C58AC6D2693}" type="datetimeFigureOut">
               <a:rPr lang="en-US" smtClean="0"/>
-              <a:t>8/3/26</a:t>
+              <a:t>8/7/26</a:t>
             </a:fld>
             <a:endParaRPr lang="en-US"/>
           </a:p>
@@ -6275,7 +6409,7 @@
           <a:p>
             <a:fld id="{A7EB1630-065F-844C-B6A7-8C58AC6D2693}" type="datetimeFigureOut">
               <a:rPr lang="en-US" smtClean="0"/>
-              <a:t>8/3/26</a:t>
+              <a:t>8/7/26</a:t>
             </a:fld>
             <a:endParaRPr lang="en-US"/>
           </a:p>
@@ -6550,7 +6684,7 @@
           <a:p>
             <a:fld id="{A7EB1630-065F-844C-B6A7-8C58AC6D2693}" type="datetimeFigureOut">
               <a:rPr lang="en-US" smtClean="0"/>
-              <a:t>8/3/26</a:t>
+              <a:t>8/7/26</a:t>
             </a:fld>
             <a:endParaRPr lang="en-US"/>
           </a:p>
@@ -6815,7 +6949,7 @@
           <a:p>
             <a:fld id="{A7EB1630-065F-844C-B6A7-8C58AC6D2693}" type="datetimeFigureOut">
               <a:rPr lang="en-US" smtClean="0"/>
-              <a:t>8/3/26</a:t>
+              <a:t>8/7/26</a:t>
             </a:fld>
             <a:endParaRPr lang="en-US"/>
           </a:p>
@@ -7227,7 +7361,7 @@
           <a:p>
             <a:fld id="{A7EB1630-065F-844C-B6A7-8C58AC6D2693}" type="datetimeFigureOut">
               <a:rPr lang="en-US" smtClean="0"/>
-              <a:t>8/3/26</a:t>
+              <a:t>8/7/26</a:t>
             </a:fld>
             <a:endParaRPr lang="en-US"/>
           </a:p>
@@ -7368,7 +7502,7 @@
           <a:p>
             <a:fld id="{A7EB1630-065F-844C-B6A7-8C58AC6D2693}" type="datetimeFigureOut">
               <a:rPr lang="en-US" smtClean="0"/>
-              <a:t>8/3/26</a:t>
+              <a:t>8/7/26</a:t>
             </a:fld>
             <a:endParaRPr lang="en-US"/>
           </a:p>
@@ -7481,7 +7615,7 @@
           <a:p>
             <a:fld id="{A7EB1630-065F-844C-B6A7-8C58AC6D2693}" type="datetimeFigureOut">
               <a:rPr lang="en-US" smtClean="0"/>
-              <a:t>8/3/26</a:t>
+              <a:t>8/7/26</a:t>
             </a:fld>
             <a:endParaRPr lang="en-US"/>
           </a:p>
@@ -7792,7 +7926,7 @@
           <a:p>
             <a:fld id="{A7EB1630-065F-844C-B6A7-8C58AC6D2693}" type="datetimeFigureOut">
               <a:rPr lang="en-US" smtClean="0"/>
-              <a:t>8/3/26</a:t>
+              <a:t>8/7/26</a:t>
             </a:fld>
             <a:endParaRPr lang="en-US"/>
           </a:p>
@@ -8080,7 +8214,7 @@
           <a:p>
             <a:fld id="{A7EB1630-065F-844C-B6A7-8C58AC6D2693}" type="datetimeFigureOut">
               <a:rPr lang="en-US" smtClean="0"/>
-              <a:t>8/3/26</a:t>
+              <a:t>8/7/26</a:t>
             </a:fld>
             <a:endParaRPr lang="en-US"/>
           </a:p>
@@ -8324,7 +8458,7 @@
             <a:fld id="{A7EB1630-065F-844C-B6A7-8C58AC6D2693}" type="datetimeFigureOut">
               <a:rPr lang="es-ES_tradnl" noProof="0" smtClean="0"/>
               <a:pPr/>
-              <a:t>3/8/26</a:t>
+              <a:t>7/8/26</a:t>
             </a:fld>
             <a:endParaRPr lang="es-ES_tradnl" noProof="0"/>
           </a:p>
@@ -9073,7 +9207,7 @@
             </a:pPr>
             <a:r>
               <a:rPr lang="es-ES_tradnl" dirty="0"/>
-              <a:t>Como banco, </a:t>
+              <a:t>Como banco </a:t>
             </a:r>
           </a:p>
           <a:p>
@@ -9848,10 +9982,7 @@
                           </a:pPr>
                           <a14:m>
                             <m:oMathPara xmlns:m="http://schemas.openxmlformats.org/officeDocument/2006/math">
-                              <m:oMathParaPr>
-                                <m:jc m:val="centerGroup"/>
-                              </m:oMathParaPr>
-                              <m:oMath xmlns:m="http://schemas.openxmlformats.org/officeDocument/2006/math">
+                              <m:oMath>
                                 <m:r>
                                   <a:rPr lang="es-ES_tradnl" sz="2300" i="1" noProof="0" dirty="0" smtClean="0">
                                     <a:latin typeface="Cambria Math" panose="02040503050406030204" pitchFamily="18" charset="0"/>
@@ -10045,10 +10176,7 @@
                           <a:pPr algn="ctr"/>
                           <a14:m>
                             <m:oMathPara xmlns:m="http://schemas.openxmlformats.org/officeDocument/2006/math">
-                              <m:oMathParaPr>
-                                <m:jc m:val="centerGroup"/>
-                              </m:oMathParaPr>
-                              <m:oMath xmlns:m="http://schemas.openxmlformats.org/officeDocument/2006/math">
+                              <m:oMath>
                                 <m:r>
                                   <a:rPr lang="es-ES_tradnl" sz="2300" i="1" noProof="0" dirty="0" smtClean="0">
                                     <a:latin typeface="Cambria Math" panose="02040503050406030204" pitchFamily="18" charset="0"/>
@@ -10123,10 +10251,7 @@
                           <a:pPr algn="ctr"/>
                           <a14:m>
                             <m:oMathPara xmlns:m="http://schemas.openxmlformats.org/officeDocument/2006/math">
-                              <m:oMathParaPr>
-                                <m:jc m:val="centerGroup"/>
-                              </m:oMathParaPr>
-                              <m:oMath xmlns:m="http://schemas.openxmlformats.org/officeDocument/2006/math">
+                              <m:oMath>
                                 <m:r>
                                   <a:rPr lang="es-ES_tradnl" sz="2300" i="1" noProof="0" dirty="0" smtClean="0">
                                     <a:latin typeface="Cambria Math" panose="02040503050406030204" pitchFamily="18" charset="0"/>
@@ -11155,6 +11280,149 @@
               </a:graphicData>
             </a:graphic>
           </p:graphicFrame>
+        </mc:Fallback>
+      </mc:AlternateContent>
+      <mc:AlternateContent xmlns:mc="http://schemas.openxmlformats.org/markup-compatibility/2006">
+        <mc:Choice xmlns:a14="http://schemas.microsoft.com/office/drawing/2010/main" Requires="a14">
+          <p:sp>
+            <p:nvSpPr>
+              <p:cNvPr id="5" name="Rectángulo 4">
+                <a:extLst>
+                  <a:ext uri="{FF2B5EF4-FFF2-40B4-BE49-F238E27FC236}">
+                    <a16:creationId xmlns:a16="http://schemas.microsoft.com/office/drawing/2014/main" id="{F4572CC1-6704-9D8F-3A20-A1C0327FD652}"/>
+                  </a:ext>
+                </a:extLst>
+              </p:cNvPr>
+              <p:cNvSpPr/>
+              <p:nvPr/>
+            </p:nvSpPr>
+            <p:spPr>
+              <a:xfrm>
+                <a:off x="1179095" y="3573379"/>
+                <a:ext cx="2322094" cy="782053"/>
+              </a:xfrm>
+              <a:prstGeom prst="rect">
+                <a:avLst/>
+              </a:prstGeom>
+              <a:noFill/>
+              <a:ln>
+                <a:solidFill>
+                  <a:srgbClr val="FF0000"/>
+                </a:solidFill>
+              </a:ln>
+            </p:spPr>
+            <p:style>
+              <a:lnRef idx="2">
+                <a:schemeClr val="accent1">
+                  <a:shade val="15000"/>
+                </a:schemeClr>
+              </a:lnRef>
+              <a:fillRef idx="1">
+                <a:schemeClr val="accent1"/>
+              </a:fillRef>
+              <a:effectRef idx="0">
+                <a:schemeClr val="accent1"/>
+              </a:effectRef>
+              <a:fontRef idx="minor">
+                <a:schemeClr val="lt1"/>
+              </a:fontRef>
+            </p:style>
+            <p:txBody>
+              <a:bodyPr rtlCol="0" anchor="ctr"/>
+              <a:lstStyle/>
+              <a:p>
+                <a:pPr algn="ctr"/>
+                <a:r>
+                  <a:rPr lang="es-ES_tradnl" dirty="0">
+                    <a:solidFill>
+                      <a:srgbClr val="FF0000"/>
+                    </a:solidFill>
+                    <a:latin typeface="Gill Sans Nova Light" panose="020B0302020104020203" pitchFamily="34" charset="0"/>
+                  </a:rPr>
+                  <a:t>Depende de cómo definimos </a:t>
+                </a:r>
+                <a14:m>
+                  <m:oMath xmlns:m="http://schemas.openxmlformats.org/officeDocument/2006/math">
+                    <m:r>
+                      <a:rPr lang="es-ES_tradnl" i="1">
+                        <a:solidFill>
+                          <a:srgbClr val="FF0000"/>
+                        </a:solidFill>
+                        <a:latin typeface="Cambria Math" panose="02040503050406030204" pitchFamily="18" charset="0"/>
+                        <a:ea typeface="Cambria Math" panose="02040503050406030204" pitchFamily="18" charset="0"/>
+                      </a:rPr>
+                      <m:t>𝑌</m:t>
+                    </m:r>
+                    <m:r>
+                      <a:rPr lang="en-US" b="0" i="1" smtClean="0">
+                        <a:solidFill>
+                          <a:srgbClr val="FF0000"/>
+                        </a:solidFill>
+                        <a:latin typeface="Cambria Math" panose="02040503050406030204" pitchFamily="18" charset="0"/>
+                        <a:ea typeface="Cambria Math" panose="02040503050406030204" pitchFamily="18" charset="0"/>
+                      </a:rPr>
+                      <m:t>=1</m:t>
+                    </m:r>
+                  </m:oMath>
+                </a14:m>
+                <a:endParaRPr lang="es-ES_tradnl" dirty="0">
+                  <a:solidFill>
+                    <a:srgbClr val="FF0000"/>
+                  </a:solidFill>
+                  <a:latin typeface="Gill Sans Nova Light" panose="020B0302020104020203" pitchFamily="34" charset="0"/>
+                </a:endParaRPr>
+              </a:p>
+            </p:txBody>
+          </p:sp>
+        </mc:Choice>
+        <mc:Fallback>
+          <p:sp>
+            <p:nvSpPr>
+              <p:cNvPr id="5" name="Rectángulo 4">
+                <a:extLst>
+                  <a:ext uri="{FF2B5EF4-FFF2-40B4-BE49-F238E27FC236}">
+                    <a16:creationId xmlns:a16="http://schemas.microsoft.com/office/drawing/2014/main" id="{F4572CC1-6704-9D8F-3A20-A1C0327FD652}"/>
+                  </a:ext>
+                </a:extLst>
+              </p:cNvPr>
+              <p:cNvSpPr>
+                <a:spLocks noRot="1" noChangeAspect="1" noMove="1" noResize="1" noEditPoints="1" noAdjustHandles="1" noChangeArrowheads="1" noChangeShapeType="1" noTextEdit="1"/>
+              </p:cNvSpPr>
+              <p:nvPr/>
+            </p:nvSpPr>
+            <p:spPr>
+              <a:xfrm>
+                <a:off x="1179095" y="3573379"/>
+                <a:ext cx="2322094" cy="782053"/>
+              </a:xfrm>
+              <a:prstGeom prst="rect">
+                <a:avLst/>
+              </a:prstGeom>
+              <a:blipFill>
+                <a:blip r:embed="rId3"/>
+                <a:stretch>
+                  <a:fillRect b="-1563"/>
+                </a:stretch>
+              </a:blipFill>
+              <a:ln>
+                <a:solidFill>
+                  <a:srgbClr val="FF0000"/>
+                </a:solidFill>
+              </a:ln>
+            </p:spPr>
+            <p:txBody>
+              <a:bodyPr/>
+              <a:lstStyle/>
+              <a:p>
+                <a:r>
+                  <a:rPr lang="es-ES_tradnl">
+                    <a:noFill/>
+                  </a:rPr>
+                  <a:t> </a:t>
+                </a:r>
+              </a:p>
+            </p:txBody>
+          </p:sp>
         </mc:Fallback>
       </mc:AlternateContent>
     </p:spTree>
@@ -11367,6 +11635,51 @@
                       </p:childTnLst>
                     </p:cTn>
                   </p:par>
+                  <p:par>
+                    <p:cTn id="19" fill="hold">
+                      <p:stCondLst>
+                        <p:cond delay="indefinite"/>
+                      </p:stCondLst>
+                      <p:childTnLst>
+                        <p:par>
+                          <p:cTn id="20" fill="hold">
+                            <p:stCondLst>
+                              <p:cond delay="0"/>
+                            </p:stCondLst>
+                            <p:childTnLst>
+                              <p:par>
+                                <p:cTn id="21" presetID="1" presetClass="entr" presetSubtype="0" fill="hold" grpId="0" nodeType="clickEffect">
+                                  <p:stCondLst>
+                                    <p:cond delay="0"/>
+                                  </p:stCondLst>
+                                  <p:childTnLst>
+                                    <p:set>
+                                      <p:cBhvr>
+                                        <p:cTn id="22" dur="1" fill="hold">
+                                          <p:stCondLst>
+                                            <p:cond delay="0"/>
+                                          </p:stCondLst>
+                                        </p:cTn>
+                                        <p:tgtEl>
+                                          <p:spTgt spid="5"/>
+                                        </p:tgtEl>
+                                        <p:attrNameLst>
+                                          <p:attrName>style.visibility</p:attrName>
+                                        </p:attrNameLst>
+                                      </p:cBhvr>
+                                      <p:to>
+                                        <p:strVal val="visible"/>
+                                      </p:to>
+                                    </p:set>
+                                  </p:childTnLst>
+                                </p:cTn>
+                              </p:par>
+                            </p:childTnLst>
+                          </p:cTn>
+                        </p:par>
+                      </p:childTnLst>
+                    </p:cTn>
+                  </p:par>
                 </p:childTnLst>
               </p:cTn>
               <p:prevCondLst>
@@ -11390,6 +11703,7 @@
     </p:tnLst>
     <p:bldLst>
       <p:bldP spid="3" grpId="0" build="p"/>
+      <p:bldP spid="5" grpId="0" animBg="1"/>
     </p:bldLst>
   </p:timing>
 </p:sld>
@@ -11554,7 +11868,7 @@
                     <m:func>
                       <m:funcPr>
                         <m:ctrlPr>
-                          <a:rPr lang="en-US" b="0" i="1" smtClean="0">
+                          <a:rPr lang="en-US" b="0" i="0" smtClean="0">
                             <a:latin typeface="Cambria Math" panose="02040503050406030204" pitchFamily="18" charset="0"/>
                             <a:ea typeface="Cambria Math" panose="02040503050406030204" pitchFamily="18" charset="0"/>
                           </a:rPr>
@@ -11690,7 +12004,7 @@
                     <m:sSub>
                       <m:sSubPr>
                         <m:ctrlPr>
-                          <a:rPr lang="en-US" i="1">
+                          <a:rPr lang="es-ES_tradnl" i="1">
                             <a:latin typeface="Cambria Math" panose="02040503050406030204" pitchFamily="18" charset="0"/>
                             <a:ea typeface="Cambria Math" panose="02040503050406030204" pitchFamily="18" charset="0"/>
                           </a:rPr>
@@ -11746,7 +12060,7 @@
                     <m:func>
                       <m:funcPr>
                         <m:ctrlPr>
-                          <a:rPr lang="en-US" b="0" i="1" smtClean="0">
+                          <a:rPr lang="en-US" b="0" i="0" smtClean="0">
                             <a:latin typeface="Cambria Math" panose="02040503050406030204" pitchFamily="18" charset="0"/>
                             <a:ea typeface="Cambria Math" panose="02040503050406030204" pitchFamily="18" charset="0"/>
                           </a:rPr>
@@ -11874,7 +12188,7 @@
                     <m:sSub>
                       <m:sSubPr>
                         <m:ctrlPr>
-                          <a:rPr lang="en-US" i="1">
+                          <a:rPr lang="es-ES_tradnl" i="1">
                             <a:latin typeface="Cambria Math" panose="02040503050406030204" pitchFamily="18" charset="0"/>
                             <a:ea typeface="Cambria Math" panose="02040503050406030204" pitchFamily="18" charset="0"/>
                           </a:rPr>
@@ -12074,7 +12388,7 @@
                     <m:sSub>
                       <m:sSubPr>
                         <m:ctrlPr>
-                          <a:rPr lang="en-US" sz="3200" b="0" i="1" noProof="0" smtClean="0">
+                          <a:rPr lang="es-ES_tradnl" sz="3200" b="0" i="1" noProof="0" smtClean="0">
                             <a:solidFill>
                               <a:schemeClr val="tx1"/>
                             </a:solidFill>
@@ -12247,7 +12561,7 @@
           <p:cNvPr id="2" name="Title 1">
             <a:extLst>
               <a:ext uri="{FF2B5EF4-FFF2-40B4-BE49-F238E27FC236}">
-                <a16:creationId xmlns:a16="http://schemas.microsoft.com/office/drawing/2014/main" id="{78C42471-9418-E3E3-C7E5-30087178FA99}"/>
+                <a16:creationId xmlns:a16="http://schemas.microsoft.com/office/drawing/2014/main" id="{2A19CDA2-FBFD-4435-09C4-88FAECC458A5}"/>
               </a:ext>
             </a:extLst>
           </p:cNvPr>
@@ -12265,88 +12579,571 @@
           <a:p>
             <a:r>
               <a:rPr lang="es-ES_tradnl" dirty="0"/>
-              <a:t>Clasificador de Bayes: </a:t>
-            </a:r>
-            <a:r>
-              <a:rPr lang="es-ES_tradnl" i="1" dirty="0">
-                <a:solidFill>
-                  <a:schemeClr val="tx1">
-                    <a:lumMod val="50000"/>
-                    <a:lumOff val="50000"/>
-                  </a:schemeClr>
-                </a:solidFill>
-              </a:rPr>
-              <a:t>Formalmente, la regla de decisión</a:t>
+              <a:t>Posibles soluciones</a:t>
             </a:r>
           </a:p>
         </p:txBody>
       </p:sp>
+      <mc:AlternateContent xmlns:mc="http://schemas.openxmlformats.org/markup-compatibility/2006" xmlns:a14="http://schemas.microsoft.com/office/drawing/2010/main">
+        <mc:Choice Requires="a14">
+          <p:sp>
+            <p:nvSpPr>
+              <p:cNvPr id="3" name="Content Placeholder 2">
+                <a:extLst>
+                  <a:ext uri="{FF2B5EF4-FFF2-40B4-BE49-F238E27FC236}">
+                    <a16:creationId xmlns:a16="http://schemas.microsoft.com/office/drawing/2014/main" id="{42DE2FE6-2D21-0373-E669-031C93ACF98C}"/>
+                  </a:ext>
+                </a:extLst>
+              </p:cNvPr>
+              <p:cNvSpPr>
+                <a:spLocks noGrp="1"/>
+              </p:cNvSpPr>
+              <p:nvPr>
+                <p:ph idx="1"/>
+              </p:nvPr>
+            </p:nvSpPr>
+            <p:spPr/>
+            <p:txBody>
+              <a:bodyPr>
+                <a:normAutofit/>
+              </a:bodyPr>
+              <a:lstStyle/>
+              <a:p>
+                <a:pPr marL="514350" indent="-514350">
+                  <a:lnSpc>
+                    <a:spcPct val="120000"/>
+                  </a:lnSpc>
+                  <a:buFont typeface="+mj-lt"/>
+                  <a:buAutoNum type="arabicPeriod"/>
+                </a:pPr>
+                <a:r>
+                  <a:rPr lang="es-ES_tradnl" dirty="0"/>
+                  <a:t>Cuatro modelos para </a:t>
+                </a:r>
+                <a14:m>
+                  <m:oMath xmlns:m="http://schemas.openxmlformats.org/officeDocument/2006/math">
+                    <m:r>
+                      <a:rPr lang="es-ES_tradnl" b="0" i="1" smtClean="0">
+                        <a:solidFill>
+                          <a:srgbClr val="0070C0"/>
+                        </a:solidFill>
+                        <a:latin typeface="Cambria Math" panose="02040503050406030204" pitchFamily="18" charset="0"/>
+                        <a:ea typeface="Cambria Math" panose="02040503050406030204" pitchFamily="18" charset="0"/>
+                      </a:rPr>
+                      <m:t>𝑝</m:t>
+                    </m:r>
+                    <m:r>
+                      <a:rPr lang="es-ES_tradnl" b="0" i="1" smtClean="0">
+                        <a:solidFill>
+                          <a:srgbClr val="0070C0"/>
+                        </a:solidFill>
+                        <a:latin typeface="Cambria Math" panose="02040503050406030204" pitchFamily="18" charset="0"/>
+                        <a:ea typeface="Cambria Math" panose="02040503050406030204" pitchFamily="18" charset="0"/>
+                      </a:rPr>
+                      <m:t>=</m:t>
+                    </m:r>
+                    <m:func>
+                      <m:funcPr>
+                        <m:ctrlPr>
+                          <a:rPr lang="es-ES_tradnl" b="0" i="0" smtClean="0">
+                            <a:solidFill>
+                              <a:srgbClr val="0070C0"/>
+                            </a:solidFill>
+                            <a:latin typeface="Cambria Math" panose="02040503050406030204" pitchFamily="18" charset="0"/>
+                            <a:ea typeface="Cambria Math" panose="02040503050406030204" pitchFamily="18" charset="0"/>
+                          </a:rPr>
+                        </m:ctrlPr>
+                      </m:funcPr>
+                      <m:fName>
+                        <m:r>
+                          <m:rPr>
+                            <m:sty m:val="p"/>
+                          </m:rPr>
+                          <a:rPr lang="es-ES_tradnl" b="0" i="0" smtClean="0">
+                            <a:solidFill>
+                              <a:srgbClr val="0070C0"/>
+                            </a:solidFill>
+                            <a:latin typeface="Cambria Math" panose="02040503050406030204" pitchFamily="18" charset="0"/>
+                            <a:ea typeface="Cambria Math" panose="02040503050406030204" pitchFamily="18" charset="0"/>
+                          </a:rPr>
+                          <m:t>Pr</m:t>
+                        </m:r>
+                      </m:fName>
+                      <m:e>
+                        <m:d>
+                          <m:dPr>
+                            <m:ctrlPr>
+                              <a:rPr lang="es-ES_tradnl" b="0" i="1" smtClean="0">
+                                <a:solidFill>
+                                  <a:srgbClr val="0070C0"/>
+                                </a:solidFill>
+                                <a:latin typeface="Cambria Math" panose="02040503050406030204" pitchFamily="18" charset="0"/>
+                                <a:ea typeface="Cambria Math" panose="02040503050406030204" pitchFamily="18" charset="0"/>
+                              </a:rPr>
+                            </m:ctrlPr>
+                          </m:dPr>
+                          <m:e>
+                            <m:r>
+                              <a:rPr lang="es-ES_tradnl" b="0" i="1" smtClean="0">
+                                <a:solidFill>
+                                  <a:srgbClr val="0070C0"/>
+                                </a:solidFill>
+                                <a:latin typeface="Cambria Math" panose="02040503050406030204" pitchFamily="18" charset="0"/>
+                                <a:ea typeface="Cambria Math" panose="02040503050406030204" pitchFamily="18" charset="0"/>
+                              </a:rPr>
+                              <m:t>𝑌</m:t>
+                            </m:r>
+                            <m:r>
+                              <a:rPr lang="es-ES_tradnl" b="0" i="1" smtClean="0">
+                                <a:solidFill>
+                                  <a:srgbClr val="0070C0"/>
+                                </a:solidFill>
+                                <a:latin typeface="Cambria Math" panose="02040503050406030204" pitchFamily="18" charset="0"/>
+                                <a:ea typeface="Cambria Math" panose="02040503050406030204" pitchFamily="18" charset="0"/>
+                              </a:rPr>
+                              <m:t>=1|</m:t>
+                            </m:r>
+                            <m:r>
+                              <a:rPr lang="es-ES_tradnl" b="0" i="1" smtClean="0">
+                                <a:solidFill>
+                                  <a:srgbClr val="0070C0"/>
+                                </a:solidFill>
+                                <a:latin typeface="Cambria Math" panose="02040503050406030204" pitchFamily="18" charset="0"/>
+                                <a:ea typeface="Cambria Math" panose="02040503050406030204" pitchFamily="18" charset="0"/>
+                              </a:rPr>
+                              <m:t>𝑋</m:t>
+                            </m:r>
+                          </m:e>
+                        </m:d>
+                      </m:e>
+                    </m:func>
+                  </m:oMath>
+                </a14:m>
+                <a:r>
+                  <a:rPr lang="es-ES_tradnl" dirty="0"/>
+                  <a:t>: </a:t>
+                </a:r>
+              </a:p>
+              <a:p>
+                <a:pPr marL="971550" lvl="1" indent="-514350">
+                  <a:lnSpc>
+                    <a:spcPct val="120000"/>
+                  </a:lnSpc>
+                  <a:buFont typeface="+mj-lt"/>
+                  <a:buAutoNum type="arabicPeriod"/>
+                </a:pPr>
+                <a:r>
+                  <a:rPr lang="es-ES_tradnl" dirty="0">
+                    <a:solidFill>
+                      <a:srgbClr val="00B050"/>
+                    </a:solidFill>
+                  </a:rPr>
+                  <a:t>Logístico</a:t>
+                </a:r>
+              </a:p>
+              <a:p>
+                <a:pPr marL="971550" lvl="1" indent="-514350">
+                  <a:lnSpc>
+                    <a:spcPct val="120000"/>
+                  </a:lnSpc>
+                  <a:buFont typeface="+mj-lt"/>
+                  <a:buAutoNum type="arabicPeriod"/>
+                </a:pPr>
+                <a:r>
+                  <a:rPr lang="es-ES_tradnl" dirty="0">
+                    <a:solidFill>
+                      <a:srgbClr val="00B050"/>
+                    </a:solidFill>
+                  </a:rPr>
+                  <a:t>Vecinos Cercanos</a:t>
+                </a:r>
+              </a:p>
+              <a:p>
+                <a:pPr marL="971550" lvl="1" indent="-514350">
+                  <a:lnSpc>
+                    <a:spcPct val="120000"/>
+                  </a:lnSpc>
+                  <a:buFont typeface="+mj-lt"/>
+                  <a:buAutoNum type="arabicPeriod"/>
+                </a:pPr>
+                <a:r>
+                  <a:rPr lang="es-ES_tradnl" dirty="0"/>
+                  <a:t>Análisis discriminante lineal (LDA) </a:t>
+                </a:r>
+              </a:p>
+              <a:p>
+                <a:pPr lvl="2">
+                  <a:lnSpc>
+                    <a:spcPct val="120000"/>
+                  </a:lnSpc>
+                </a:pPr>
+                <a:r>
+                  <a:rPr lang="es-ES_tradnl" dirty="0"/>
+                  <a:t>Extensión a múltiples categorías de </a:t>
+                </a:r>
+                <a14:m>
+                  <m:oMath xmlns:m="http://schemas.openxmlformats.org/officeDocument/2006/math">
+                    <m:r>
+                      <a:rPr lang="es-ES_tradnl" b="0" i="1" smtClean="0">
+                        <a:latin typeface="Cambria Math" panose="02040503050406030204" pitchFamily="18" charset="0"/>
+                        <a:ea typeface="Cambria Math" panose="02040503050406030204" pitchFamily="18" charset="0"/>
+                      </a:rPr>
+                      <m:t>𝑌</m:t>
+                    </m:r>
+                  </m:oMath>
+                </a14:m>
+                <a:r>
+                  <a:rPr lang="es-ES_tradnl" dirty="0"/>
+                  <a:t> -&gt; QDA</a:t>
+                </a:r>
+              </a:p>
+              <a:p>
+                <a:pPr marL="971550" lvl="1" indent="-514350">
+                  <a:lnSpc>
+                    <a:spcPct val="120000"/>
+                  </a:lnSpc>
+                  <a:buFont typeface="+mj-lt"/>
+                  <a:buAutoNum type="arabicPeriod"/>
+                </a:pPr>
+                <a:r>
+                  <a:rPr lang="es-ES_tradnl" dirty="0"/>
+                  <a:t>Naive Bayes</a:t>
+                </a:r>
+              </a:p>
+              <a:p>
+                <a:pPr marL="514350" indent="-514350">
+                  <a:lnSpc>
+                    <a:spcPct val="120000"/>
+                  </a:lnSpc>
+                  <a:buFont typeface="+mj-lt"/>
+                  <a:buAutoNum type="arabicPeriod"/>
+                </a:pPr>
+                <a:r>
+                  <a:rPr lang="es-ES_tradnl" dirty="0"/>
+                  <a:t>Perdida asimétrica. Análisis ROC.</a:t>
+                </a:r>
+              </a:p>
+            </p:txBody>
+          </p:sp>
+        </mc:Choice>
+        <mc:Fallback xmlns="">
+          <p:sp>
+            <p:nvSpPr>
+              <p:cNvPr id="3" name="Content Placeholder 2">
+                <a:extLst>
+                  <a:ext uri="{FF2B5EF4-FFF2-40B4-BE49-F238E27FC236}">
+                    <a16:creationId xmlns:a16="http://schemas.microsoft.com/office/drawing/2014/main" id="{42DE2FE6-2D21-0373-E669-031C93ACF98C}"/>
+                  </a:ext>
+                </a:extLst>
+              </p:cNvPr>
+              <p:cNvSpPr>
+                <a:spLocks noGrp="1" noRot="1" noChangeAspect="1" noMove="1" noResize="1" noEditPoints="1" noAdjustHandles="1" noChangeArrowheads="1" noChangeShapeType="1" noTextEdit="1"/>
+              </p:cNvSpPr>
+              <p:nvPr>
+                <p:ph idx="1"/>
+              </p:nvPr>
+            </p:nvSpPr>
+            <p:spPr>
+              <a:blipFill>
+                <a:blip r:embed="rId2"/>
+                <a:stretch>
+                  <a:fillRect l="-1809" t="-1163" b="-872"/>
+                </a:stretch>
+              </a:blipFill>
+            </p:spPr>
+            <p:txBody>
+              <a:bodyPr/>
+              <a:lstStyle/>
+              <a:p>
+                <a:r>
+                  <a:rPr lang="es-ES_tradnl">
+                    <a:noFill/>
+                  </a:rPr>
+                  <a:t> </a:t>
+                </a:r>
+              </a:p>
+            </p:txBody>
+          </p:sp>
+        </mc:Fallback>
+      </mc:AlternateContent>
+      <mc:AlternateContent xmlns:mc="http://schemas.openxmlformats.org/markup-compatibility/2006" xmlns:a14="http://schemas.microsoft.com/office/drawing/2010/main">
+        <mc:Choice Requires="a14">
+          <p:sp>
+            <p:nvSpPr>
+              <p:cNvPr id="5" name="CuadroTexto 4">
+                <a:extLst>
+                  <a:ext uri="{FF2B5EF4-FFF2-40B4-BE49-F238E27FC236}">
+                    <a16:creationId xmlns:a16="http://schemas.microsoft.com/office/drawing/2014/main" id="{A543662B-FFEF-E286-E53F-8EAD7BC31FB6}"/>
+                  </a:ext>
+                </a:extLst>
+              </p:cNvPr>
+              <p:cNvSpPr txBox="1"/>
+              <p:nvPr/>
+            </p:nvSpPr>
+            <p:spPr>
+              <a:xfrm>
+                <a:off x="8389882" y="4009177"/>
+                <a:ext cx="3103180" cy="1200329"/>
+              </a:xfrm>
+              <a:prstGeom prst="rect">
+                <a:avLst/>
+              </a:prstGeom>
+              <a:noFill/>
+            </p:spPr>
+            <p:txBody>
+              <a:bodyPr wrap="square">
+                <a:spAutoFit/>
+              </a:bodyPr>
+              <a:lstStyle/>
+              <a:p>
+                <a:r>
+                  <a:rPr lang="es-ES_tradnl" sz="2400" dirty="0">
+                    <a:latin typeface="Gill Sans Nova Light" panose="020B0302020104020203" pitchFamily="34" charset="0"/>
+                  </a:rPr>
+                  <a:t>Modelos lineales con supuestos </a:t>
+                </a:r>
+                <a:r>
+                  <a:rPr lang="es-ES_tradnl" sz="2400" dirty="0">
+                    <a:solidFill>
+                      <a:schemeClr val="accent2"/>
+                    </a:solidFill>
+                    <a:latin typeface="Gill Sans Nova Light" panose="020B0302020104020203" pitchFamily="34" charset="0"/>
+                  </a:rPr>
+                  <a:t>más fuertes </a:t>
+                </a:r>
+                <a:r>
+                  <a:rPr lang="es-ES_tradnl" sz="2400" dirty="0">
+                    <a:latin typeface="Gill Sans Nova Light" panose="020B0302020104020203" pitchFamily="34" charset="0"/>
+                  </a:rPr>
+                  <a:t>sobre los predictores </a:t>
+                </a:r>
+                <a14:m>
+                  <m:oMath xmlns:m="http://schemas.openxmlformats.org/officeDocument/2006/math">
+                    <m:r>
+                      <a:rPr lang="es-ES_tradnl" sz="2400" i="1" smtClean="0">
+                        <a:solidFill>
+                          <a:schemeClr val="tx1"/>
+                        </a:solidFill>
+                        <a:latin typeface="Cambria Math" panose="02040503050406030204" pitchFamily="18" charset="0"/>
+                        <a:ea typeface="Cambria Math" panose="02040503050406030204" pitchFamily="18" charset="0"/>
+                      </a:rPr>
+                      <m:t>𝑋</m:t>
+                    </m:r>
+                  </m:oMath>
+                </a14:m>
+                <a:endParaRPr lang="es-ES_tradnl" sz="2400" dirty="0">
+                  <a:latin typeface="Gill Sans Nova Light" panose="020B0302020104020203" pitchFamily="34" charset="0"/>
+                </a:endParaRPr>
+              </a:p>
+            </p:txBody>
+          </p:sp>
+        </mc:Choice>
+        <mc:Fallback xmlns="">
+          <p:sp>
+            <p:nvSpPr>
+              <p:cNvPr id="5" name="CuadroTexto 4">
+                <a:extLst>
+                  <a:ext uri="{FF2B5EF4-FFF2-40B4-BE49-F238E27FC236}">
+                    <a16:creationId xmlns:a16="http://schemas.microsoft.com/office/drawing/2014/main" id="{A543662B-FFEF-E286-E53F-8EAD7BC31FB6}"/>
+                  </a:ext>
+                </a:extLst>
+              </p:cNvPr>
+              <p:cNvSpPr txBox="1">
+                <a:spLocks noRot="1" noChangeAspect="1" noMove="1" noResize="1" noEditPoints="1" noAdjustHandles="1" noChangeArrowheads="1" noChangeShapeType="1" noTextEdit="1"/>
+              </p:cNvSpPr>
+              <p:nvPr/>
+            </p:nvSpPr>
+            <p:spPr>
+              <a:xfrm>
+                <a:off x="8389882" y="4009177"/>
+                <a:ext cx="3103180" cy="1200329"/>
+              </a:xfrm>
+              <a:prstGeom prst="rect">
+                <a:avLst/>
+              </a:prstGeom>
+              <a:blipFill>
+                <a:blip r:embed="rId3"/>
+                <a:stretch>
+                  <a:fillRect l="-2857" t="-3125" b="-10417"/>
+                </a:stretch>
+              </a:blipFill>
+            </p:spPr>
+            <p:txBody>
+              <a:bodyPr/>
+              <a:lstStyle/>
+              <a:p>
+                <a:r>
+                  <a:rPr lang="es-ES_tradnl">
+                    <a:noFill/>
+                  </a:rPr>
+                  <a:t> </a:t>
+                </a:r>
+              </a:p>
+            </p:txBody>
+          </p:sp>
+        </mc:Fallback>
+      </mc:AlternateContent>
       <p:sp>
         <p:nvSpPr>
-          <p:cNvPr id="3" name="Text Placeholder 2">
+          <p:cNvPr id="6" name="Llave de cierre 5">
             <a:extLst>
               <a:ext uri="{FF2B5EF4-FFF2-40B4-BE49-F238E27FC236}">
-                <a16:creationId xmlns:a16="http://schemas.microsoft.com/office/drawing/2014/main" id="{6A780597-6948-B78E-E6E3-6E4F9F1321EF}"/>
+                <a16:creationId xmlns:a16="http://schemas.microsoft.com/office/drawing/2014/main" id="{633D811B-F734-38A9-66F6-3185658BA389}"/>
               </a:ext>
             </a:extLst>
           </p:cNvPr>
-          <p:cNvSpPr>
-            <a:spLocks noGrp="1"/>
-          </p:cNvSpPr>
-          <p:nvPr>
-            <p:ph type="body" idx="1"/>
-          </p:nvPr>
+          <p:cNvSpPr/>
+          <p:nvPr/>
         </p:nvSpPr>
-        <p:spPr/>
+        <p:spPr>
+          <a:xfrm>
+            <a:off x="7646275" y="3714815"/>
+            <a:ext cx="472966" cy="2112579"/>
+          </a:xfrm>
+          <a:prstGeom prst="rightBrace">
+            <a:avLst/>
+          </a:prstGeom>
+          <a:ln w="28575"/>
+        </p:spPr>
+        <p:style>
+          <a:lnRef idx="1">
+            <a:schemeClr val="accent1"/>
+          </a:lnRef>
+          <a:fillRef idx="0">
+            <a:schemeClr val="accent1"/>
+          </a:fillRef>
+          <a:effectRef idx="0">
+            <a:schemeClr val="accent1"/>
+          </a:effectRef>
+          <a:fontRef idx="minor">
+            <a:schemeClr val="tx1"/>
+          </a:fontRef>
+        </p:style>
         <p:txBody>
-          <a:bodyPr>
-            <a:normAutofit/>
-          </a:bodyPr>
+          <a:bodyPr rtlCol="0" anchor="ctr"/>
           <a:lstStyle/>
           <a:p>
-            <a:r>
-              <a:rPr lang="en-US" dirty="0"/>
-              <a:t>References</a:t>
-            </a:r>
-          </a:p>
-          <a:p>
-            <a:r>
-              <a:rPr lang="es-AR" sz="2400" b="1" dirty="0">
-                <a:solidFill>
-                  <a:srgbClr val="00663D"/>
-                </a:solidFill>
-                <a:effectLst/>
-                <a:latin typeface="Times" pitchFamily="2" charset="0"/>
-                <a:ea typeface="Times" pitchFamily="2" charset="0"/>
-                <a:cs typeface="Times" pitchFamily="2" charset="0"/>
-              </a:rPr>
-              <a:t>† </a:t>
-            </a:r>
-            <a:r>
-              <a:rPr lang="en-US" sz="2400" dirty="0"/>
-              <a:t>James, G., Witten, D., Hastie, T., Tibshirani, R., &amp; Taylor, J. (2023). </a:t>
-            </a:r>
-            <a:r>
-              <a:rPr lang="en-US" sz="2400" i="1" dirty="0"/>
-              <a:t>An introduction to statistical learning: With applications in Python. </a:t>
-            </a:r>
-            <a:r>
-              <a:rPr lang="en-US" b="1" dirty="0"/>
-              <a:t>Chap. 2.2.3</a:t>
-            </a:r>
+            <a:pPr algn="ctr"/>
+            <a:endParaRPr lang="es-ES_tradnl"/>
           </a:p>
         </p:txBody>
       </p:sp>
     </p:spTree>
     <p:extLst>
       <p:ext uri="{BB962C8B-B14F-4D97-AF65-F5344CB8AC3E}">
-        <p14:creationId xmlns:p14="http://schemas.microsoft.com/office/powerpoint/2010/main" val="190179224"/>
+        <p14:creationId xmlns:p14="http://schemas.microsoft.com/office/powerpoint/2010/main" val="3186348293"/>
       </p:ext>
     </p:extLst>
   </p:cSld>
   <p:clrMapOvr>
     <a:masterClrMapping/>
   </p:clrMapOvr>
+  <p:timing>
+    <p:tnLst>
+      <p:par>
+        <p:cTn id="1" dur="indefinite" restart="never" nodeType="tmRoot">
+          <p:childTnLst>
+            <p:seq concurrent="1" nextAc="seek">
+              <p:cTn id="2" dur="indefinite" nodeType="mainSeq">
+                <p:childTnLst>
+                  <p:par>
+                    <p:cTn id="3" fill="hold">
+                      <p:stCondLst>
+                        <p:cond delay="indefinite"/>
+                      </p:stCondLst>
+                      <p:childTnLst>
+                        <p:par>
+                          <p:cTn id="4" fill="hold">
+                            <p:stCondLst>
+                              <p:cond delay="0"/>
+                            </p:stCondLst>
+                            <p:childTnLst>
+                              <p:par>
+                                <p:cTn id="5" presetID="1" presetClass="entr" presetSubtype="0" fill="hold" grpId="0" nodeType="clickEffect">
+                                  <p:stCondLst>
+                                    <p:cond delay="0"/>
+                                  </p:stCondLst>
+                                  <p:childTnLst>
+                                    <p:set>
+                                      <p:cBhvr>
+                                        <p:cTn id="6" dur="1" fill="hold">
+                                          <p:stCondLst>
+                                            <p:cond delay="0"/>
+                                          </p:stCondLst>
+                                        </p:cTn>
+                                        <p:tgtEl>
+                                          <p:spTgt spid="6"/>
+                                        </p:tgtEl>
+                                        <p:attrNameLst>
+                                          <p:attrName>style.visibility</p:attrName>
+                                        </p:attrNameLst>
+                                      </p:cBhvr>
+                                      <p:to>
+                                        <p:strVal val="visible"/>
+                                      </p:to>
+                                    </p:set>
+                                  </p:childTnLst>
+                                </p:cTn>
+                              </p:par>
+                              <p:par>
+                                <p:cTn id="7" presetID="1" presetClass="entr" presetSubtype="0" fill="hold" grpId="0" nodeType="withEffect">
+                                  <p:stCondLst>
+                                    <p:cond delay="0"/>
+                                  </p:stCondLst>
+                                  <p:childTnLst>
+                                    <p:set>
+                                      <p:cBhvr>
+                                        <p:cTn id="8" dur="1" fill="hold">
+                                          <p:stCondLst>
+                                            <p:cond delay="0"/>
+                                          </p:stCondLst>
+                                        </p:cTn>
+                                        <p:tgtEl>
+                                          <p:spTgt spid="5"/>
+                                        </p:tgtEl>
+                                        <p:attrNameLst>
+                                          <p:attrName>style.visibility</p:attrName>
+                                        </p:attrNameLst>
+                                      </p:cBhvr>
+                                      <p:to>
+                                        <p:strVal val="visible"/>
+                                      </p:to>
+                                    </p:set>
+                                  </p:childTnLst>
+                                </p:cTn>
+                              </p:par>
+                            </p:childTnLst>
+                          </p:cTn>
+                        </p:par>
+                      </p:childTnLst>
+                    </p:cTn>
+                  </p:par>
+                </p:childTnLst>
+              </p:cTn>
+              <p:prevCondLst>
+                <p:cond evt="onPrev" delay="0">
+                  <p:tgtEl>
+                    <p:sldTgt/>
+                  </p:tgtEl>
+                </p:cond>
+              </p:prevCondLst>
+              <p:nextCondLst>
+                <p:cond evt="onNext" delay="0">
+                  <p:tgtEl>
+                    <p:sldTgt/>
+                  </p:tgtEl>
+                </p:cond>
+              </p:nextCondLst>
+            </p:seq>
+          </p:childTnLst>
+        </p:cTn>
+      </p:par>
+    </p:tnLst>
+    <p:bldLst>
+      <p:bldP spid="5" grpId="0"/>
+      <p:bldP spid="6" grpId="0" animBg="1"/>
+    </p:bldLst>
+  </p:timing>
 </p:sld>
 </file>
 
@@ -12374,7 +13171,7 @@
               <p:cNvPr id="2" name="Title 1">
                 <a:extLst>
                   <a:ext uri="{FF2B5EF4-FFF2-40B4-BE49-F238E27FC236}">
-                    <a16:creationId xmlns:a16="http://schemas.microsoft.com/office/drawing/2014/main" id="{6B10E4FD-2DBC-AAD4-5AD2-71B1A7DA0CEF}"/>
+                    <a16:creationId xmlns:a16="http://schemas.microsoft.com/office/drawing/2014/main" id="{0E83D0DE-DCB7-E42A-D782-6E396A647B0C}"/>
                   </a:ext>
                 </a:extLst>
               </p:cNvPr>
@@ -12387,12 +13184,14 @@
             </p:nvSpPr>
             <p:spPr/>
             <p:txBody>
-              <a:bodyPr/>
+              <a:bodyPr>
+                <a:normAutofit/>
+              </a:bodyPr>
               <a:lstStyle/>
               <a:p>
                 <a:r>
                   <a:rPr lang="es-ES_tradnl" dirty="0"/>
-                  <a:t>Riesgo esperado: </a:t>
+                  <a:t>Modelo lineal para Clasificar: </a:t>
                 </a:r>
                 <a:r>
                   <a:rPr lang="es-ES_tradnl" i="1" dirty="0">
@@ -12403,7 +13202,7 @@
                       </a:schemeClr>
                     </a:solidFill>
                   </a:rPr>
-                  <a:t>Formalmente para </a:t>
+                  <a:t>¿Por qué no </a:t>
                 </a:r>
                 <a14:m>
                   <m:oMath xmlns:m="http://schemas.openxmlformats.org/officeDocument/2006/math">
@@ -12416,8 +13215,154 @@
                           </a:schemeClr>
                         </a:solidFill>
                         <a:latin typeface="Cambria Math" panose="02040503050406030204" pitchFamily="18" charset="0"/>
+                        <a:ea typeface="Cambria Math" panose="02040503050406030204" pitchFamily="18" charset="0"/>
                       </a:rPr>
-                      <m:t>𝑌</m:t>
+                      <m:t>𝑝</m:t>
+                    </m:r>
+                    <m:r>
+                      <a:rPr lang="es-ES_tradnl" b="0" i="1" smtClean="0">
+                        <a:solidFill>
+                          <a:schemeClr val="tx1">
+                            <a:lumMod val="50000"/>
+                            <a:lumOff val="50000"/>
+                          </a:schemeClr>
+                        </a:solidFill>
+                        <a:latin typeface="Cambria Math" panose="02040503050406030204" pitchFamily="18" charset="0"/>
+                        <a:ea typeface="Cambria Math" panose="02040503050406030204" pitchFamily="18" charset="0"/>
+                      </a:rPr>
+                      <m:t>=</m:t>
+                    </m:r>
+                    <m:func>
+                      <m:funcPr>
+                        <m:ctrlPr>
+                          <a:rPr lang="en-US" b="0">
+                            <a:solidFill>
+                              <a:schemeClr val="tx1">
+                                <a:lumMod val="50000"/>
+                                <a:lumOff val="50000"/>
+                              </a:schemeClr>
+                            </a:solidFill>
+                            <a:latin typeface="Cambria Math" panose="02040503050406030204" pitchFamily="18" charset="0"/>
+                            <a:ea typeface="Cambria Math" panose="02040503050406030204" pitchFamily="18" charset="0"/>
+                          </a:rPr>
+                        </m:ctrlPr>
+                      </m:funcPr>
+                      <m:fName>
+                        <m:r>
+                          <m:rPr>
+                            <m:sty m:val="p"/>
+                          </m:rPr>
+                          <a:rPr lang="en-US" b="0">
+                            <a:solidFill>
+                              <a:schemeClr val="tx1">
+                                <a:lumMod val="50000"/>
+                                <a:lumOff val="50000"/>
+                              </a:schemeClr>
+                            </a:solidFill>
+                            <a:latin typeface="Cambria Math" panose="02040503050406030204" pitchFamily="18" charset="0"/>
+                            <a:ea typeface="Cambria Math" panose="02040503050406030204" pitchFamily="18" charset="0"/>
+                          </a:rPr>
+                          <m:t>Pr</m:t>
+                        </m:r>
+                      </m:fName>
+                      <m:e>
+                        <m:d>
+                          <m:dPr>
+                            <m:ctrlPr>
+                              <a:rPr lang="en-US" b="0" i="1">
+                                <a:solidFill>
+                                  <a:schemeClr val="tx1">
+                                    <a:lumMod val="50000"/>
+                                    <a:lumOff val="50000"/>
+                                  </a:schemeClr>
+                                </a:solidFill>
+                                <a:latin typeface="Cambria Math" panose="02040503050406030204" pitchFamily="18" charset="0"/>
+                                <a:ea typeface="Cambria Math" panose="02040503050406030204" pitchFamily="18" charset="0"/>
+                              </a:rPr>
+                            </m:ctrlPr>
+                          </m:dPr>
+                          <m:e>
+                            <m:r>
+                              <a:rPr lang="en-US" b="0" i="1">
+                                <a:solidFill>
+                                  <a:schemeClr val="tx1">
+                                    <a:lumMod val="50000"/>
+                                    <a:lumOff val="50000"/>
+                                  </a:schemeClr>
+                                </a:solidFill>
+                                <a:latin typeface="Cambria Math" panose="02040503050406030204" pitchFamily="18" charset="0"/>
+                                <a:ea typeface="Cambria Math" panose="02040503050406030204" pitchFamily="18" charset="0"/>
+                              </a:rPr>
+                              <m:t>𝑌</m:t>
+                            </m:r>
+                            <m:r>
+                              <a:rPr lang="en-US" b="0" i="1">
+                                <a:solidFill>
+                                  <a:schemeClr val="tx1">
+                                    <a:lumMod val="50000"/>
+                                    <a:lumOff val="50000"/>
+                                  </a:schemeClr>
+                                </a:solidFill>
+                                <a:latin typeface="Cambria Math" panose="02040503050406030204" pitchFamily="18" charset="0"/>
+                                <a:ea typeface="Cambria Math" panose="02040503050406030204" pitchFamily="18" charset="0"/>
+                              </a:rPr>
+                              <m:t>=1|</m:t>
+                            </m:r>
+                            <m:r>
+                              <a:rPr lang="en-US" b="0" i="1">
+                                <a:solidFill>
+                                  <a:schemeClr val="tx1">
+                                    <a:lumMod val="50000"/>
+                                    <a:lumOff val="50000"/>
+                                  </a:schemeClr>
+                                </a:solidFill>
+                                <a:latin typeface="Cambria Math" panose="02040503050406030204" pitchFamily="18" charset="0"/>
+                                <a:ea typeface="Cambria Math" panose="02040503050406030204" pitchFamily="18" charset="0"/>
+                              </a:rPr>
+                              <m:t>𝑋</m:t>
+                            </m:r>
+                          </m:e>
+                        </m:d>
+                      </m:e>
+                    </m:func>
+                    <m:r>
+                      <a:rPr lang="en-US" b="0" i="1" smtClean="0">
+                        <a:solidFill>
+                          <a:schemeClr val="tx1">
+                            <a:lumMod val="50000"/>
+                            <a:lumOff val="50000"/>
+                          </a:schemeClr>
+                        </a:solidFill>
+                        <a:latin typeface="Cambria Math" panose="02040503050406030204" pitchFamily="18" charset="0"/>
+                        <a:ea typeface="Cambria Math" panose="02040503050406030204" pitchFamily="18" charset="0"/>
+                      </a:rPr>
+                      <m:t>=</m:t>
+                    </m:r>
+                    <m:r>
+                      <a:rPr lang="en-US" b="0" i="1" smtClean="0">
+                        <a:solidFill>
+                          <a:schemeClr val="tx1">
+                            <a:lumMod val="50000"/>
+                            <a:lumOff val="50000"/>
+                          </a:schemeClr>
+                        </a:solidFill>
+                        <a:latin typeface="Cambria Math" panose="02040503050406030204" pitchFamily="18" charset="0"/>
+                        <a:ea typeface="Cambria Math" panose="02040503050406030204" pitchFamily="18" charset="0"/>
+                      </a:rPr>
+                      <m:t>𝑋</m:t>
+                    </m:r>
+                    <m:r>
+                      <a:rPr lang="en-US" b="0" i="1" smtClean="0">
+                        <a:solidFill>
+                          <a:schemeClr val="tx1">
+                            <a:lumMod val="50000"/>
+                            <a:lumOff val="50000"/>
+                          </a:schemeClr>
+                        </a:solidFill>
+                        <a:latin typeface="Cambria Math" panose="02040503050406030204" pitchFamily="18" charset="0"/>
+                        <a:ea typeface="Cambria Math" panose="02040503050406030204" pitchFamily="18" charset="0"/>
+                      </a:rPr>
+                      <m:t>𝛽</m:t>
                     </m:r>
                   </m:oMath>
                 </a14:m>
@@ -12430,8 +13375,9 @@
                       </a:schemeClr>
                     </a:solidFill>
                   </a:rPr>
-                  <a:t>binaria</a:t>
+                  <a:t>?</a:t>
                 </a:r>
+                <a:endParaRPr lang="es-ES_tradnl" i="1" dirty="0"/>
               </a:p>
             </p:txBody>
           </p:sp>
@@ -12442,7 +13388,7 @@
               <p:cNvPr id="2" name="Title 1">
                 <a:extLst>
                   <a:ext uri="{FF2B5EF4-FFF2-40B4-BE49-F238E27FC236}">
-                    <a16:creationId xmlns:a16="http://schemas.microsoft.com/office/drawing/2014/main" id="{6B10E4FD-2DBC-AAD4-5AD2-71B1A7DA0CEF}"/>
+                    <a16:creationId xmlns:a16="http://schemas.microsoft.com/office/drawing/2014/main" id="{0E83D0DE-DCB7-E42A-D782-6E396A647B0C}"/>
                   </a:ext>
                 </a:extLst>
               </p:cNvPr>
@@ -12455,9 +13401,9 @@
             </p:nvSpPr>
             <p:spPr>
               <a:blipFill>
-                <a:blip r:embed="rId2"/>
+                <a:blip r:embed="rId3"/>
                 <a:stretch>
-                  <a:fillRect l="-2413" r="-844"/>
+                  <a:fillRect l="-2413" t="-14286" b="-21905"/>
                 </a:stretch>
               </a:blipFill>
             </p:spPr>
@@ -12483,7 +13429,7 @@
               <p:cNvPr id="3" name="Content Placeholder 2">
                 <a:extLst>
                   <a:ext uri="{FF2B5EF4-FFF2-40B4-BE49-F238E27FC236}">
-                    <a16:creationId xmlns:a16="http://schemas.microsoft.com/office/drawing/2014/main" id="{4DCB7428-BAF8-C43C-0F61-3A249901DD51}"/>
+                    <a16:creationId xmlns:a16="http://schemas.microsoft.com/office/drawing/2014/main" id="{226CE70E-DF44-F112-1149-056C52EBB750}"/>
                   </a:ext>
                 </a:extLst>
               </p:cNvPr>
@@ -12491,325 +13437,27 @@
                 <a:spLocks noGrp="1"/>
               </p:cNvSpPr>
               <p:nvPr>
-                <p:ph idx="1"/>
+                <p:ph sz="half" idx="1"/>
               </p:nvPr>
             </p:nvSpPr>
             <p:spPr/>
             <p:txBody>
               <a:bodyPr>
-                <a:normAutofit fontScale="70000" lnSpcReduction="20000"/>
+                <a:normAutofit fontScale="62500" lnSpcReduction="20000"/>
               </a:bodyPr>
               <a:lstStyle/>
               <a:p>
                 <a:pPr>
                   <a:lnSpc>
-                    <a:spcPct val="160000"/>
+                    <a:spcPct val="120000"/>
                   </a:lnSpc>
                 </a:pPr>
                 <a:r>
                   <a:rPr lang="es-ES_tradnl" dirty="0"/>
-                  <a:t>Predicción: </a:t>
+                  <a:t>Se sale del rango </a:t>
                 </a:r>
                 <a14:m>
                   <m:oMath xmlns:m="http://schemas.openxmlformats.org/officeDocument/2006/math">
-                    <m:acc>
-                      <m:accPr>
-                        <m:chr m:val="̂"/>
-                        <m:ctrlPr>
-                          <a:rPr lang="es-ES_tradnl" b="0" i="1" smtClean="0">
-                            <a:latin typeface="Cambria Math" panose="02040503050406030204" pitchFamily="18" charset="0"/>
-                            <a:ea typeface="Cambria Math" panose="02040503050406030204" pitchFamily="18" charset="0"/>
-                          </a:rPr>
-                        </m:ctrlPr>
-                      </m:accPr>
-                      <m:e>
-                        <m:r>
-                          <a:rPr lang="en-US" b="0" i="1" smtClean="0">
-                            <a:latin typeface="Cambria Math" panose="02040503050406030204" pitchFamily="18" charset="0"/>
-                            <a:ea typeface="Cambria Math" panose="02040503050406030204" pitchFamily="18" charset="0"/>
-                          </a:rPr>
-                          <m:t>𝑌</m:t>
-                        </m:r>
-                      </m:e>
-                    </m:acc>
-                    <m:r>
-                      <a:rPr lang="es-ES_tradnl" b="0" i="1" smtClean="0">
-                        <a:latin typeface="Cambria Math" panose="02040503050406030204" pitchFamily="18" charset="0"/>
-                        <a:ea typeface="Cambria Math" panose="02040503050406030204" pitchFamily="18" charset="0"/>
-                      </a:rPr>
-                      <m:t>~</m:t>
-                    </m:r>
-                    <m:d>
-                      <m:dPr>
-                        <m:begChr m:val="{"/>
-                        <m:endChr m:val="}"/>
-                        <m:ctrlPr>
-                          <a:rPr lang="es-ES_tradnl" b="0" i="1" smtClean="0">
-                            <a:latin typeface="Cambria Math" panose="02040503050406030204" pitchFamily="18" charset="0"/>
-                            <a:ea typeface="Cambria Math" panose="02040503050406030204" pitchFamily="18" charset="0"/>
-                          </a:rPr>
-                        </m:ctrlPr>
-                      </m:dPr>
-                      <m:e>
-                        <m:r>
-                          <a:rPr lang="es-ES_tradnl" b="0" i="1" smtClean="0">
-                            <a:latin typeface="Cambria Math" panose="02040503050406030204" pitchFamily="18" charset="0"/>
-                            <a:ea typeface="Cambria Math" panose="02040503050406030204" pitchFamily="18" charset="0"/>
-                          </a:rPr>
-                          <m:t>0,1</m:t>
-                        </m:r>
-                      </m:e>
-                    </m:d>
-                  </m:oMath>
-                </a14:m>
-                <a:endParaRPr lang="es-ES_tradnl" b="0" dirty="0"/>
-              </a:p>
-              <a:p>
-                <a:pPr>
-                  <a:lnSpc>
-                    <a:spcPct val="160000"/>
-                  </a:lnSpc>
-                </a:pPr>
-                <a:r>
-                  <a:rPr lang="es-ES_tradnl" b="0" dirty="0"/>
-                  <a:t>Observación: </a:t>
-                </a:r>
-                <a14:m>
-                  <m:oMath xmlns:m="http://schemas.openxmlformats.org/officeDocument/2006/math">
-                    <m:r>
-                      <a:rPr lang="es-ES_tradnl" b="0" i="1" smtClean="0">
-                        <a:latin typeface="Cambria Math" panose="02040503050406030204" pitchFamily="18" charset="0"/>
-                      </a:rPr>
-                      <m:t>𝑌</m:t>
-                    </m:r>
-                    <m:r>
-                      <a:rPr lang="es-ES_tradnl" b="0" i="1" smtClean="0">
-                        <a:latin typeface="Cambria Math" panose="02040503050406030204" pitchFamily="18" charset="0"/>
-                        <a:ea typeface="Cambria Math" panose="02040503050406030204" pitchFamily="18" charset="0"/>
-                      </a:rPr>
-                      <m:t>~</m:t>
-                    </m:r>
-                    <m:d>
-                      <m:dPr>
-                        <m:begChr m:val="{"/>
-                        <m:endChr m:val="}"/>
-                        <m:ctrlPr>
-                          <a:rPr lang="es-ES_tradnl" b="0" i="1" smtClean="0">
-                            <a:latin typeface="Cambria Math" panose="02040503050406030204" pitchFamily="18" charset="0"/>
-                            <a:ea typeface="Cambria Math" panose="02040503050406030204" pitchFamily="18" charset="0"/>
-                          </a:rPr>
-                        </m:ctrlPr>
-                      </m:dPr>
-                      <m:e>
-                        <m:r>
-                          <a:rPr lang="es-ES_tradnl" b="0" i="1" smtClean="0">
-                            <a:latin typeface="Cambria Math" panose="02040503050406030204" pitchFamily="18" charset="0"/>
-                            <a:ea typeface="Cambria Math" panose="02040503050406030204" pitchFamily="18" charset="0"/>
-                          </a:rPr>
-                          <m:t>0,1</m:t>
-                        </m:r>
-                      </m:e>
-                    </m:d>
-                  </m:oMath>
-                </a14:m>
-                <a:endParaRPr lang="es-ES_tradnl" dirty="0"/>
-              </a:p>
-              <a:p>
-                <a:pPr>
-                  <a:lnSpc>
-                    <a:spcPct val="160000"/>
-                  </a:lnSpc>
-                </a:pPr>
-                <a:r>
-                  <a:rPr lang="es-ES_tradnl" dirty="0"/>
-                  <a:t>Probabilidades: </a:t>
-                </a:r>
-                <a14:m>
-                  <m:oMath xmlns:m="http://schemas.openxmlformats.org/officeDocument/2006/math">
-                    <m:r>
-                      <a:rPr lang="en-US" b="0" i="1" smtClean="0">
-                        <a:latin typeface="Cambria Math" panose="02040503050406030204" pitchFamily="18" charset="0"/>
-                        <a:ea typeface="Cambria Math" panose="02040503050406030204" pitchFamily="18" charset="0"/>
-                      </a:rPr>
-                      <m:t>𝑝</m:t>
-                    </m:r>
-                    <m:r>
-                      <a:rPr lang="en-US" b="0" i="1" smtClean="0">
-                        <a:latin typeface="Cambria Math" panose="02040503050406030204" pitchFamily="18" charset="0"/>
-                        <a:ea typeface="Cambria Math" panose="02040503050406030204" pitchFamily="18" charset="0"/>
-                      </a:rPr>
-                      <m:t>=</m:t>
-                    </m:r>
-                    <m:func>
-                      <m:funcPr>
-                        <m:ctrlPr>
-                          <a:rPr lang="en-US" b="0" i="1" smtClean="0">
-                            <a:latin typeface="Cambria Math" panose="02040503050406030204" pitchFamily="18" charset="0"/>
-                            <a:ea typeface="Cambria Math" panose="02040503050406030204" pitchFamily="18" charset="0"/>
-                          </a:rPr>
-                        </m:ctrlPr>
-                      </m:funcPr>
-                      <m:fName>
-                        <m:r>
-                          <m:rPr>
-                            <m:sty m:val="p"/>
-                          </m:rPr>
-                          <a:rPr lang="en-US" b="0" i="0" smtClean="0">
-                            <a:latin typeface="Cambria Math" panose="02040503050406030204" pitchFamily="18" charset="0"/>
-                            <a:ea typeface="Cambria Math" panose="02040503050406030204" pitchFamily="18" charset="0"/>
-                          </a:rPr>
-                          <m:t>Pr</m:t>
-                        </m:r>
-                      </m:fName>
-                      <m:e>
-                        <m:d>
-                          <m:dPr>
-                            <m:ctrlPr>
-                              <a:rPr lang="en-US" b="0" i="1" smtClean="0">
-                                <a:latin typeface="Cambria Math" panose="02040503050406030204" pitchFamily="18" charset="0"/>
-                                <a:ea typeface="Cambria Math" panose="02040503050406030204" pitchFamily="18" charset="0"/>
-                              </a:rPr>
-                            </m:ctrlPr>
-                          </m:dPr>
-                          <m:e>
-                            <m:r>
-                              <a:rPr lang="en-US" b="0" i="1" smtClean="0">
-                                <a:latin typeface="Cambria Math" panose="02040503050406030204" pitchFamily="18" charset="0"/>
-                                <a:ea typeface="Cambria Math" panose="02040503050406030204" pitchFamily="18" charset="0"/>
-                              </a:rPr>
-                              <m:t>𝑌</m:t>
-                            </m:r>
-                            <m:r>
-                              <a:rPr lang="en-US" b="0" i="1" smtClean="0">
-                                <a:latin typeface="Cambria Math" panose="02040503050406030204" pitchFamily="18" charset="0"/>
-                                <a:ea typeface="Cambria Math" panose="02040503050406030204" pitchFamily="18" charset="0"/>
-                              </a:rPr>
-                              <m:t>=1|</m:t>
-                            </m:r>
-                            <m:r>
-                              <a:rPr lang="en-US" b="0" i="1" smtClean="0">
-                                <a:latin typeface="Cambria Math" panose="02040503050406030204" pitchFamily="18" charset="0"/>
-                                <a:ea typeface="Cambria Math" panose="02040503050406030204" pitchFamily="18" charset="0"/>
-                              </a:rPr>
-                              <m:t>𝑋</m:t>
-                            </m:r>
-                          </m:e>
-                        </m:d>
-                      </m:e>
-                    </m:func>
-                  </m:oMath>
-                </a14:m>
-                <a:r>
-                  <a:rPr lang="es-ES_tradnl" dirty="0"/>
-                  <a:t>,   </a:t>
-                </a:r>
-                <a14:m>
-                  <m:oMath xmlns:m="http://schemas.openxmlformats.org/officeDocument/2006/math">
-                    <m:r>
-                      <a:rPr lang="en-US" b="0" i="0" smtClean="0">
-                        <a:latin typeface="Cambria Math" panose="02040503050406030204" pitchFamily="18" charset="0"/>
-                        <a:ea typeface="Cambria Math" panose="02040503050406030204" pitchFamily="18" charset="0"/>
-                      </a:rPr>
-                      <m:t>1−</m:t>
-                    </m:r>
-                    <m:r>
-                      <a:rPr lang="en-US" i="1">
-                        <a:latin typeface="Cambria Math" panose="02040503050406030204" pitchFamily="18" charset="0"/>
-                        <a:ea typeface="Cambria Math" panose="02040503050406030204" pitchFamily="18" charset="0"/>
-                      </a:rPr>
-                      <m:t>𝑝</m:t>
-                    </m:r>
-                    <m:r>
-                      <a:rPr lang="en-US" i="1">
-                        <a:latin typeface="Cambria Math" panose="02040503050406030204" pitchFamily="18" charset="0"/>
-                        <a:ea typeface="Cambria Math" panose="02040503050406030204" pitchFamily="18" charset="0"/>
-                      </a:rPr>
-                      <m:t>=</m:t>
-                    </m:r>
-                    <m:func>
-                      <m:funcPr>
-                        <m:ctrlPr>
-                          <a:rPr lang="en-US" b="0" i="1" smtClean="0">
-                            <a:latin typeface="Cambria Math" panose="02040503050406030204" pitchFamily="18" charset="0"/>
-                            <a:ea typeface="Cambria Math" panose="02040503050406030204" pitchFamily="18" charset="0"/>
-                          </a:rPr>
-                        </m:ctrlPr>
-                      </m:funcPr>
-                      <m:fName>
-                        <m:r>
-                          <m:rPr>
-                            <m:sty m:val="p"/>
-                          </m:rPr>
-                          <a:rPr lang="en-US" b="0" i="0" smtClean="0">
-                            <a:latin typeface="Cambria Math" panose="02040503050406030204" pitchFamily="18" charset="0"/>
-                            <a:ea typeface="Cambria Math" panose="02040503050406030204" pitchFamily="18" charset="0"/>
-                          </a:rPr>
-                          <m:t>Pr</m:t>
-                        </m:r>
-                      </m:fName>
-                      <m:e>
-                        <m:d>
-                          <m:dPr>
-                            <m:ctrlPr>
-                              <a:rPr lang="en-US" b="0" i="1" smtClean="0">
-                                <a:latin typeface="Cambria Math" panose="02040503050406030204" pitchFamily="18" charset="0"/>
-                                <a:ea typeface="Cambria Math" panose="02040503050406030204" pitchFamily="18" charset="0"/>
-                              </a:rPr>
-                            </m:ctrlPr>
-                          </m:dPr>
-                          <m:e>
-                            <m:r>
-                              <a:rPr lang="en-US" b="0" i="1" smtClean="0">
-                                <a:latin typeface="Cambria Math" panose="02040503050406030204" pitchFamily="18" charset="0"/>
-                                <a:ea typeface="Cambria Math" panose="02040503050406030204" pitchFamily="18" charset="0"/>
-                              </a:rPr>
-                              <m:t>𝑌</m:t>
-                            </m:r>
-                            <m:r>
-                              <a:rPr lang="en-US" b="0" i="1" smtClean="0">
-                                <a:latin typeface="Cambria Math" panose="02040503050406030204" pitchFamily="18" charset="0"/>
-                                <a:ea typeface="Cambria Math" panose="02040503050406030204" pitchFamily="18" charset="0"/>
-                              </a:rPr>
-                              <m:t>=0|</m:t>
-                            </m:r>
-                            <m:r>
-                              <a:rPr lang="en-US" b="0" i="1" smtClean="0">
-                                <a:latin typeface="Cambria Math" panose="02040503050406030204" pitchFamily="18" charset="0"/>
-                                <a:ea typeface="Cambria Math" panose="02040503050406030204" pitchFamily="18" charset="0"/>
-                              </a:rPr>
-                              <m:t>𝑋</m:t>
-                            </m:r>
-                          </m:e>
-                        </m:d>
-                      </m:e>
-                    </m:func>
-                  </m:oMath>
-                </a14:m>
-                <a:endParaRPr lang="es-ES_tradnl" dirty="0"/>
-              </a:p>
-              <a:p>
-                <a:pPr>
-                  <a:lnSpc>
-                    <a:spcPct val="160000"/>
-                  </a:lnSpc>
-                </a:pPr>
-                <a:r>
-                  <a:rPr lang="es-ES_tradnl" dirty="0">
-                    <a:solidFill>
-                      <a:srgbClr val="002060"/>
-                    </a:solidFill>
-                  </a:rPr>
-                  <a:t>Función de Perdida </a:t>
-                </a:r>
-                <a14:m>
-                  <m:oMath xmlns:m="http://schemas.openxmlformats.org/officeDocument/2006/math">
-                    <m:r>
-                      <a:rPr lang="en-US" b="0" i="1" smtClean="0">
-                        <a:latin typeface="Cambria Math" panose="02040503050406030204" pitchFamily="18" charset="0"/>
-                        <a:ea typeface="Cambria Math" panose="02040503050406030204" pitchFamily="18" charset="0"/>
-                      </a:rPr>
-                      <m:t>𝜆</m:t>
-                    </m:r>
                     <m:d>
                       <m:dPr>
                         <m:ctrlPr>
@@ -12825,29 +13473,44 @@
                             <a:latin typeface="Cambria Math" panose="02040503050406030204" pitchFamily="18" charset="0"/>
                             <a:ea typeface="Cambria Math" panose="02040503050406030204" pitchFamily="18" charset="0"/>
                           </a:rPr>
-                          <m:t>𝑖</m:t>
+                          <m:t>0,</m:t>
                         </m:r>
                         <m:r>
-                          <a:rPr lang="en-US" b="0" i="1" smtClean="0">
+                          <a:rPr lang="es-ES_tradnl" b="0" i="1" smtClean="0">
                             <a:latin typeface="Cambria Math" panose="02040503050406030204" pitchFamily="18" charset="0"/>
                             <a:ea typeface="Cambria Math" panose="02040503050406030204" pitchFamily="18" charset="0"/>
                           </a:rPr>
-                          <m:t>,</m:t>
-                        </m:r>
-                        <m:r>
-                          <a:rPr lang="en-US" b="0" i="1" smtClean="0">
-                            <a:latin typeface="Cambria Math" panose="02040503050406030204" pitchFamily="18" charset="0"/>
-                            <a:ea typeface="Cambria Math" panose="02040503050406030204" pitchFamily="18" charset="0"/>
-                          </a:rPr>
-                          <m:t>𝑗</m:t>
+                          <m:t>1</m:t>
                         </m:r>
                       </m:e>
                     </m:d>
                   </m:oMath>
                 </a14:m>
+                <a:endParaRPr lang="es-ES_tradnl" dirty="0"/>
+              </a:p>
+              <a:p>
+                <a:pPr>
+                  <a:lnSpc>
+                    <a:spcPct val="120000"/>
+                  </a:lnSpc>
+                </a:pPr>
                 <a:r>
                   <a:rPr lang="es-ES_tradnl" dirty="0"/>
-                  <a:t>: castiga por estar en la celda </a:t>
+                  <a:t>Relaciones no lineales entre </a:t>
+                </a:r>
+                <a14:m>
+                  <m:oMath xmlns:m="http://schemas.openxmlformats.org/officeDocument/2006/math">
+                    <m:r>
+                      <a:rPr lang="es-ES_tradnl" b="0" i="1" smtClean="0">
+                        <a:latin typeface="Cambria Math" panose="02040503050406030204" pitchFamily="18" charset="0"/>
+                      </a:rPr>
+                      <m:t>𝑌</m:t>
+                    </m:r>
+                  </m:oMath>
+                </a14:m>
+                <a:r>
+                  <a:rPr lang="es-ES_tradnl" dirty="0"/>
+                  <a:t> e </a:t>
                 </a:r>
                 <a14:m>
                   <m:oMath xmlns:m="http://schemas.openxmlformats.org/officeDocument/2006/math">
@@ -12856,251 +13519,99 @@
                         <a:latin typeface="Cambria Math" panose="02040503050406030204" pitchFamily="18" charset="0"/>
                         <a:ea typeface="Cambria Math" panose="02040503050406030204" pitchFamily="18" charset="0"/>
                       </a:rPr>
-                      <m:t>𝑖</m:t>
-                    </m:r>
-                    <m:r>
-                      <a:rPr lang="en-US" i="1">
-                        <a:latin typeface="Cambria Math" panose="02040503050406030204" pitchFamily="18" charset="0"/>
-                        <a:ea typeface="Cambria Math" panose="02040503050406030204" pitchFamily="18" charset="0"/>
-                      </a:rPr>
-                      <m:t>,</m:t>
-                    </m:r>
-                    <m:r>
-                      <a:rPr lang="en-US" i="1">
-                        <a:latin typeface="Cambria Math" panose="02040503050406030204" pitchFamily="18" charset="0"/>
-                        <a:ea typeface="Cambria Math" panose="02040503050406030204" pitchFamily="18" charset="0"/>
-                      </a:rPr>
-                      <m:t>𝑗</m:t>
+                      <m:t>𝑋</m:t>
                     </m:r>
                   </m:oMath>
                 </a14:m>
+                <a:endParaRPr lang="es-ES_tradnl" dirty="0"/>
+              </a:p>
+              <a:p>
+                <a:pPr>
+                  <a:lnSpc>
+                    <a:spcPct val="120000"/>
+                  </a:lnSpc>
+                </a:pPr>
                 <a:r>
                   <a:rPr lang="es-ES_tradnl" dirty="0"/>
-                  <a:t> de la matriz de confusión </a:t>
+                  <a:t>Correlaciones de los errores</a:t>
                 </a:r>
               </a:p>
               <a:p>
                 <a:pPr>
                   <a:lnSpc>
-                    <a:spcPct val="160000"/>
+                    <a:spcPct val="120000"/>
                   </a:lnSpc>
                 </a:pPr>
                 <a:r>
+                  <a:rPr lang="es-ES_tradnl" dirty="0"/>
+                  <a:t>Heteroscedasticidad</a:t>
+                </a:r>
+              </a:p>
+              <a:p>
+                <a:pPr>
+                  <a:lnSpc>
+                    <a:spcPct val="120000"/>
+                  </a:lnSpc>
+                </a:pPr>
+                <a:r>
+                  <a:rPr lang="es-ES_tradnl" dirty="0" err="1"/>
+                  <a:t>Outliers</a:t>
+                </a:r>
+                <a:r>
+                  <a:rPr lang="es-ES_tradnl" dirty="0"/>
+                  <a:t> y Observaciones con mucha influencia en la predicción</a:t>
+                </a:r>
+                <a:r>
                   <a:rPr lang="es-ES_tradnl" dirty="0">
-                    <a:solidFill>
-                      <a:srgbClr val="002060"/>
-                    </a:solidFill>
+                    <a:sym typeface="Wingdings" pitchFamily="2" charset="2"/>
                   </a:rPr>
-                  <a:t>Riesgo esperado de la predicción </a:t>
+                  <a:t> medidas VIF</a:t>
+                </a:r>
+              </a:p>
+              <a:p>
+                <a:pPr>
+                  <a:lnSpc>
+                    <a:spcPct val="120000"/>
+                  </a:lnSpc>
+                </a:pPr>
+                <a:r>
+                  <a:rPr lang="es-ES_tradnl" dirty="0"/>
+                  <a:t>Problemas de alta multicolinealidad entre las </a:t>
                 </a:r>
                 <a14:m>
                   <m:oMath xmlns:m="http://schemas.openxmlformats.org/officeDocument/2006/math">
                     <m:r>
-                      <a:rPr lang="en-US" b="0" i="1" smtClean="0">
-                        <a:solidFill>
-                          <a:srgbClr val="002060"/>
-                        </a:solidFill>
+                      <a:rPr lang="en-US" i="1" smtClean="0">
                         <a:latin typeface="Cambria Math" panose="02040503050406030204" pitchFamily="18" charset="0"/>
                         <a:ea typeface="Cambria Math" panose="02040503050406030204" pitchFamily="18" charset="0"/>
                       </a:rPr>
-                      <m:t>𝑖</m:t>
+                      <m:t>𝑋</m:t>
                     </m:r>
                   </m:oMath>
                 </a14:m>
-                <a:r>
-                  <a:rPr lang="es-ES_tradnl" dirty="0"/>
-                  <a:t>: Castigo esperado:</a:t>
-                </a:r>
+                <a:endParaRPr lang="es-ES_tradnl" dirty="0"/>
               </a:p>
               <a:p>
-                <a:pPr marL="0" indent="0">
+                <a:pPr>
                   <a:lnSpc>
-                    <a:spcPct val="160000"/>
+                    <a:spcPct val="120000"/>
                   </a:lnSpc>
-                  <a:buNone/>
-                </a:pPr>
-                <a14:m>
-                  <m:oMathPara xmlns:m="http://schemas.openxmlformats.org/officeDocument/2006/math">
-                    <m:oMathParaPr>
-                      <m:jc m:val="centerGroup"/>
-                    </m:oMathParaPr>
-                    <m:oMath xmlns:m="http://schemas.openxmlformats.org/officeDocument/2006/math">
-                      <m:r>
-                        <a:rPr lang="en-US" b="0" i="1" smtClean="0">
-                          <a:latin typeface="Cambria Math" panose="02040503050406030204" pitchFamily="18" charset="0"/>
-                          <a:ea typeface="Cambria Math" panose="02040503050406030204" pitchFamily="18" charset="0"/>
-                        </a:rPr>
-                        <m:t>𝑅</m:t>
-                      </m:r>
-                      <m:d>
-                        <m:dPr>
-                          <m:ctrlPr>
-                            <a:rPr lang="en-US" b="0" i="1" smtClean="0">
-                              <a:latin typeface="Cambria Math" panose="02040503050406030204" pitchFamily="18" charset="0"/>
-                              <a:ea typeface="Cambria Math" panose="02040503050406030204" pitchFamily="18" charset="0"/>
-                            </a:rPr>
-                          </m:ctrlPr>
-                        </m:dPr>
-                        <m:e>
-                          <m:r>
-                            <a:rPr lang="en-US" b="0" i="1" smtClean="0">
-                              <a:latin typeface="Cambria Math" panose="02040503050406030204" pitchFamily="18" charset="0"/>
-                              <a:ea typeface="Cambria Math" panose="02040503050406030204" pitchFamily="18" charset="0"/>
-                            </a:rPr>
-                            <m:t>𝑖</m:t>
-                          </m:r>
-                        </m:e>
-                      </m:d>
-                      <m:r>
-                        <a:rPr lang="en-US" b="0" i="1" smtClean="0">
-                          <a:latin typeface="Cambria Math" panose="02040503050406030204" pitchFamily="18" charset="0"/>
-                          <a:ea typeface="Cambria Math" panose="02040503050406030204" pitchFamily="18" charset="0"/>
-                        </a:rPr>
-                        <m:t>=</m:t>
-                      </m:r>
-                      <m:d>
-                        <m:dPr>
-                          <m:ctrlPr>
-                            <a:rPr lang="en-US" b="0" i="1" smtClean="0">
-                              <a:latin typeface="Cambria Math" panose="02040503050406030204" pitchFamily="18" charset="0"/>
-                              <a:ea typeface="Cambria Math" panose="02040503050406030204" pitchFamily="18" charset="0"/>
-                            </a:rPr>
-                          </m:ctrlPr>
-                        </m:dPr>
-                        <m:e>
-                          <m:r>
-                            <a:rPr lang="en-US" b="0" i="1" smtClean="0">
-                              <a:latin typeface="Cambria Math" panose="02040503050406030204" pitchFamily="18" charset="0"/>
-                              <a:ea typeface="Cambria Math" panose="02040503050406030204" pitchFamily="18" charset="0"/>
-                            </a:rPr>
-                            <m:t>1−</m:t>
-                          </m:r>
-                          <m:r>
-                            <a:rPr lang="en-US" b="0" i="1" smtClean="0">
-                              <a:latin typeface="Cambria Math" panose="02040503050406030204" pitchFamily="18" charset="0"/>
-                              <a:ea typeface="Cambria Math" panose="02040503050406030204" pitchFamily="18" charset="0"/>
-                            </a:rPr>
-                            <m:t>𝑝</m:t>
-                          </m:r>
-                        </m:e>
-                      </m:d>
-                      <m:r>
-                        <a:rPr lang="en-US" b="0" i="1" smtClean="0">
-                          <a:latin typeface="Cambria Math" panose="02040503050406030204" pitchFamily="18" charset="0"/>
-                          <a:ea typeface="Cambria Math" panose="02040503050406030204" pitchFamily="18" charset="0"/>
-                        </a:rPr>
-                        <m:t>𝜆</m:t>
-                      </m:r>
-                      <m:d>
-                        <m:dPr>
-                          <m:ctrlPr>
-                            <a:rPr lang="en-US" b="0" i="1" smtClean="0">
-                              <a:latin typeface="Cambria Math" panose="02040503050406030204" pitchFamily="18" charset="0"/>
-                              <a:ea typeface="Cambria Math" panose="02040503050406030204" pitchFamily="18" charset="0"/>
-                            </a:rPr>
-                          </m:ctrlPr>
-                        </m:dPr>
-                        <m:e>
-                          <m:r>
-                            <a:rPr lang="en-US" b="0" i="1" smtClean="0">
-                              <a:latin typeface="Cambria Math" panose="02040503050406030204" pitchFamily="18" charset="0"/>
-                              <a:ea typeface="Cambria Math" panose="02040503050406030204" pitchFamily="18" charset="0"/>
-                            </a:rPr>
-                            <m:t>𝑖</m:t>
-                          </m:r>
-                          <m:r>
-                            <a:rPr lang="en-US" b="0" i="1" smtClean="0">
-                              <a:latin typeface="Cambria Math" panose="02040503050406030204" pitchFamily="18" charset="0"/>
-                              <a:ea typeface="Cambria Math" panose="02040503050406030204" pitchFamily="18" charset="0"/>
-                            </a:rPr>
-                            <m:t>,0</m:t>
-                          </m:r>
-                        </m:e>
-                      </m:d>
-                      <m:r>
-                        <a:rPr lang="en-US" b="0" i="1" smtClean="0">
-                          <a:latin typeface="Cambria Math" panose="02040503050406030204" pitchFamily="18" charset="0"/>
-                          <a:ea typeface="Cambria Math" panose="02040503050406030204" pitchFamily="18" charset="0"/>
-                        </a:rPr>
-                        <m:t>+</m:t>
-                      </m:r>
-                      <m:r>
-                        <a:rPr lang="en-US" b="0" i="1" smtClean="0">
-                          <a:latin typeface="Cambria Math" panose="02040503050406030204" pitchFamily="18" charset="0"/>
-                          <a:ea typeface="Cambria Math" panose="02040503050406030204" pitchFamily="18" charset="0"/>
-                        </a:rPr>
-                        <m:t>𝑝</m:t>
-                      </m:r>
-                      <m:r>
-                        <a:rPr lang="en-US" b="0" i="1" smtClean="0">
-                          <a:latin typeface="Cambria Math" panose="02040503050406030204" pitchFamily="18" charset="0"/>
-                          <a:ea typeface="Cambria Math" panose="02040503050406030204" pitchFamily="18" charset="0"/>
-                        </a:rPr>
-                        <m:t>𝜆</m:t>
-                      </m:r>
-                      <m:d>
-                        <m:dPr>
-                          <m:ctrlPr>
-                            <a:rPr lang="en-US" b="0" i="1" smtClean="0">
-                              <a:latin typeface="Cambria Math" panose="02040503050406030204" pitchFamily="18" charset="0"/>
-                              <a:ea typeface="Cambria Math" panose="02040503050406030204" pitchFamily="18" charset="0"/>
-                            </a:rPr>
-                          </m:ctrlPr>
-                        </m:dPr>
-                        <m:e>
-                          <m:r>
-                            <a:rPr lang="en-US" b="0" i="1" smtClean="0">
-                              <a:latin typeface="Cambria Math" panose="02040503050406030204" pitchFamily="18" charset="0"/>
-                              <a:ea typeface="Cambria Math" panose="02040503050406030204" pitchFamily="18" charset="0"/>
-                            </a:rPr>
-                            <m:t>𝑖</m:t>
-                          </m:r>
-                          <m:r>
-                            <a:rPr lang="en-US" b="0" i="1" smtClean="0">
-                              <a:latin typeface="Cambria Math" panose="02040503050406030204" pitchFamily="18" charset="0"/>
-                              <a:ea typeface="Cambria Math" panose="02040503050406030204" pitchFamily="18" charset="0"/>
-                            </a:rPr>
-                            <m:t>,1</m:t>
-                          </m:r>
-                        </m:e>
-                      </m:d>
-                    </m:oMath>
-                  </m:oMathPara>
-                </a14:m>
-                <a:endParaRPr lang="en-US" b="0" dirty="0">
-                  <a:ea typeface="Cambria Math" panose="02040503050406030204" pitchFamily="18" charset="0"/>
-                </a:endParaRPr>
-              </a:p>
-              <a:p>
-                <a:pPr marL="0" indent="0">
-                  <a:lnSpc>
-                    <a:spcPct val="160000"/>
-                  </a:lnSpc>
-                  <a:buNone/>
                 </a:pPr>
                 <a:r>
-                  <a:rPr lang="es-ES_tradnl" dirty="0">
-                    <a:solidFill>
-                      <a:srgbClr val="002060"/>
-                    </a:solidFill>
-                  </a:rPr>
-                  <a:t>Idea</a:t>
+                  <a:rPr lang="es-ES_tradnl" dirty="0" err="1"/>
+                  <a:t>logit</a:t>
                 </a:r>
                 <a:r>
                   <a:rPr lang="es-ES_tradnl" dirty="0"/>
-                  <a:t>: predecir la categoría que </a:t>
+                  <a:t>/análisis discriminante es </a:t>
                 </a:r>
                 <a:r>
-                  <a:rPr lang="es-ES_tradnl" dirty="0">
-                    <a:solidFill>
-                      <a:srgbClr val="002060"/>
-                    </a:solidFill>
-                  </a:rPr>
-                  <a:t>minimiza</a:t>
+                  <a:rPr lang="es-ES_tradnl" b="1" dirty="0"/>
+                  <a:t>fácil</a:t>
                 </a:r>
                 <a:r>
                   <a:rPr lang="es-ES_tradnl" dirty="0"/>
-                  <a:t> el riesgo esperado. Tenemos que definir: </a:t>
+                  <a:t> de generalizar al caso de </a:t>
                 </a:r>
                 <a14:m>
                   <m:oMath xmlns:m="http://schemas.openxmlformats.org/officeDocument/2006/math">
@@ -13109,43 +13620,21 @@
                         <a:latin typeface="Cambria Math" panose="02040503050406030204" pitchFamily="18" charset="0"/>
                         <a:ea typeface="Cambria Math" panose="02040503050406030204" pitchFamily="18" charset="0"/>
                       </a:rPr>
-                      <m:t>𝜆</m:t>
+                      <m:t>𝑃</m:t>
                     </m:r>
-                    <m:d>
-                      <m:dPr>
-                        <m:ctrlPr>
-                          <a:rPr lang="en-US" b="0" i="1" smtClean="0">
-                            <a:latin typeface="Cambria Math" panose="02040503050406030204" pitchFamily="18" charset="0"/>
-                            <a:ea typeface="Cambria Math" panose="02040503050406030204" pitchFamily="18" charset="0"/>
-                          </a:rPr>
-                        </m:ctrlPr>
-                      </m:dPr>
-                      <m:e>
-                        <m:r>
-                          <a:rPr lang="en-US" b="0" i="1" smtClean="0">
-                            <a:latin typeface="Cambria Math" panose="02040503050406030204" pitchFamily="18" charset="0"/>
-                            <a:ea typeface="Cambria Math" panose="02040503050406030204" pitchFamily="18" charset="0"/>
-                          </a:rPr>
-                          <m:t>𝑖</m:t>
-                        </m:r>
-                        <m:r>
-                          <a:rPr lang="en-US" b="0" i="1" smtClean="0">
-                            <a:latin typeface="Cambria Math" panose="02040503050406030204" pitchFamily="18" charset="0"/>
-                            <a:ea typeface="Cambria Math" panose="02040503050406030204" pitchFamily="18" charset="0"/>
-                          </a:rPr>
-                          <m:t>,</m:t>
-                        </m:r>
-                        <m:r>
-                          <a:rPr lang="en-US" b="0" i="1" smtClean="0">
-                            <a:latin typeface="Cambria Math" panose="02040503050406030204" pitchFamily="18" charset="0"/>
-                            <a:ea typeface="Cambria Math" panose="02040503050406030204" pitchFamily="18" charset="0"/>
-                          </a:rPr>
-                          <m:t>𝑗</m:t>
-                        </m:r>
-                      </m:e>
-                    </m:d>
                   </m:oMath>
                 </a14:m>
+                <a:r>
+                  <a:rPr lang="es-ES_tradnl" dirty="0"/>
+                  <a:t> categorías no ordenadas.</a:t>
+                </a:r>
+              </a:p>
+              <a:p>
+                <a:pPr>
+                  <a:lnSpc>
+                    <a:spcPct val="120000"/>
+                  </a:lnSpc>
+                </a:pPr>
                 <a:endParaRPr lang="es-ES_tradnl" dirty="0"/>
               </a:p>
             </p:txBody>
@@ -13157,7 +13646,7 @@
               <p:cNvPr id="3" name="Content Placeholder 2">
                 <a:extLst>
                   <a:ext uri="{FF2B5EF4-FFF2-40B4-BE49-F238E27FC236}">
-                    <a16:creationId xmlns:a16="http://schemas.microsoft.com/office/drawing/2014/main" id="{4DCB7428-BAF8-C43C-0F61-3A249901DD51}"/>
+                    <a16:creationId xmlns:a16="http://schemas.microsoft.com/office/drawing/2014/main" id="{226CE70E-DF44-F112-1149-056C52EBB750}"/>
                   </a:ext>
                 </a:extLst>
               </p:cNvPr>
@@ -13165,14 +13654,14 @@
                 <a:spLocks noGrp="1" noRot="1" noChangeAspect="1" noMove="1" noResize="1" noEditPoints="1" noAdjustHandles="1" noChangeArrowheads="1" noChangeShapeType="1" noTextEdit="1"/>
               </p:cNvSpPr>
               <p:nvPr>
-                <p:ph idx="1"/>
+                <p:ph sz="half" idx="1"/>
               </p:nvPr>
             </p:nvSpPr>
             <p:spPr>
               <a:blipFill>
-                <a:blip r:embed="rId3"/>
+                <a:blip r:embed="rId4"/>
                 <a:stretch>
-                  <a:fillRect l="-724"/>
+                  <a:fillRect l="-1222" t="-291" r="-244"/>
                 </a:stretch>
               </a:blipFill>
             </p:spPr>
@@ -13191,10 +13680,81 @@
           </p:sp>
         </mc:Fallback>
       </mc:AlternateContent>
+      <p:pic>
+        <p:nvPicPr>
+          <p:cNvPr id="6" name="Content Placeholder 5" descr="A graph with a line and a line&#10;&#10;Description automatically generated">
+            <a:extLst>
+              <a:ext uri="{FF2B5EF4-FFF2-40B4-BE49-F238E27FC236}">
+                <a16:creationId xmlns:a16="http://schemas.microsoft.com/office/drawing/2014/main" id="{5BDE54AD-E4B7-6E7D-200E-C79D8A1DB71E}"/>
+              </a:ext>
+            </a:extLst>
+          </p:cNvPr>
+          <p:cNvPicPr>
+            <a:picLocks noGrp="1" noChangeAspect="1"/>
+          </p:cNvPicPr>
+          <p:nvPr>
+            <p:ph sz="half" idx="2"/>
+          </p:nvPr>
+        </p:nvPicPr>
+        <p:blipFill>
+          <a:blip r:embed="rId5"/>
+          <a:stretch>
+            <a:fillRect/>
+          </a:stretch>
+        </p:blipFill>
+        <p:spPr>
+          <a:xfrm>
+            <a:off x="6019800" y="1604963"/>
+            <a:ext cx="5900615" cy="4572000"/>
+          </a:xfrm>
+        </p:spPr>
+      </p:pic>
+      <p:sp>
+        <p:nvSpPr>
+          <p:cNvPr id="7" name="TextBox 6">
+            <a:extLst>
+              <a:ext uri="{FF2B5EF4-FFF2-40B4-BE49-F238E27FC236}">
+                <a16:creationId xmlns:a16="http://schemas.microsoft.com/office/drawing/2014/main" id="{BBEE4864-CBC5-C3AC-3FA2-3943E6E1B6BE}"/>
+              </a:ext>
+            </a:extLst>
+          </p:cNvPr>
+          <p:cNvSpPr txBox="1"/>
+          <p:nvPr/>
+        </p:nvSpPr>
+        <p:spPr>
+          <a:xfrm>
+            <a:off x="6566014" y="6120984"/>
+            <a:ext cx="5181599" cy="338554"/>
+          </a:xfrm>
+          <a:prstGeom prst="rect">
+            <a:avLst/>
+          </a:prstGeom>
+          <a:noFill/>
+        </p:spPr>
+        <p:txBody>
+          <a:bodyPr wrap="square">
+            <a:spAutoFit/>
+          </a:bodyPr>
+          <a:lstStyle/>
+          <a:p>
+            <a:r>
+              <a:rPr lang="en-US" sz="1600" dirty="0">
+                <a:effectLst/>
+                <a:latin typeface="Gill Sans Nova Light" panose="020B0302020104020203" pitchFamily="34" charset="0"/>
+              </a:rPr>
+              <a:t>Fuente: James, Witten, Hastie y Tibshirani, 2013. p.131 </a:t>
+            </a:r>
+            <a:endParaRPr lang="en-US" sz="4400" dirty="0">
+              <a:effectLst/>
+              <a:latin typeface="Gill Sans Nova Light" panose="020B0302020104020203" pitchFamily="34" charset="0"/>
+            </a:endParaRPr>
+          </a:p>
+        </p:txBody>
+      </p:sp>
     </p:spTree>
     <p:extLst>
       <p:ext uri="{BB962C8B-B14F-4D97-AF65-F5344CB8AC3E}">
-        <p14:creationId xmlns:p14="http://schemas.microsoft.com/office/powerpoint/2010/main" val="3981839531"/>
+        <p14:creationId xmlns:p14="http://schemas.microsoft.com/office/powerpoint/2010/main" val="468922351"/>
       </p:ext>
     </p:extLst>
   </p:cSld>
@@ -13602,3163 +14162,6 @@
           <p:cNvPr id="2" name="Title 1">
             <a:extLst>
               <a:ext uri="{FF2B5EF4-FFF2-40B4-BE49-F238E27FC236}">
-                <a16:creationId xmlns:a16="http://schemas.microsoft.com/office/drawing/2014/main" id="{B31047C5-1CF1-5BD7-8E22-5FD0B175D33A}"/>
-              </a:ext>
-            </a:extLst>
-          </p:cNvPr>
-          <p:cNvSpPr>
-            <a:spLocks noGrp="1"/>
-          </p:cNvSpPr>
-          <p:nvPr>
-            <p:ph type="title"/>
-          </p:nvPr>
-        </p:nvSpPr>
-        <p:spPr/>
-        <p:txBody>
-          <a:bodyPr/>
-          <a:lstStyle/>
-          <a:p>
-            <a:r>
-              <a:rPr lang="es-ES_tradnl" dirty="0"/>
-              <a:t>Clasificador de Bayes I</a:t>
-            </a:r>
-          </a:p>
-        </p:txBody>
-      </p:sp>
-      <mc:AlternateContent xmlns:mc="http://schemas.openxmlformats.org/markup-compatibility/2006" xmlns:a14="http://schemas.microsoft.com/office/drawing/2010/main">
-        <mc:Choice Requires="a14">
-          <p:sp>
-            <p:nvSpPr>
-              <p:cNvPr id="3" name="Content Placeholder 2">
-                <a:extLst>
-                  <a:ext uri="{FF2B5EF4-FFF2-40B4-BE49-F238E27FC236}">
-                    <a16:creationId xmlns:a16="http://schemas.microsoft.com/office/drawing/2014/main" id="{CEDEC7B7-FFAA-1B1E-300A-35BAE8E1B19C}"/>
-                  </a:ext>
-                </a:extLst>
-              </p:cNvPr>
-              <p:cNvSpPr>
-                <a:spLocks noGrp="1"/>
-              </p:cNvSpPr>
-              <p:nvPr>
-                <p:ph idx="1"/>
-              </p:nvPr>
-            </p:nvSpPr>
-            <p:spPr/>
-            <p:txBody>
-              <a:bodyPr>
-                <a:normAutofit/>
-              </a:bodyPr>
-              <a:lstStyle/>
-              <a:p>
-                <a:pPr marL="0" indent="0">
-                  <a:lnSpc>
-                    <a:spcPct val="120000"/>
-                  </a:lnSpc>
-                  <a:buNone/>
-                </a:pPr>
-                <a14:m>
-                  <m:oMathPara xmlns:m="http://schemas.openxmlformats.org/officeDocument/2006/math">
-                    <m:oMathParaPr>
-                      <m:jc m:val="centerGroup"/>
-                    </m:oMathParaPr>
-                    <m:oMath xmlns:m="http://schemas.openxmlformats.org/officeDocument/2006/math">
-                      <m:r>
-                        <a:rPr lang="en-US" b="0" i="1" smtClean="0">
-                          <a:latin typeface="Cambria Math" panose="02040503050406030204" pitchFamily="18" charset="0"/>
-                          <a:ea typeface="Cambria Math" panose="02040503050406030204" pitchFamily="18" charset="0"/>
-                        </a:rPr>
-                        <m:t>𝑅</m:t>
-                      </m:r>
-                      <m:d>
-                        <m:dPr>
-                          <m:ctrlPr>
-                            <a:rPr lang="en-US" b="0" i="1" smtClean="0">
-                              <a:latin typeface="Cambria Math" panose="02040503050406030204" pitchFamily="18" charset="0"/>
-                              <a:ea typeface="Cambria Math" panose="02040503050406030204" pitchFamily="18" charset="0"/>
-                            </a:rPr>
-                          </m:ctrlPr>
-                        </m:dPr>
-                        <m:e>
-                          <m:r>
-                            <a:rPr lang="en-US" b="0" i="1" smtClean="0">
-                              <a:latin typeface="Cambria Math" panose="02040503050406030204" pitchFamily="18" charset="0"/>
-                              <a:ea typeface="Cambria Math" panose="02040503050406030204" pitchFamily="18" charset="0"/>
-                            </a:rPr>
-                            <m:t>𝑖</m:t>
-                          </m:r>
-                        </m:e>
-                      </m:d>
-                      <m:r>
-                        <a:rPr lang="en-US" b="0" i="1" smtClean="0">
-                          <a:latin typeface="Cambria Math" panose="02040503050406030204" pitchFamily="18" charset="0"/>
-                          <a:ea typeface="Cambria Math" panose="02040503050406030204" pitchFamily="18" charset="0"/>
-                        </a:rPr>
-                        <m:t>=</m:t>
-                      </m:r>
-                      <m:d>
-                        <m:dPr>
-                          <m:ctrlPr>
-                            <a:rPr lang="en-US" b="0" i="1" smtClean="0">
-                              <a:latin typeface="Cambria Math" panose="02040503050406030204" pitchFamily="18" charset="0"/>
-                              <a:ea typeface="Cambria Math" panose="02040503050406030204" pitchFamily="18" charset="0"/>
-                            </a:rPr>
-                          </m:ctrlPr>
-                        </m:dPr>
-                        <m:e>
-                          <m:r>
-                            <a:rPr lang="en-US" b="0" i="1" smtClean="0">
-                              <a:latin typeface="Cambria Math" panose="02040503050406030204" pitchFamily="18" charset="0"/>
-                              <a:ea typeface="Cambria Math" panose="02040503050406030204" pitchFamily="18" charset="0"/>
-                            </a:rPr>
-                            <m:t>1−</m:t>
-                          </m:r>
-                          <m:r>
-                            <a:rPr lang="en-US" b="0" i="1" smtClean="0">
-                              <a:latin typeface="Cambria Math" panose="02040503050406030204" pitchFamily="18" charset="0"/>
-                              <a:ea typeface="Cambria Math" panose="02040503050406030204" pitchFamily="18" charset="0"/>
-                            </a:rPr>
-                            <m:t>𝑝</m:t>
-                          </m:r>
-                        </m:e>
-                      </m:d>
-                      <m:r>
-                        <a:rPr lang="en-US" b="0" i="1" smtClean="0">
-                          <a:latin typeface="Cambria Math" panose="02040503050406030204" pitchFamily="18" charset="0"/>
-                          <a:ea typeface="Cambria Math" panose="02040503050406030204" pitchFamily="18" charset="0"/>
-                        </a:rPr>
-                        <m:t>𝜆</m:t>
-                      </m:r>
-                      <m:d>
-                        <m:dPr>
-                          <m:ctrlPr>
-                            <a:rPr lang="en-US" b="0" i="1" smtClean="0">
-                              <a:latin typeface="Cambria Math" panose="02040503050406030204" pitchFamily="18" charset="0"/>
-                              <a:ea typeface="Cambria Math" panose="02040503050406030204" pitchFamily="18" charset="0"/>
-                            </a:rPr>
-                          </m:ctrlPr>
-                        </m:dPr>
-                        <m:e>
-                          <m:r>
-                            <a:rPr lang="en-US" b="0" i="1" smtClean="0">
-                              <a:latin typeface="Cambria Math" panose="02040503050406030204" pitchFamily="18" charset="0"/>
-                              <a:ea typeface="Cambria Math" panose="02040503050406030204" pitchFamily="18" charset="0"/>
-                            </a:rPr>
-                            <m:t>𝑖</m:t>
-                          </m:r>
-                          <m:r>
-                            <a:rPr lang="en-US" b="0" i="1" smtClean="0">
-                              <a:latin typeface="Cambria Math" panose="02040503050406030204" pitchFamily="18" charset="0"/>
-                              <a:ea typeface="Cambria Math" panose="02040503050406030204" pitchFamily="18" charset="0"/>
-                            </a:rPr>
-                            <m:t>,0</m:t>
-                          </m:r>
-                        </m:e>
-                      </m:d>
-                      <m:r>
-                        <a:rPr lang="en-US" b="0" i="1" smtClean="0">
-                          <a:latin typeface="Cambria Math" panose="02040503050406030204" pitchFamily="18" charset="0"/>
-                          <a:ea typeface="Cambria Math" panose="02040503050406030204" pitchFamily="18" charset="0"/>
-                        </a:rPr>
-                        <m:t>+</m:t>
-                      </m:r>
-                      <m:r>
-                        <a:rPr lang="en-US" b="0" i="1" smtClean="0">
-                          <a:latin typeface="Cambria Math" panose="02040503050406030204" pitchFamily="18" charset="0"/>
-                          <a:ea typeface="Cambria Math" panose="02040503050406030204" pitchFamily="18" charset="0"/>
-                        </a:rPr>
-                        <m:t>𝑝</m:t>
-                      </m:r>
-                      <m:r>
-                        <a:rPr lang="en-US" b="0" i="1" smtClean="0">
-                          <a:latin typeface="Cambria Math" panose="02040503050406030204" pitchFamily="18" charset="0"/>
-                          <a:ea typeface="Cambria Math" panose="02040503050406030204" pitchFamily="18" charset="0"/>
-                        </a:rPr>
-                        <m:t>𝜆</m:t>
-                      </m:r>
-                      <m:d>
-                        <m:dPr>
-                          <m:ctrlPr>
-                            <a:rPr lang="en-US" b="0" i="1" smtClean="0">
-                              <a:latin typeface="Cambria Math" panose="02040503050406030204" pitchFamily="18" charset="0"/>
-                              <a:ea typeface="Cambria Math" panose="02040503050406030204" pitchFamily="18" charset="0"/>
-                            </a:rPr>
-                          </m:ctrlPr>
-                        </m:dPr>
-                        <m:e>
-                          <m:r>
-                            <a:rPr lang="en-US" b="0" i="1" smtClean="0">
-                              <a:latin typeface="Cambria Math" panose="02040503050406030204" pitchFamily="18" charset="0"/>
-                              <a:ea typeface="Cambria Math" panose="02040503050406030204" pitchFamily="18" charset="0"/>
-                            </a:rPr>
-                            <m:t>𝑖</m:t>
-                          </m:r>
-                          <m:r>
-                            <a:rPr lang="en-US" b="0" i="1" smtClean="0">
-                              <a:latin typeface="Cambria Math" panose="02040503050406030204" pitchFamily="18" charset="0"/>
-                              <a:ea typeface="Cambria Math" panose="02040503050406030204" pitchFamily="18" charset="0"/>
-                            </a:rPr>
-                            <m:t>,1</m:t>
-                          </m:r>
-                        </m:e>
-                      </m:d>
-                    </m:oMath>
-                  </m:oMathPara>
-                </a14:m>
-                <a:endParaRPr lang="es-ES_tradnl" dirty="0"/>
-              </a:p>
-              <a:p>
-                <a:pPr>
-                  <a:lnSpc>
-                    <a:spcPct val="120000"/>
-                  </a:lnSpc>
-                </a:pPr>
-                <a:r>
-                  <a:rPr lang="es-ES_tradnl" dirty="0"/>
-                  <a:t>Definimos la pérdida 0-1: </a:t>
-                </a:r>
-                <a14:m>
-                  <m:oMath xmlns:m="http://schemas.openxmlformats.org/officeDocument/2006/math">
-                    <m:r>
-                      <a:rPr lang="en-US" b="0" i="1" smtClean="0">
-                        <a:latin typeface="Cambria Math" panose="02040503050406030204" pitchFamily="18" charset="0"/>
-                        <a:ea typeface="Cambria Math" panose="02040503050406030204" pitchFamily="18" charset="0"/>
-                      </a:rPr>
-                      <m:t>𝜆</m:t>
-                    </m:r>
-                    <m:d>
-                      <m:dPr>
-                        <m:ctrlPr>
-                          <a:rPr lang="en-US" b="0" i="1" smtClean="0">
-                            <a:latin typeface="Cambria Math" panose="02040503050406030204" pitchFamily="18" charset="0"/>
-                            <a:ea typeface="Cambria Math" panose="02040503050406030204" pitchFamily="18" charset="0"/>
-                          </a:rPr>
-                        </m:ctrlPr>
-                      </m:dPr>
-                      <m:e>
-                        <m:r>
-                          <a:rPr lang="en-US" b="0" i="1" smtClean="0">
-                            <a:latin typeface="Cambria Math" panose="02040503050406030204" pitchFamily="18" charset="0"/>
-                            <a:ea typeface="Cambria Math" panose="02040503050406030204" pitchFamily="18" charset="0"/>
-                          </a:rPr>
-                          <m:t>𝑖</m:t>
-                        </m:r>
-                        <m:r>
-                          <a:rPr lang="en-US" b="0" i="1" smtClean="0">
-                            <a:latin typeface="Cambria Math" panose="02040503050406030204" pitchFamily="18" charset="0"/>
-                            <a:ea typeface="Cambria Math" panose="02040503050406030204" pitchFamily="18" charset="0"/>
-                          </a:rPr>
-                          <m:t>,</m:t>
-                        </m:r>
-                        <m:r>
-                          <a:rPr lang="en-US" b="0" i="1" smtClean="0">
-                            <a:latin typeface="Cambria Math" panose="02040503050406030204" pitchFamily="18" charset="0"/>
-                            <a:ea typeface="Cambria Math" panose="02040503050406030204" pitchFamily="18" charset="0"/>
-                          </a:rPr>
-                          <m:t>𝑗</m:t>
-                        </m:r>
-                      </m:e>
-                    </m:d>
-                    <m:r>
-                      <a:rPr lang="en-US" b="0" i="1" smtClean="0">
-                        <a:latin typeface="Cambria Math" panose="02040503050406030204" pitchFamily="18" charset="0"/>
-                        <a:ea typeface="Cambria Math" panose="02040503050406030204" pitchFamily="18" charset="0"/>
-                      </a:rPr>
-                      <m:t>=1</m:t>
-                    </m:r>
-                    <m:d>
-                      <m:dPr>
-                        <m:begChr m:val="["/>
-                        <m:endChr m:val="]"/>
-                        <m:ctrlPr>
-                          <a:rPr lang="en-US" b="0" i="1" smtClean="0">
-                            <a:latin typeface="Cambria Math" panose="02040503050406030204" pitchFamily="18" charset="0"/>
-                            <a:ea typeface="Cambria Math" panose="02040503050406030204" pitchFamily="18" charset="0"/>
-                          </a:rPr>
-                        </m:ctrlPr>
-                      </m:dPr>
-                      <m:e>
-                        <m:r>
-                          <a:rPr lang="en-US" b="0" i="1" smtClean="0">
-                            <a:latin typeface="Cambria Math" panose="02040503050406030204" pitchFamily="18" charset="0"/>
-                            <a:ea typeface="Cambria Math" panose="02040503050406030204" pitchFamily="18" charset="0"/>
-                          </a:rPr>
-                          <m:t>𝑖</m:t>
-                        </m:r>
-                        <m:r>
-                          <a:rPr lang="en-US" b="0" i="1" smtClean="0">
-                            <a:latin typeface="Cambria Math" panose="02040503050406030204" pitchFamily="18" charset="0"/>
-                            <a:ea typeface="Cambria Math" panose="02040503050406030204" pitchFamily="18" charset="0"/>
-                          </a:rPr>
-                          <m:t>≠</m:t>
-                        </m:r>
-                        <m:r>
-                          <a:rPr lang="en-US" b="0" i="1" smtClean="0">
-                            <a:latin typeface="Cambria Math" panose="02040503050406030204" pitchFamily="18" charset="0"/>
-                            <a:ea typeface="Cambria Math" panose="02040503050406030204" pitchFamily="18" charset="0"/>
-                          </a:rPr>
-                          <m:t>𝑗</m:t>
-                        </m:r>
-                      </m:e>
-                    </m:d>
-                  </m:oMath>
-                </a14:m>
-                <a:endParaRPr lang="es-ES_tradnl" dirty="0"/>
-              </a:p>
-              <a:p>
-                <a:pPr lvl="1">
-                  <a:lnSpc>
-                    <a:spcPct val="120000"/>
-                  </a:lnSpc>
-                </a:pPr>
-                <a:r>
-                  <a:rPr lang="es-ES_tradnl" dirty="0">
-                    <a:solidFill>
-                      <a:srgbClr val="002060"/>
-                    </a:solidFill>
-                  </a:rPr>
-                  <a:t>Simetría</a:t>
-                </a:r>
-                <a:r>
-                  <a:rPr lang="es-ES_tradnl" dirty="0"/>
-                  <a:t>: castigar ambos errores (</a:t>
-                </a:r>
-                <a:r>
-                  <a:rPr lang="es-ES_tradnl" dirty="0" err="1"/>
-                  <a:t>fp</a:t>
-                </a:r>
-                <a:r>
-                  <a:rPr lang="es-ES_tradnl" dirty="0"/>
-                  <a:t> y </a:t>
-                </a:r>
-                <a:r>
-                  <a:rPr lang="es-ES_tradnl" dirty="0" err="1"/>
-                  <a:t>fn</a:t>
-                </a:r>
-                <a:r>
-                  <a:rPr lang="es-ES_tradnl" dirty="0"/>
-                  <a:t>) por igual.</a:t>
-                </a:r>
-              </a:p>
-              <a:p>
-                <a:pPr>
-                  <a:lnSpc>
-                    <a:spcPct val="120000"/>
-                  </a:lnSpc>
-                </a:pPr>
-                <a:r>
-                  <a:rPr lang="es-ES_tradnl" dirty="0"/>
-                  <a:t>Reemplazando </a:t>
-                </a:r>
-                <a14:m>
-                  <m:oMath xmlns:m="http://schemas.openxmlformats.org/officeDocument/2006/math">
-                    <m:r>
-                      <a:rPr lang="en-US" b="0" i="1" smtClean="0">
-                        <a:latin typeface="Cambria Math" panose="02040503050406030204" pitchFamily="18" charset="0"/>
-                        <a:ea typeface="Cambria Math" panose="02040503050406030204" pitchFamily="18" charset="0"/>
-                      </a:rPr>
-                      <m:t>𝜆</m:t>
-                    </m:r>
-                    <m:d>
-                      <m:dPr>
-                        <m:ctrlPr>
-                          <a:rPr lang="en-US" b="0" i="1" smtClean="0">
-                            <a:latin typeface="Cambria Math" panose="02040503050406030204" pitchFamily="18" charset="0"/>
-                            <a:ea typeface="Cambria Math" panose="02040503050406030204" pitchFamily="18" charset="0"/>
-                          </a:rPr>
-                        </m:ctrlPr>
-                      </m:dPr>
-                      <m:e>
-                        <m:r>
-                          <a:rPr lang="en-US" b="0" i="1" smtClean="0">
-                            <a:latin typeface="Cambria Math" panose="02040503050406030204" pitchFamily="18" charset="0"/>
-                            <a:ea typeface="Cambria Math" panose="02040503050406030204" pitchFamily="18" charset="0"/>
-                          </a:rPr>
-                          <m:t>𝑖</m:t>
-                        </m:r>
-                        <m:r>
-                          <a:rPr lang="en-US" b="0" i="1" smtClean="0">
-                            <a:latin typeface="Cambria Math" panose="02040503050406030204" pitchFamily="18" charset="0"/>
-                            <a:ea typeface="Cambria Math" panose="02040503050406030204" pitchFamily="18" charset="0"/>
-                          </a:rPr>
-                          <m:t>,</m:t>
-                        </m:r>
-                        <m:r>
-                          <a:rPr lang="en-US" b="0" i="1" smtClean="0">
-                            <a:latin typeface="Cambria Math" panose="02040503050406030204" pitchFamily="18" charset="0"/>
-                            <a:ea typeface="Cambria Math" panose="02040503050406030204" pitchFamily="18" charset="0"/>
-                          </a:rPr>
-                          <m:t>𝑗</m:t>
-                        </m:r>
-                      </m:e>
-                    </m:d>
-                    <m:r>
-                      <a:rPr lang="en-US" b="0" i="1" smtClean="0">
-                        <a:latin typeface="Cambria Math" panose="02040503050406030204" pitchFamily="18" charset="0"/>
-                        <a:ea typeface="Cambria Math" panose="02040503050406030204" pitchFamily="18" charset="0"/>
-                      </a:rPr>
-                      <m:t>=1</m:t>
-                    </m:r>
-                    <m:d>
-                      <m:dPr>
-                        <m:begChr m:val="["/>
-                        <m:endChr m:val="]"/>
-                        <m:ctrlPr>
-                          <a:rPr lang="en-US" b="0" i="1" smtClean="0">
-                            <a:latin typeface="Cambria Math" panose="02040503050406030204" pitchFamily="18" charset="0"/>
-                            <a:ea typeface="Cambria Math" panose="02040503050406030204" pitchFamily="18" charset="0"/>
-                          </a:rPr>
-                        </m:ctrlPr>
-                      </m:dPr>
-                      <m:e>
-                        <m:r>
-                          <a:rPr lang="en-US" b="0" i="1" smtClean="0">
-                            <a:latin typeface="Cambria Math" panose="02040503050406030204" pitchFamily="18" charset="0"/>
-                            <a:ea typeface="Cambria Math" panose="02040503050406030204" pitchFamily="18" charset="0"/>
-                          </a:rPr>
-                          <m:t>𝑖</m:t>
-                        </m:r>
-                        <m:r>
-                          <a:rPr lang="en-US" b="0" i="1" smtClean="0">
-                            <a:latin typeface="Cambria Math" panose="02040503050406030204" pitchFamily="18" charset="0"/>
-                            <a:ea typeface="Cambria Math" panose="02040503050406030204" pitchFamily="18" charset="0"/>
-                          </a:rPr>
-                          <m:t>≠</m:t>
-                        </m:r>
-                        <m:r>
-                          <a:rPr lang="en-US" b="0" i="1" smtClean="0">
-                            <a:latin typeface="Cambria Math" panose="02040503050406030204" pitchFamily="18" charset="0"/>
-                            <a:ea typeface="Cambria Math" panose="02040503050406030204" pitchFamily="18" charset="0"/>
-                          </a:rPr>
-                          <m:t>𝑗</m:t>
-                        </m:r>
-                      </m:e>
-                    </m:d>
-                  </m:oMath>
-                </a14:m>
-                <a:r>
-                  <a:rPr lang="es-ES_tradnl" dirty="0"/>
-                  <a:t> en </a:t>
-                </a:r>
-                <a14:m>
-                  <m:oMath xmlns:m="http://schemas.openxmlformats.org/officeDocument/2006/math">
-                    <m:r>
-                      <a:rPr lang="en-US" i="1">
-                        <a:latin typeface="Cambria Math" panose="02040503050406030204" pitchFamily="18" charset="0"/>
-                        <a:ea typeface="Cambria Math" panose="02040503050406030204" pitchFamily="18" charset="0"/>
-                      </a:rPr>
-                      <m:t>𝑅</m:t>
-                    </m:r>
-                    <m:d>
-                      <m:dPr>
-                        <m:ctrlPr>
-                          <a:rPr lang="en-US" i="1">
-                            <a:latin typeface="Cambria Math" panose="02040503050406030204" pitchFamily="18" charset="0"/>
-                            <a:ea typeface="Cambria Math" panose="02040503050406030204" pitchFamily="18" charset="0"/>
-                          </a:rPr>
-                        </m:ctrlPr>
-                      </m:dPr>
-                      <m:e>
-                        <m:r>
-                          <a:rPr lang="en-US" i="1">
-                            <a:latin typeface="Cambria Math" panose="02040503050406030204" pitchFamily="18" charset="0"/>
-                            <a:ea typeface="Cambria Math" panose="02040503050406030204" pitchFamily="18" charset="0"/>
-                          </a:rPr>
-                          <m:t>𝑖</m:t>
-                        </m:r>
-                      </m:e>
-                    </m:d>
-                  </m:oMath>
-                </a14:m>
-                <a:r>
-                  <a:rPr lang="es-ES_tradnl" dirty="0"/>
-                  <a:t> para cada categoría</a:t>
-                </a:r>
-              </a:p>
-              <a:p>
-                <a:pPr lvl="1">
-                  <a:lnSpc>
-                    <a:spcPct val="120000"/>
-                  </a:lnSpc>
-                </a:pPr>
-                <a14:m>
-                  <m:oMath xmlns:m="http://schemas.openxmlformats.org/officeDocument/2006/math">
-                    <m:r>
-                      <a:rPr lang="en-US" b="0" i="1" smtClean="0">
-                        <a:latin typeface="Cambria Math" panose="02040503050406030204" pitchFamily="18" charset="0"/>
-                        <a:ea typeface="Cambria Math" panose="02040503050406030204" pitchFamily="18" charset="0"/>
-                      </a:rPr>
-                      <m:t>𝑅</m:t>
-                    </m:r>
-                    <m:d>
-                      <m:dPr>
-                        <m:ctrlPr>
-                          <a:rPr lang="en-US" b="0" i="1" smtClean="0">
-                            <a:latin typeface="Cambria Math" panose="02040503050406030204" pitchFamily="18" charset="0"/>
-                            <a:ea typeface="Cambria Math" panose="02040503050406030204" pitchFamily="18" charset="0"/>
-                          </a:rPr>
-                        </m:ctrlPr>
-                      </m:dPr>
-                      <m:e>
-                        <m:r>
-                          <a:rPr lang="en-US" b="0" i="1" smtClean="0">
-                            <a:latin typeface="Cambria Math" panose="02040503050406030204" pitchFamily="18" charset="0"/>
-                            <a:ea typeface="Cambria Math" panose="02040503050406030204" pitchFamily="18" charset="0"/>
-                          </a:rPr>
-                          <m:t>0</m:t>
-                        </m:r>
-                      </m:e>
-                    </m:d>
-                    <m:r>
-                      <a:rPr lang="en-US" b="0" i="1" smtClean="0">
-                        <a:latin typeface="Cambria Math" panose="02040503050406030204" pitchFamily="18" charset="0"/>
-                        <a:ea typeface="Cambria Math" panose="02040503050406030204" pitchFamily="18" charset="0"/>
-                      </a:rPr>
-                      <m:t>=</m:t>
-                    </m:r>
-                    <m:r>
-                      <a:rPr lang="en-US" b="0" i="1" smtClean="0">
-                        <a:latin typeface="Cambria Math" panose="02040503050406030204" pitchFamily="18" charset="0"/>
-                        <a:ea typeface="Cambria Math" panose="02040503050406030204" pitchFamily="18" charset="0"/>
-                      </a:rPr>
-                      <m:t>𝑝</m:t>
-                    </m:r>
-                  </m:oMath>
-                </a14:m>
-                <a:endParaRPr lang="es-ES_tradnl" dirty="0"/>
-              </a:p>
-              <a:p>
-                <a:pPr lvl="1">
-                  <a:lnSpc>
-                    <a:spcPct val="120000"/>
-                  </a:lnSpc>
-                </a:pPr>
-                <a14:m>
-                  <m:oMath xmlns:m="http://schemas.openxmlformats.org/officeDocument/2006/math">
-                    <m:r>
-                      <a:rPr lang="en-US" i="1">
-                        <a:latin typeface="Cambria Math" panose="02040503050406030204" pitchFamily="18" charset="0"/>
-                        <a:ea typeface="Cambria Math" panose="02040503050406030204" pitchFamily="18" charset="0"/>
-                      </a:rPr>
-                      <m:t>𝑅</m:t>
-                    </m:r>
-                    <m:d>
-                      <m:dPr>
-                        <m:ctrlPr>
-                          <a:rPr lang="en-US" i="1">
-                            <a:latin typeface="Cambria Math" panose="02040503050406030204" pitchFamily="18" charset="0"/>
-                            <a:ea typeface="Cambria Math" panose="02040503050406030204" pitchFamily="18" charset="0"/>
-                          </a:rPr>
-                        </m:ctrlPr>
-                      </m:dPr>
-                      <m:e>
-                        <m:r>
-                          <a:rPr lang="en-US" b="0" i="1" smtClean="0">
-                            <a:latin typeface="Cambria Math" panose="02040503050406030204" pitchFamily="18" charset="0"/>
-                            <a:ea typeface="Cambria Math" panose="02040503050406030204" pitchFamily="18" charset="0"/>
-                          </a:rPr>
-                          <m:t>1</m:t>
-                        </m:r>
-                      </m:e>
-                    </m:d>
-                    <m:r>
-                      <a:rPr lang="en-US" i="1">
-                        <a:latin typeface="Cambria Math" panose="02040503050406030204" pitchFamily="18" charset="0"/>
-                        <a:ea typeface="Cambria Math" panose="02040503050406030204" pitchFamily="18" charset="0"/>
-                      </a:rPr>
-                      <m:t>=</m:t>
-                    </m:r>
-                    <m:r>
-                      <a:rPr lang="en-US" b="0" i="1" smtClean="0">
-                        <a:latin typeface="Cambria Math" panose="02040503050406030204" pitchFamily="18" charset="0"/>
-                        <a:ea typeface="Cambria Math" panose="02040503050406030204" pitchFamily="18" charset="0"/>
-                      </a:rPr>
-                      <m:t>1−</m:t>
-                    </m:r>
-                    <m:r>
-                      <a:rPr lang="en-US" i="1">
-                        <a:latin typeface="Cambria Math" panose="02040503050406030204" pitchFamily="18" charset="0"/>
-                        <a:ea typeface="Cambria Math" panose="02040503050406030204" pitchFamily="18" charset="0"/>
-                      </a:rPr>
-                      <m:t>𝑝</m:t>
-                    </m:r>
-                  </m:oMath>
-                </a14:m>
-                <a:r>
-                  <a:rPr lang="es-ES_tradnl" dirty="0"/>
-                  <a:t> </a:t>
-                </a:r>
-              </a:p>
-            </p:txBody>
-          </p:sp>
-        </mc:Choice>
-        <mc:Fallback xmlns="">
-          <p:sp>
-            <p:nvSpPr>
-              <p:cNvPr id="3" name="Content Placeholder 2">
-                <a:extLst>
-                  <a:ext uri="{FF2B5EF4-FFF2-40B4-BE49-F238E27FC236}">
-                    <a16:creationId xmlns:a16="http://schemas.microsoft.com/office/drawing/2014/main" id="{CEDEC7B7-FFAA-1B1E-300A-35BAE8E1B19C}"/>
-                  </a:ext>
-                </a:extLst>
-              </p:cNvPr>
-              <p:cNvSpPr>
-                <a:spLocks noGrp="1" noRot="1" noChangeAspect="1" noMove="1" noResize="1" noEditPoints="1" noAdjustHandles="1" noChangeArrowheads="1" noChangeShapeType="1" noTextEdit="1"/>
-              </p:cNvSpPr>
-              <p:nvPr>
-                <p:ph idx="1"/>
-              </p:nvPr>
-            </p:nvSpPr>
-            <p:spPr>
-              <a:blipFill>
-                <a:blip r:embed="rId2"/>
-                <a:stretch>
-                  <a:fillRect l="-1327"/>
-                </a:stretch>
-              </a:blipFill>
-            </p:spPr>
-            <p:txBody>
-              <a:bodyPr/>
-              <a:lstStyle/>
-              <a:p>
-                <a:r>
-                  <a:rPr lang="es-ES_tradnl">
-                    <a:noFill/>
-                  </a:rPr>
-                  <a:t> </a:t>
-                </a:r>
-              </a:p>
-            </p:txBody>
-          </p:sp>
-        </mc:Fallback>
-      </mc:AlternateContent>
-    </p:spTree>
-    <p:extLst>
-      <p:ext uri="{BB962C8B-B14F-4D97-AF65-F5344CB8AC3E}">
-        <p14:creationId xmlns:p14="http://schemas.microsoft.com/office/powerpoint/2010/main" val="847493722"/>
-      </p:ext>
-    </p:extLst>
-  </p:cSld>
-  <p:clrMapOvr>
-    <a:masterClrMapping/>
-  </p:clrMapOvr>
-  <p:timing>
-    <p:tnLst>
-      <p:par>
-        <p:cTn id="1" dur="indefinite" restart="never" nodeType="tmRoot">
-          <p:childTnLst>
-            <p:seq concurrent="1" nextAc="seek">
-              <p:cTn id="2" dur="indefinite" nodeType="mainSeq">
-                <p:childTnLst>
-                  <p:par>
-                    <p:cTn id="3" fill="hold">
-                      <p:stCondLst>
-                        <p:cond delay="indefinite"/>
-                      </p:stCondLst>
-                      <p:childTnLst>
-                        <p:par>
-                          <p:cTn id="4" fill="hold">
-                            <p:stCondLst>
-                              <p:cond delay="0"/>
-                            </p:stCondLst>
-                            <p:childTnLst>
-                              <p:par>
-                                <p:cTn id="5" presetID="1" presetClass="entr" presetSubtype="0" fill="hold" grpId="0" nodeType="clickEffect">
-                                  <p:stCondLst>
-                                    <p:cond delay="0"/>
-                                  </p:stCondLst>
-                                  <p:childTnLst>
-                                    <p:set>
-                                      <p:cBhvr>
-                                        <p:cTn id="6" dur="1" fill="hold">
-                                          <p:stCondLst>
-                                            <p:cond delay="0"/>
-                                          </p:stCondLst>
-                                        </p:cTn>
-                                        <p:tgtEl>
-                                          <p:spTgt spid="3">
-                                            <p:txEl>
-                                              <p:pRg st="0" end="0"/>
-                                            </p:txEl>
-                                          </p:spTgt>
-                                        </p:tgtEl>
-                                        <p:attrNameLst>
-                                          <p:attrName>style.visibility</p:attrName>
-                                        </p:attrNameLst>
-                                      </p:cBhvr>
-                                      <p:to>
-                                        <p:strVal val="visible"/>
-                                      </p:to>
-                                    </p:set>
-                                  </p:childTnLst>
-                                </p:cTn>
-                              </p:par>
-                            </p:childTnLst>
-                          </p:cTn>
-                        </p:par>
-                      </p:childTnLst>
-                    </p:cTn>
-                  </p:par>
-                  <p:par>
-                    <p:cTn id="7" fill="hold">
-                      <p:stCondLst>
-                        <p:cond delay="indefinite"/>
-                      </p:stCondLst>
-                      <p:childTnLst>
-                        <p:par>
-                          <p:cTn id="8" fill="hold">
-                            <p:stCondLst>
-                              <p:cond delay="0"/>
-                            </p:stCondLst>
-                            <p:childTnLst>
-                              <p:par>
-                                <p:cTn id="9" presetID="1" presetClass="entr" presetSubtype="0" fill="hold" grpId="0" nodeType="clickEffect">
-                                  <p:stCondLst>
-                                    <p:cond delay="0"/>
-                                  </p:stCondLst>
-                                  <p:childTnLst>
-                                    <p:set>
-                                      <p:cBhvr>
-                                        <p:cTn id="10" dur="1" fill="hold">
-                                          <p:stCondLst>
-                                            <p:cond delay="0"/>
-                                          </p:stCondLst>
-                                        </p:cTn>
-                                        <p:tgtEl>
-                                          <p:spTgt spid="3">
-                                            <p:txEl>
-                                              <p:pRg st="1" end="1"/>
-                                            </p:txEl>
-                                          </p:spTgt>
-                                        </p:tgtEl>
-                                        <p:attrNameLst>
-                                          <p:attrName>style.visibility</p:attrName>
-                                        </p:attrNameLst>
-                                      </p:cBhvr>
-                                      <p:to>
-                                        <p:strVal val="visible"/>
-                                      </p:to>
-                                    </p:set>
-                                  </p:childTnLst>
-                                </p:cTn>
-                              </p:par>
-                              <p:par>
-                                <p:cTn id="11" presetID="1" presetClass="entr" presetSubtype="0" fill="hold" grpId="0" nodeType="withEffect">
-                                  <p:stCondLst>
-                                    <p:cond delay="0"/>
-                                  </p:stCondLst>
-                                  <p:childTnLst>
-                                    <p:set>
-                                      <p:cBhvr>
-                                        <p:cTn id="12" dur="1" fill="hold">
-                                          <p:stCondLst>
-                                            <p:cond delay="0"/>
-                                          </p:stCondLst>
-                                        </p:cTn>
-                                        <p:tgtEl>
-                                          <p:spTgt spid="3">
-                                            <p:txEl>
-                                              <p:pRg st="2" end="2"/>
-                                            </p:txEl>
-                                          </p:spTgt>
-                                        </p:tgtEl>
-                                        <p:attrNameLst>
-                                          <p:attrName>style.visibility</p:attrName>
-                                        </p:attrNameLst>
-                                      </p:cBhvr>
-                                      <p:to>
-                                        <p:strVal val="visible"/>
-                                      </p:to>
-                                    </p:set>
-                                  </p:childTnLst>
-                                </p:cTn>
-                              </p:par>
-                            </p:childTnLst>
-                          </p:cTn>
-                        </p:par>
-                      </p:childTnLst>
-                    </p:cTn>
-                  </p:par>
-                  <p:par>
-                    <p:cTn id="13" fill="hold">
-                      <p:stCondLst>
-                        <p:cond delay="indefinite"/>
-                      </p:stCondLst>
-                      <p:childTnLst>
-                        <p:par>
-                          <p:cTn id="14" fill="hold">
-                            <p:stCondLst>
-                              <p:cond delay="0"/>
-                            </p:stCondLst>
-                            <p:childTnLst>
-                              <p:par>
-                                <p:cTn id="15" presetID="1" presetClass="entr" presetSubtype="0" fill="hold" grpId="0" nodeType="clickEffect">
-                                  <p:stCondLst>
-                                    <p:cond delay="0"/>
-                                  </p:stCondLst>
-                                  <p:childTnLst>
-                                    <p:set>
-                                      <p:cBhvr>
-                                        <p:cTn id="16" dur="1" fill="hold">
-                                          <p:stCondLst>
-                                            <p:cond delay="0"/>
-                                          </p:stCondLst>
-                                        </p:cTn>
-                                        <p:tgtEl>
-                                          <p:spTgt spid="3">
-                                            <p:txEl>
-                                              <p:pRg st="3" end="3"/>
-                                            </p:txEl>
-                                          </p:spTgt>
-                                        </p:tgtEl>
-                                        <p:attrNameLst>
-                                          <p:attrName>style.visibility</p:attrName>
-                                        </p:attrNameLst>
-                                      </p:cBhvr>
-                                      <p:to>
-                                        <p:strVal val="visible"/>
-                                      </p:to>
-                                    </p:set>
-                                  </p:childTnLst>
-                                </p:cTn>
-                              </p:par>
-                              <p:par>
-                                <p:cTn id="17" presetID="1" presetClass="entr" presetSubtype="0" fill="hold" grpId="0" nodeType="withEffect">
-                                  <p:stCondLst>
-                                    <p:cond delay="0"/>
-                                  </p:stCondLst>
-                                  <p:childTnLst>
-                                    <p:set>
-                                      <p:cBhvr>
-                                        <p:cTn id="18" dur="1" fill="hold">
-                                          <p:stCondLst>
-                                            <p:cond delay="0"/>
-                                          </p:stCondLst>
-                                        </p:cTn>
-                                        <p:tgtEl>
-                                          <p:spTgt spid="3">
-                                            <p:txEl>
-                                              <p:pRg st="4" end="4"/>
-                                            </p:txEl>
-                                          </p:spTgt>
-                                        </p:tgtEl>
-                                        <p:attrNameLst>
-                                          <p:attrName>style.visibility</p:attrName>
-                                        </p:attrNameLst>
-                                      </p:cBhvr>
-                                      <p:to>
-                                        <p:strVal val="visible"/>
-                                      </p:to>
-                                    </p:set>
-                                  </p:childTnLst>
-                                </p:cTn>
-                              </p:par>
-                              <p:par>
-                                <p:cTn id="19" presetID="1" presetClass="entr" presetSubtype="0" fill="hold" grpId="0" nodeType="withEffect">
-                                  <p:stCondLst>
-                                    <p:cond delay="0"/>
-                                  </p:stCondLst>
-                                  <p:childTnLst>
-                                    <p:set>
-                                      <p:cBhvr>
-                                        <p:cTn id="20" dur="1" fill="hold">
-                                          <p:stCondLst>
-                                            <p:cond delay="0"/>
-                                          </p:stCondLst>
-                                        </p:cTn>
-                                        <p:tgtEl>
-                                          <p:spTgt spid="3">
-                                            <p:txEl>
-                                              <p:pRg st="5" end="5"/>
-                                            </p:txEl>
-                                          </p:spTgt>
-                                        </p:tgtEl>
-                                        <p:attrNameLst>
-                                          <p:attrName>style.visibility</p:attrName>
-                                        </p:attrNameLst>
-                                      </p:cBhvr>
-                                      <p:to>
-                                        <p:strVal val="visible"/>
-                                      </p:to>
-                                    </p:set>
-                                  </p:childTnLst>
-                                </p:cTn>
-                              </p:par>
-                            </p:childTnLst>
-                          </p:cTn>
-                        </p:par>
-                      </p:childTnLst>
-                    </p:cTn>
-                  </p:par>
-                </p:childTnLst>
-              </p:cTn>
-              <p:prevCondLst>
-                <p:cond evt="onPrev" delay="0">
-                  <p:tgtEl>
-                    <p:sldTgt/>
-                  </p:tgtEl>
-                </p:cond>
-              </p:prevCondLst>
-              <p:nextCondLst>
-                <p:cond evt="onNext" delay="0">
-                  <p:tgtEl>
-                    <p:sldTgt/>
-                  </p:tgtEl>
-                </p:cond>
-              </p:nextCondLst>
-            </p:seq>
-          </p:childTnLst>
-        </p:cTn>
-      </p:par>
-    </p:tnLst>
-    <p:bldLst>
-      <p:bldP spid="3" grpId="0" build="p"/>
-    </p:bldLst>
-  </p:timing>
-</p:sld>
-</file>
-
-<file path=ppt/slides/slide15.xml><?xml version="1.0" encoding="utf-8"?>
-<p:sld xmlns:a="http://schemas.openxmlformats.org/drawingml/2006/main" xmlns:r="http://schemas.openxmlformats.org/officeDocument/2006/relationships" xmlns:p="http://schemas.openxmlformats.org/presentationml/2006/main">
-  <p:cSld>
-    <p:spTree>
-      <p:nvGrpSpPr>
-        <p:cNvPr id="1" name="">
-          <a:extLst>
-            <a:ext uri="{FF2B5EF4-FFF2-40B4-BE49-F238E27FC236}">
-              <a16:creationId xmlns:a16="http://schemas.microsoft.com/office/drawing/2014/main" id="{09B737F9-5B3C-7A19-94CA-19C4A8B73970}"/>
-            </a:ext>
-          </a:extLst>
-        </p:cNvPr>
-        <p:cNvGrpSpPr/>
-        <p:nvPr/>
-      </p:nvGrpSpPr>
-      <p:grpSpPr>
-        <a:xfrm>
-          <a:off x="0" y="0"/>
-          <a:ext cx="0" cy="0"/>
-          <a:chOff x="0" y="0"/>
-          <a:chExt cx="0" cy="0"/>
-        </a:xfrm>
-      </p:grpSpPr>
-      <p:sp>
-        <p:nvSpPr>
-          <p:cNvPr id="2" name="Title 1">
-            <a:extLst>
-              <a:ext uri="{FF2B5EF4-FFF2-40B4-BE49-F238E27FC236}">
-                <a16:creationId xmlns:a16="http://schemas.microsoft.com/office/drawing/2014/main" id="{E099D2A3-02BD-E410-FD8E-26255586A760}"/>
-              </a:ext>
-            </a:extLst>
-          </p:cNvPr>
-          <p:cNvSpPr>
-            <a:spLocks noGrp="1"/>
-          </p:cNvSpPr>
-          <p:nvPr>
-            <p:ph type="title"/>
-          </p:nvPr>
-        </p:nvSpPr>
-        <p:spPr/>
-        <p:txBody>
-          <a:bodyPr/>
-          <a:lstStyle/>
-          <a:p>
-            <a:r>
-              <a:rPr lang="es-ES_tradnl" dirty="0"/>
-              <a:t>Clasificador de Bayes II</a:t>
-            </a:r>
-          </a:p>
-        </p:txBody>
-      </p:sp>
-      <mc:AlternateContent xmlns:mc="http://schemas.openxmlformats.org/markup-compatibility/2006" xmlns:a14="http://schemas.microsoft.com/office/drawing/2010/main">
-        <mc:Choice Requires="a14">
-          <p:sp>
-            <p:nvSpPr>
-              <p:cNvPr id="3" name="Content Placeholder 2">
-                <a:extLst>
-                  <a:ext uri="{FF2B5EF4-FFF2-40B4-BE49-F238E27FC236}">
-                    <a16:creationId xmlns:a16="http://schemas.microsoft.com/office/drawing/2014/main" id="{7AE1BDC2-860D-121A-E05F-662341D043EF}"/>
-                  </a:ext>
-                </a:extLst>
-              </p:cNvPr>
-              <p:cNvSpPr>
-                <a:spLocks noGrp="1"/>
-              </p:cNvSpPr>
-              <p:nvPr>
-                <p:ph idx="1"/>
-              </p:nvPr>
-            </p:nvSpPr>
-            <p:spPr/>
-            <p:txBody>
-              <a:bodyPr>
-                <a:normAutofit/>
-              </a:bodyPr>
-              <a:lstStyle/>
-              <a:p>
-                <a:pPr>
-                  <a:lnSpc>
-                    <a:spcPct val="120000"/>
-                  </a:lnSpc>
-                </a:pPr>
-                <a:r>
-                  <a:rPr lang="es-ES_tradnl" dirty="0"/>
-                  <a:t>Entonces, si queremos minimizar el </a:t>
-                </a:r>
-                <a:r>
-                  <a:rPr lang="es-ES_tradnl" dirty="0">
-                    <a:solidFill>
-                      <a:srgbClr val="0070C0"/>
-                    </a:solidFill>
-                  </a:rPr>
-                  <a:t>error tipo I</a:t>
-                </a:r>
-                <a:r>
-                  <a:rPr lang="es-ES_tradnl" dirty="0"/>
-                  <a:t>:</a:t>
-                </a:r>
-              </a:p>
-              <a:p>
-                <a:pPr marL="0" indent="0">
-                  <a:lnSpc>
-                    <a:spcPct val="120000"/>
-                  </a:lnSpc>
-                  <a:buNone/>
-                </a:pPr>
-                <a14:m>
-                  <m:oMathPara xmlns:m="http://schemas.openxmlformats.org/officeDocument/2006/math">
-                    <m:oMathParaPr>
-                      <m:jc m:val="centerGroup"/>
-                    </m:oMathParaPr>
-                    <m:oMath xmlns:m="http://schemas.openxmlformats.org/officeDocument/2006/math">
-                      <m:r>
-                        <a:rPr lang="en-US" i="1" smtClean="0">
-                          <a:latin typeface="Cambria Math" panose="02040503050406030204" pitchFamily="18" charset="0"/>
-                          <a:ea typeface="Cambria Math" panose="02040503050406030204" pitchFamily="18" charset="0"/>
-                        </a:rPr>
-                        <m:t>𝑅</m:t>
-                      </m:r>
-                      <m:d>
-                        <m:dPr>
-                          <m:ctrlPr>
-                            <a:rPr lang="en-US" i="1">
-                              <a:latin typeface="Cambria Math" panose="02040503050406030204" pitchFamily="18" charset="0"/>
-                              <a:ea typeface="Cambria Math" panose="02040503050406030204" pitchFamily="18" charset="0"/>
-                            </a:rPr>
-                          </m:ctrlPr>
-                        </m:dPr>
-                        <m:e>
-                          <m:r>
-                            <a:rPr lang="en-US" b="0" i="1" smtClean="0">
-                              <a:latin typeface="Cambria Math" panose="02040503050406030204" pitchFamily="18" charset="0"/>
-                              <a:ea typeface="Cambria Math" panose="02040503050406030204" pitchFamily="18" charset="0"/>
-                            </a:rPr>
-                            <m:t>1</m:t>
-                          </m:r>
-                        </m:e>
-                      </m:d>
-                      <m:r>
-                        <a:rPr lang="en-US" b="0" i="1" smtClean="0">
-                          <a:latin typeface="Cambria Math" panose="02040503050406030204" pitchFamily="18" charset="0"/>
-                          <a:ea typeface="Cambria Math" panose="02040503050406030204" pitchFamily="18" charset="0"/>
-                        </a:rPr>
-                        <m:t>&lt;</m:t>
-                      </m:r>
-                      <m:r>
-                        <a:rPr lang="en-US" i="1">
-                          <a:latin typeface="Cambria Math" panose="02040503050406030204" pitchFamily="18" charset="0"/>
-                          <a:ea typeface="Cambria Math" panose="02040503050406030204" pitchFamily="18" charset="0"/>
-                        </a:rPr>
-                        <m:t>𝑅</m:t>
-                      </m:r>
-                      <m:d>
-                        <m:dPr>
-                          <m:ctrlPr>
-                            <a:rPr lang="en-US" i="1">
-                              <a:latin typeface="Cambria Math" panose="02040503050406030204" pitchFamily="18" charset="0"/>
-                              <a:ea typeface="Cambria Math" panose="02040503050406030204" pitchFamily="18" charset="0"/>
-                            </a:rPr>
-                          </m:ctrlPr>
-                        </m:dPr>
-                        <m:e>
-                          <m:r>
-                            <a:rPr lang="en-US" b="0" i="1" smtClean="0">
-                              <a:latin typeface="Cambria Math" panose="02040503050406030204" pitchFamily="18" charset="0"/>
-                              <a:ea typeface="Cambria Math" panose="02040503050406030204" pitchFamily="18" charset="0"/>
-                            </a:rPr>
-                            <m:t>0</m:t>
-                          </m:r>
-                        </m:e>
-                      </m:d>
-                    </m:oMath>
-                  </m:oMathPara>
-                </a14:m>
-                <a:endParaRPr lang="es-ES_tradnl" dirty="0"/>
-              </a:p>
-              <a:p>
-                <a:pPr marL="0" indent="0">
-                  <a:lnSpc>
-                    <a:spcPct val="120000"/>
-                  </a:lnSpc>
-                  <a:buNone/>
-                </a:pPr>
-                <a14:m>
-                  <m:oMathPara xmlns:m="http://schemas.openxmlformats.org/officeDocument/2006/math">
-                    <m:oMathParaPr>
-                      <m:jc m:val="centerGroup"/>
-                    </m:oMathParaPr>
-                    <m:oMath xmlns:m="http://schemas.openxmlformats.org/officeDocument/2006/math">
-                      <m:r>
-                        <a:rPr lang="en-US" b="0" i="1" smtClean="0">
-                          <a:latin typeface="Cambria Math" panose="02040503050406030204" pitchFamily="18" charset="0"/>
-                          <a:ea typeface="Cambria Math" panose="02040503050406030204" pitchFamily="18" charset="0"/>
-                        </a:rPr>
-                        <m:t>1−</m:t>
-                      </m:r>
-                      <m:r>
-                        <a:rPr lang="en-US" b="0" i="1" smtClean="0">
-                          <a:latin typeface="Cambria Math" panose="02040503050406030204" pitchFamily="18" charset="0"/>
-                          <a:ea typeface="Cambria Math" panose="02040503050406030204" pitchFamily="18" charset="0"/>
-                        </a:rPr>
-                        <m:t>𝑝</m:t>
-                      </m:r>
-                      <m:r>
-                        <a:rPr lang="en-US" b="0" i="1" smtClean="0">
-                          <a:latin typeface="Cambria Math" panose="02040503050406030204" pitchFamily="18" charset="0"/>
-                          <a:ea typeface="Cambria Math" panose="02040503050406030204" pitchFamily="18" charset="0"/>
-                        </a:rPr>
-                        <m:t>&lt;</m:t>
-                      </m:r>
-                      <m:r>
-                        <a:rPr lang="en-US" b="0" i="1" smtClean="0">
-                          <a:latin typeface="Cambria Math" panose="02040503050406030204" pitchFamily="18" charset="0"/>
-                          <a:ea typeface="Cambria Math" panose="02040503050406030204" pitchFamily="18" charset="0"/>
-                        </a:rPr>
-                        <m:t>𝑝</m:t>
-                      </m:r>
-                    </m:oMath>
-                  </m:oMathPara>
-                </a14:m>
-                <a:endParaRPr lang="en-US" b="0" dirty="0">
-                  <a:ea typeface="Cambria Math" panose="02040503050406030204" pitchFamily="18" charset="0"/>
-                </a:endParaRPr>
-              </a:p>
-              <a:p>
-                <a:pPr marL="0" indent="0">
-                  <a:lnSpc>
-                    <a:spcPct val="120000"/>
-                  </a:lnSpc>
-                  <a:buNone/>
-                </a:pPr>
-                <a14:m>
-                  <m:oMathPara xmlns:m="http://schemas.openxmlformats.org/officeDocument/2006/math">
-                    <m:oMathParaPr>
-                      <m:jc m:val="centerGroup"/>
-                    </m:oMathParaPr>
-                    <m:oMath xmlns:m="http://schemas.openxmlformats.org/officeDocument/2006/math">
-                      <m:r>
-                        <a:rPr lang="en-US" b="0" i="1" smtClean="0">
-                          <a:latin typeface="Cambria Math" panose="02040503050406030204" pitchFamily="18" charset="0"/>
-                          <a:ea typeface="Cambria Math" panose="02040503050406030204" pitchFamily="18" charset="0"/>
-                        </a:rPr>
-                        <m:t>𝑝</m:t>
-                      </m:r>
-                      <m:r>
-                        <a:rPr lang="en-US" i="1">
-                          <a:latin typeface="Cambria Math" panose="02040503050406030204" pitchFamily="18" charset="0"/>
-                          <a:ea typeface="Cambria Math" panose="02040503050406030204" pitchFamily="18" charset="0"/>
-                        </a:rPr>
-                        <m:t>=</m:t>
-                      </m:r>
-                      <m:func>
-                        <m:funcPr>
-                          <m:ctrlPr>
-                            <a:rPr lang="en-US" i="1">
-                              <a:latin typeface="Cambria Math" panose="02040503050406030204" pitchFamily="18" charset="0"/>
-                              <a:ea typeface="Cambria Math" panose="02040503050406030204" pitchFamily="18" charset="0"/>
-                            </a:rPr>
-                          </m:ctrlPr>
-                        </m:funcPr>
-                        <m:fName>
-                          <m:r>
-                            <m:rPr>
-                              <m:sty m:val="p"/>
-                            </m:rPr>
-                            <a:rPr lang="en-US">
-                              <a:latin typeface="Cambria Math" panose="02040503050406030204" pitchFamily="18" charset="0"/>
-                              <a:ea typeface="Cambria Math" panose="02040503050406030204" pitchFamily="18" charset="0"/>
-                            </a:rPr>
-                            <m:t>Pr</m:t>
-                          </m:r>
-                        </m:fName>
-                        <m:e>
-                          <m:d>
-                            <m:dPr>
-                              <m:ctrlPr>
-                                <a:rPr lang="en-US" i="1">
-                                  <a:latin typeface="Cambria Math" panose="02040503050406030204" pitchFamily="18" charset="0"/>
-                                  <a:ea typeface="Cambria Math" panose="02040503050406030204" pitchFamily="18" charset="0"/>
-                                </a:rPr>
-                              </m:ctrlPr>
-                            </m:dPr>
-                            <m:e>
-                              <m:r>
-                                <a:rPr lang="en-US" i="1">
-                                  <a:latin typeface="Cambria Math" panose="02040503050406030204" pitchFamily="18" charset="0"/>
-                                  <a:ea typeface="Cambria Math" panose="02040503050406030204" pitchFamily="18" charset="0"/>
-                                </a:rPr>
-                                <m:t>𝑌</m:t>
-                              </m:r>
-                              <m:r>
-                                <a:rPr lang="en-US" i="1">
-                                  <a:latin typeface="Cambria Math" panose="02040503050406030204" pitchFamily="18" charset="0"/>
-                                  <a:ea typeface="Cambria Math" panose="02040503050406030204" pitchFamily="18" charset="0"/>
-                                </a:rPr>
-                                <m:t>=1|</m:t>
-                              </m:r>
-                              <m:r>
-                                <a:rPr lang="en-US" i="1">
-                                  <a:latin typeface="Cambria Math" panose="02040503050406030204" pitchFamily="18" charset="0"/>
-                                  <a:ea typeface="Cambria Math" panose="02040503050406030204" pitchFamily="18" charset="0"/>
-                                </a:rPr>
-                                <m:t>𝑋</m:t>
-                              </m:r>
-                            </m:e>
-                          </m:d>
-                        </m:e>
-                      </m:func>
-                      <m:r>
-                        <a:rPr lang="en-US" b="0" i="1" smtClean="0">
-                          <a:latin typeface="Cambria Math" panose="02040503050406030204" pitchFamily="18" charset="0"/>
-                          <a:ea typeface="Cambria Math" panose="02040503050406030204" pitchFamily="18" charset="0"/>
-                        </a:rPr>
-                        <m:t>&gt;</m:t>
-                      </m:r>
-                      <m:f>
-                        <m:fPr>
-                          <m:type m:val="lin"/>
-                          <m:ctrlPr>
-                            <a:rPr lang="en-US" b="0" i="1" smtClean="0">
-                              <a:latin typeface="Cambria Math" panose="02040503050406030204" pitchFamily="18" charset="0"/>
-                              <a:ea typeface="Cambria Math" panose="02040503050406030204" pitchFamily="18" charset="0"/>
-                            </a:rPr>
-                          </m:ctrlPr>
-                        </m:fPr>
-                        <m:num>
-                          <m:r>
-                            <a:rPr lang="en-US" b="0" i="1" smtClean="0">
-                              <a:latin typeface="Cambria Math" panose="02040503050406030204" pitchFamily="18" charset="0"/>
-                              <a:ea typeface="Cambria Math" panose="02040503050406030204" pitchFamily="18" charset="0"/>
-                            </a:rPr>
-                            <m:t>1</m:t>
-                          </m:r>
-                        </m:num>
-                        <m:den>
-                          <m:r>
-                            <a:rPr lang="en-US" b="0" i="1" smtClean="0">
-                              <a:latin typeface="Cambria Math" panose="02040503050406030204" pitchFamily="18" charset="0"/>
-                              <a:ea typeface="Cambria Math" panose="02040503050406030204" pitchFamily="18" charset="0"/>
-                            </a:rPr>
-                            <m:t>2</m:t>
-                          </m:r>
-                        </m:den>
-                      </m:f>
-                    </m:oMath>
-                  </m:oMathPara>
-                </a14:m>
-                <a:endParaRPr lang="es-ES_tradnl" dirty="0"/>
-              </a:p>
-              <a:p>
-                <a:pPr marL="0" indent="0">
-                  <a:lnSpc>
-                    <a:spcPct val="120000"/>
-                  </a:lnSpc>
-                  <a:buNone/>
-                </a:pPr>
-                <a:r>
-                  <a:rPr lang="es-ES_tradnl" dirty="0">
-                    <a:solidFill>
-                      <a:srgbClr val="FF0000"/>
-                    </a:solidFill>
-                  </a:rPr>
-                  <a:t>Clasificador de Bayes</a:t>
-                </a:r>
-                <a:r>
-                  <a:rPr lang="es-ES_tradnl" dirty="0"/>
-                  <a:t>: elegir el estado </a:t>
-                </a:r>
-                <a:r>
-                  <a:rPr lang="es-ES_tradnl" dirty="0">
-                    <a:solidFill>
-                      <a:srgbClr val="002060"/>
-                    </a:solidFill>
-                  </a:rPr>
-                  <a:t>más probable minimiza</a:t>
-                </a:r>
-                <a:r>
-                  <a:rPr lang="es-ES_tradnl" dirty="0"/>
-                  <a:t> el riesgo esperado</a:t>
-                </a:r>
-              </a:p>
-            </p:txBody>
-          </p:sp>
-        </mc:Choice>
-        <mc:Fallback xmlns="">
-          <p:sp>
-            <p:nvSpPr>
-              <p:cNvPr id="3" name="Content Placeholder 2">
-                <a:extLst>
-                  <a:ext uri="{FF2B5EF4-FFF2-40B4-BE49-F238E27FC236}">
-                    <a16:creationId xmlns:a16="http://schemas.microsoft.com/office/drawing/2014/main" id="{7AE1BDC2-860D-121A-E05F-662341D043EF}"/>
-                  </a:ext>
-                </a:extLst>
-              </p:cNvPr>
-              <p:cNvSpPr>
-                <a:spLocks noGrp="1" noRot="1" noChangeAspect="1" noMove="1" noResize="1" noEditPoints="1" noAdjustHandles="1" noChangeArrowheads="1" noChangeShapeType="1" noTextEdit="1"/>
-              </p:cNvSpPr>
-              <p:nvPr>
-                <p:ph idx="1"/>
-              </p:nvPr>
-            </p:nvSpPr>
-            <p:spPr>
-              <a:blipFill>
-                <a:blip r:embed="rId2"/>
-                <a:stretch>
-                  <a:fillRect l="-1568" t="-291"/>
-                </a:stretch>
-              </a:blipFill>
-            </p:spPr>
-            <p:txBody>
-              <a:bodyPr/>
-              <a:lstStyle/>
-              <a:p>
-                <a:r>
-                  <a:rPr lang="es-ES_tradnl">
-                    <a:noFill/>
-                  </a:rPr>
-                  <a:t> </a:t>
-                </a:r>
-              </a:p>
-            </p:txBody>
-          </p:sp>
-        </mc:Fallback>
-      </mc:AlternateContent>
-    </p:spTree>
-    <p:extLst>
-      <p:ext uri="{BB962C8B-B14F-4D97-AF65-F5344CB8AC3E}">
-        <p14:creationId xmlns:p14="http://schemas.microsoft.com/office/powerpoint/2010/main" val="2633605042"/>
-      </p:ext>
-    </p:extLst>
-  </p:cSld>
-  <p:clrMapOvr>
-    <a:masterClrMapping/>
-  </p:clrMapOvr>
-  <p:timing>
-    <p:tnLst>
-      <p:par>
-        <p:cTn id="1" dur="indefinite" restart="never" nodeType="tmRoot">
-          <p:childTnLst>
-            <p:seq concurrent="1" nextAc="seek">
-              <p:cTn id="2" dur="indefinite" nodeType="mainSeq">
-                <p:childTnLst>
-                  <p:par>
-                    <p:cTn id="3" fill="hold">
-                      <p:stCondLst>
-                        <p:cond delay="indefinite"/>
-                      </p:stCondLst>
-                      <p:childTnLst>
-                        <p:par>
-                          <p:cTn id="4" fill="hold">
-                            <p:stCondLst>
-                              <p:cond delay="0"/>
-                            </p:stCondLst>
-                            <p:childTnLst>
-                              <p:par>
-                                <p:cTn id="5" presetID="1" presetClass="entr" presetSubtype="0" fill="hold" grpId="0" nodeType="clickEffect">
-                                  <p:stCondLst>
-                                    <p:cond delay="0"/>
-                                  </p:stCondLst>
-                                  <p:childTnLst>
-                                    <p:set>
-                                      <p:cBhvr>
-                                        <p:cTn id="6" dur="1" fill="hold">
-                                          <p:stCondLst>
-                                            <p:cond delay="0"/>
-                                          </p:stCondLst>
-                                        </p:cTn>
-                                        <p:tgtEl>
-                                          <p:spTgt spid="3">
-                                            <p:txEl>
-                                              <p:pRg st="0" end="0"/>
-                                            </p:txEl>
-                                          </p:spTgt>
-                                        </p:tgtEl>
-                                        <p:attrNameLst>
-                                          <p:attrName>style.visibility</p:attrName>
-                                        </p:attrNameLst>
-                                      </p:cBhvr>
-                                      <p:to>
-                                        <p:strVal val="visible"/>
-                                      </p:to>
-                                    </p:set>
-                                  </p:childTnLst>
-                                </p:cTn>
-                              </p:par>
-                            </p:childTnLst>
-                          </p:cTn>
-                        </p:par>
-                      </p:childTnLst>
-                    </p:cTn>
-                  </p:par>
-                  <p:par>
-                    <p:cTn id="7" fill="hold">
-                      <p:stCondLst>
-                        <p:cond delay="indefinite"/>
-                      </p:stCondLst>
-                      <p:childTnLst>
-                        <p:par>
-                          <p:cTn id="8" fill="hold">
-                            <p:stCondLst>
-                              <p:cond delay="0"/>
-                            </p:stCondLst>
-                            <p:childTnLst>
-                              <p:par>
-                                <p:cTn id="9" presetID="1" presetClass="entr" presetSubtype="0" fill="hold" grpId="0" nodeType="clickEffect">
-                                  <p:stCondLst>
-                                    <p:cond delay="0"/>
-                                  </p:stCondLst>
-                                  <p:childTnLst>
-                                    <p:set>
-                                      <p:cBhvr>
-                                        <p:cTn id="10" dur="1" fill="hold">
-                                          <p:stCondLst>
-                                            <p:cond delay="0"/>
-                                          </p:stCondLst>
-                                        </p:cTn>
-                                        <p:tgtEl>
-                                          <p:spTgt spid="3">
-                                            <p:txEl>
-                                              <p:pRg st="1" end="1"/>
-                                            </p:txEl>
-                                          </p:spTgt>
-                                        </p:tgtEl>
-                                        <p:attrNameLst>
-                                          <p:attrName>style.visibility</p:attrName>
-                                        </p:attrNameLst>
-                                      </p:cBhvr>
-                                      <p:to>
-                                        <p:strVal val="visible"/>
-                                      </p:to>
-                                    </p:set>
-                                  </p:childTnLst>
-                                </p:cTn>
-                              </p:par>
-                            </p:childTnLst>
-                          </p:cTn>
-                        </p:par>
-                      </p:childTnLst>
-                    </p:cTn>
-                  </p:par>
-                  <p:par>
-                    <p:cTn id="11" fill="hold">
-                      <p:stCondLst>
-                        <p:cond delay="indefinite"/>
-                      </p:stCondLst>
-                      <p:childTnLst>
-                        <p:par>
-                          <p:cTn id="12" fill="hold">
-                            <p:stCondLst>
-                              <p:cond delay="0"/>
-                            </p:stCondLst>
-                            <p:childTnLst>
-                              <p:par>
-                                <p:cTn id="13" presetID="1" presetClass="entr" presetSubtype="0" fill="hold" grpId="0" nodeType="clickEffect">
-                                  <p:stCondLst>
-                                    <p:cond delay="0"/>
-                                  </p:stCondLst>
-                                  <p:childTnLst>
-                                    <p:set>
-                                      <p:cBhvr>
-                                        <p:cTn id="14" dur="1" fill="hold">
-                                          <p:stCondLst>
-                                            <p:cond delay="0"/>
-                                          </p:stCondLst>
-                                        </p:cTn>
-                                        <p:tgtEl>
-                                          <p:spTgt spid="3">
-                                            <p:txEl>
-                                              <p:pRg st="2" end="2"/>
-                                            </p:txEl>
-                                          </p:spTgt>
-                                        </p:tgtEl>
-                                        <p:attrNameLst>
-                                          <p:attrName>style.visibility</p:attrName>
-                                        </p:attrNameLst>
-                                      </p:cBhvr>
-                                      <p:to>
-                                        <p:strVal val="visible"/>
-                                      </p:to>
-                                    </p:set>
-                                  </p:childTnLst>
-                                </p:cTn>
-                              </p:par>
-                            </p:childTnLst>
-                          </p:cTn>
-                        </p:par>
-                      </p:childTnLst>
-                    </p:cTn>
-                  </p:par>
-                  <p:par>
-                    <p:cTn id="15" fill="hold">
-                      <p:stCondLst>
-                        <p:cond delay="indefinite"/>
-                      </p:stCondLst>
-                      <p:childTnLst>
-                        <p:par>
-                          <p:cTn id="16" fill="hold">
-                            <p:stCondLst>
-                              <p:cond delay="0"/>
-                            </p:stCondLst>
-                            <p:childTnLst>
-                              <p:par>
-                                <p:cTn id="17" presetID="1" presetClass="entr" presetSubtype="0" fill="hold" grpId="0" nodeType="clickEffect">
-                                  <p:stCondLst>
-                                    <p:cond delay="0"/>
-                                  </p:stCondLst>
-                                  <p:childTnLst>
-                                    <p:set>
-                                      <p:cBhvr>
-                                        <p:cTn id="18" dur="1" fill="hold">
-                                          <p:stCondLst>
-                                            <p:cond delay="0"/>
-                                          </p:stCondLst>
-                                        </p:cTn>
-                                        <p:tgtEl>
-                                          <p:spTgt spid="3">
-                                            <p:txEl>
-                                              <p:pRg st="3" end="3"/>
-                                            </p:txEl>
-                                          </p:spTgt>
-                                        </p:tgtEl>
-                                        <p:attrNameLst>
-                                          <p:attrName>style.visibility</p:attrName>
-                                        </p:attrNameLst>
-                                      </p:cBhvr>
-                                      <p:to>
-                                        <p:strVal val="visible"/>
-                                      </p:to>
-                                    </p:set>
-                                  </p:childTnLst>
-                                </p:cTn>
-                              </p:par>
-                            </p:childTnLst>
-                          </p:cTn>
-                        </p:par>
-                      </p:childTnLst>
-                    </p:cTn>
-                  </p:par>
-                  <p:par>
-                    <p:cTn id="19" fill="hold">
-                      <p:stCondLst>
-                        <p:cond delay="indefinite"/>
-                      </p:stCondLst>
-                      <p:childTnLst>
-                        <p:par>
-                          <p:cTn id="20" fill="hold">
-                            <p:stCondLst>
-                              <p:cond delay="0"/>
-                            </p:stCondLst>
-                            <p:childTnLst>
-                              <p:par>
-                                <p:cTn id="21" presetID="1" presetClass="entr" presetSubtype="0" fill="hold" grpId="0" nodeType="clickEffect">
-                                  <p:stCondLst>
-                                    <p:cond delay="0"/>
-                                  </p:stCondLst>
-                                  <p:childTnLst>
-                                    <p:set>
-                                      <p:cBhvr>
-                                        <p:cTn id="22" dur="1" fill="hold">
-                                          <p:stCondLst>
-                                            <p:cond delay="0"/>
-                                          </p:stCondLst>
-                                        </p:cTn>
-                                        <p:tgtEl>
-                                          <p:spTgt spid="3">
-                                            <p:txEl>
-                                              <p:pRg st="4" end="4"/>
-                                            </p:txEl>
-                                          </p:spTgt>
-                                        </p:tgtEl>
-                                        <p:attrNameLst>
-                                          <p:attrName>style.visibility</p:attrName>
-                                        </p:attrNameLst>
-                                      </p:cBhvr>
-                                      <p:to>
-                                        <p:strVal val="visible"/>
-                                      </p:to>
-                                    </p:set>
-                                  </p:childTnLst>
-                                </p:cTn>
-                              </p:par>
-                            </p:childTnLst>
-                          </p:cTn>
-                        </p:par>
-                      </p:childTnLst>
-                    </p:cTn>
-                  </p:par>
-                </p:childTnLst>
-              </p:cTn>
-              <p:prevCondLst>
-                <p:cond evt="onPrev" delay="0">
-                  <p:tgtEl>
-                    <p:sldTgt/>
-                  </p:tgtEl>
-                </p:cond>
-              </p:prevCondLst>
-              <p:nextCondLst>
-                <p:cond evt="onNext" delay="0">
-                  <p:tgtEl>
-                    <p:sldTgt/>
-                  </p:tgtEl>
-                </p:cond>
-              </p:nextCondLst>
-            </p:seq>
-          </p:childTnLst>
-        </p:cTn>
-      </p:par>
-    </p:tnLst>
-    <p:bldLst>
-      <p:bldP spid="3" grpId="0" build="p"/>
-    </p:bldLst>
-  </p:timing>
-</p:sld>
-</file>
-
-<file path=ppt/slides/slide16.xml><?xml version="1.0" encoding="utf-8"?>
-<p:sld xmlns:a="http://schemas.openxmlformats.org/drawingml/2006/main" xmlns:r="http://schemas.openxmlformats.org/officeDocument/2006/relationships" xmlns:p="http://schemas.openxmlformats.org/presentationml/2006/main">
-  <p:cSld>
-    <p:spTree>
-      <p:nvGrpSpPr>
-        <p:cNvPr id="1" name=""/>
-        <p:cNvGrpSpPr/>
-        <p:nvPr/>
-      </p:nvGrpSpPr>
-      <p:grpSpPr>
-        <a:xfrm>
-          <a:off x="0" y="0"/>
-          <a:ext cx="0" cy="0"/>
-          <a:chOff x="0" y="0"/>
-          <a:chExt cx="0" cy="0"/>
-        </a:xfrm>
-      </p:grpSpPr>
-      <p:sp>
-        <p:nvSpPr>
-          <p:cNvPr id="2" name="Title 1">
-            <a:extLst>
-              <a:ext uri="{FF2B5EF4-FFF2-40B4-BE49-F238E27FC236}">
-                <a16:creationId xmlns:a16="http://schemas.microsoft.com/office/drawing/2014/main" id="{2A19CDA2-FBFD-4435-09C4-88FAECC458A5}"/>
-              </a:ext>
-            </a:extLst>
-          </p:cNvPr>
-          <p:cNvSpPr>
-            <a:spLocks noGrp="1"/>
-          </p:cNvSpPr>
-          <p:nvPr>
-            <p:ph type="title"/>
-          </p:nvPr>
-        </p:nvSpPr>
-        <p:spPr/>
-        <p:txBody>
-          <a:bodyPr/>
-          <a:lstStyle/>
-          <a:p>
-            <a:r>
-              <a:rPr lang="es-ES_tradnl" dirty="0"/>
-              <a:t>Clasificador de Bayes II</a:t>
-            </a:r>
-          </a:p>
-        </p:txBody>
-      </p:sp>
-      <mc:AlternateContent xmlns:mc="http://schemas.openxmlformats.org/markup-compatibility/2006" xmlns:a14="http://schemas.microsoft.com/office/drawing/2010/main">
-        <mc:Choice Requires="a14">
-          <p:sp>
-            <p:nvSpPr>
-              <p:cNvPr id="3" name="Content Placeholder 2">
-                <a:extLst>
-                  <a:ext uri="{FF2B5EF4-FFF2-40B4-BE49-F238E27FC236}">
-                    <a16:creationId xmlns:a16="http://schemas.microsoft.com/office/drawing/2014/main" id="{42DE2FE6-2D21-0373-E669-031C93ACF98C}"/>
-                  </a:ext>
-                </a:extLst>
-              </p:cNvPr>
-              <p:cNvSpPr>
-                <a:spLocks noGrp="1"/>
-              </p:cNvSpPr>
-              <p:nvPr>
-                <p:ph idx="1"/>
-              </p:nvPr>
-            </p:nvSpPr>
-            <p:spPr/>
-            <p:txBody>
-              <a:bodyPr>
-                <a:normAutofit/>
-              </a:bodyPr>
-              <a:lstStyle/>
-              <a:p>
-                <a:pPr>
-                  <a:lnSpc>
-                    <a:spcPct val="120000"/>
-                  </a:lnSpc>
-                </a:pPr>
-                <a:r>
-                  <a:rPr lang="es-ES_tradnl" dirty="0"/>
-                  <a:t>Bajo ‘penalidad 0-1’, el problema se reduce a </a:t>
-                </a:r>
-              </a:p>
-              <a:p>
-                <a:pPr marL="971550" lvl="1" indent="-514350">
-                  <a:lnSpc>
-                    <a:spcPct val="120000"/>
-                  </a:lnSpc>
-                  <a:buFont typeface="+mj-lt"/>
-                  <a:buAutoNum type="arabicPeriod"/>
-                </a:pPr>
-                <a:r>
-                  <a:rPr lang="es-ES_tradnl" dirty="0"/>
-                  <a:t>encontrar </a:t>
-                </a:r>
-                <a14:m>
-                  <m:oMath xmlns:m="http://schemas.openxmlformats.org/officeDocument/2006/math">
-                    <m:r>
-                      <a:rPr lang="es-ES_tradnl" b="0" i="1" smtClean="0">
-                        <a:latin typeface="Cambria Math" panose="02040503050406030204" pitchFamily="18" charset="0"/>
-                        <a:ea typeface="Cambria Math" panose="02040503050406030204" pitchFamily="18" charset="0"/>
-                      </a:rPr>
-                      <m:t>𝑝</m:t>
-                    </m:r>
-                    <m:r>
-                      <a:rPr lang="es-ES_tradnl" b="0" i="1" smtClean="0">
-                        <a:latin typeface="Cambria Math" panose="02040503050406030204" pitchFamily="18" charset="0"/>
-                        <a:ea typeface="Cambria Math" panose="02040503050406030204" pitchFamily="18" charset="0"/>
-                      </a:rPr>
-                      <m:t>=</m:t>
-                    </m:r>
-                    <m:func>
-                      <m:funcPr>
-                        <m:ctrlPr>
-                          <a:rPr lang="es-ES_tradnl" b="0" i="1" smtClean="0">
-                            <a:latin typeface="Cambria Math" panose="02040503050406030204" pitchFamily="18" charset="0"/>
-                            <a:ea typeface="Cambria Math" panose="02040503050406030204" pitchFamily="18" charset="0"/>
-                          </a:rPr>
-                        </m:ctrlPr>
-                      </m:funcPr>
-                      <m:fName>
-                        <m:r>
-                          <m:rPr>
-                            <m:sty m:val="p"/>
-                          </m:rPr>
-                          <a:rPr lang="es-ES_tradnl" b="0" i="0" smtClean="0">
-                            <a:latin typeface="Cambria Math" panose="02040503050406030204" pitchFamily="18" charset="0"/>
-                            <a:ea typeface="Cambria Math" panose="02040503050406030204" pitchFamily="18" charset="0"/>
-                          </a:rPr>
-                          <m:t>Pr</m:t>
-                        </m:r>
-                      </m:fName>
-                      <m:e>
-                        <m:d>
-                          <m:dPr>
-                            <m:ctrlPr>
-                              <a:rPr lang="es-ES_tradnl" b="0" i="1" smtClean="0">
-                                <a:latin typeface="Cambria Math" panose="02040503050406030204" pitchFamily="18" charset="0"/>
-                                <a:ea typeface="Cambria Math" panose="02040503050406030204" pitchFamily="18" charset="0"/>
-                              </a:rPr>
-                            </m:ctrlPr>
-                          </m:dPr>
-                          <m:e>
-                            <m:r>
-                              <a:rPr lang="es-ES_tradnl" b="0" i="1" smtClean="0">
-                                <a:latin typeface="Cambria Math" panose="02040503050406030204" pitchFamily="18" charset="0"/>
-                                <a:ea typeface="Cambria Math" panose="02040503050406030204" pitchFamily="18" charset="0"/>
-                              </a:rPr>
-                              <m:t>𝑌</m:t>
-                            </m:r>
-                            <m:r>
-                              <a:rPr lang="es-ES_tradnl" b="0" i="1" smtClean="0">
-                                <a:latin typeface="Cambria Math" panose="02040503050406030204" pitchFamily="18" charset="0"/>
-                                <a:ea typeface="Cambria Math" panose="02040503050406030204" pitchFamily="18" charset="0"/>
-                              </a:rPr>
-                              <m:t>=1|</m:t>
-                            </m:r>
-                            <m:r>
-                              <a:rPr lang="es-ES_tradnl" b="0" i="1" smtClean="0">
-                                <a:latin typeface="Cambria Math" panose="02040503050406030204" pitchFamily="18" charset="0"/>
-                                <a:ea typeface="Cambria Math" panose="02040503050406030204" pitchFamily="18" charset="0"/>
-                              </a:rPr>
-                              <m:t>𝑋</m:t>
-                            </m:r>
-                          </m:e>
-                        </m:d>
-                      </m:e>
-                    </m:func>
-                    <m:r>
-                      <a:rPr lang="es-ES_tradnl" b="0" i="1" smtClean="0">
-                        <a:latin typeface="Cambria Math" panose="02040503050406030204" pitchFamily="18" charset="0"/>
-                        <a:ea typeface="Cambria Math" panose="02040503050406030204" pitchFamily="18" charset="0"/>
-                      </a:rPr>
-                      <m:t> </m:t>
-                    </m:r>
-                  </m:oMath>
-                </a14:m>
-                <a:r>
-                  <a:rPr lang="es-ES_tradnl" dirty="0"/>
-                  <a:t>y </a:t>
-                </a:r>
-              </a:p>
-              <a:p>
-                <a:pPr marL="971550" lvl="1" indent="-514350">
-                  <a:lnSpc>
-                    <a:spcPct val="120000"/>
-                  </a:lnSpc>
-                  <a:buFont typeface="+mj-lt"/>
-                  <a:buAutoNum type="arabicPeriod"/>
-                </a:pPr>
-                <a:r>
-                  <a:rPr lang="es-ES_tradnl" dirty="0"/>
-                  <a:t>Predecir (</a:t>
-                </a:r>
-                <a:r>
-                  <a:rPr lang="es-ES_tradnl" dirty="0">
-                    <a:solidFill>
-                      <a:srgbClr val="002060"/>
-                    </a:solidFill>
-                  </a:rPr>
-                  <a:t>clasificador de Bayes</a:t>
-                </a:r>
-                <a:r>
-                  <a:rPr lang="es-ES_tradnl" dirty="0"/>
-                  <a:t>): </a:t>
-                </a:r>
-              </a:p>
-              <a:p>
-                <a:pPr marL="1428750" lvl="2" indent="-514350">
-                  <a:lnSpc>
-                    <a:spcPct val="120000"/>
-                  </a:lnSpc>
-                  <a:buFont typeface="+mj-lt"/>
-                  <a:buAutoNum type="arabicPeriod"/>
-                </a:pPr>
-                <a14:m>
-                  <m:oMath xmlns:m="http://schemas.openxmlformats.org/officeDocument/2006/math">
-                    <m:acc>
-                      <m:accPr>
-                        <m:chr m:val="̂"/>
-                        <m:ctrlPr>
-                          <a:rPr lang="es-ES_tradnl" i="1">
-                            <a:latin typeface="Cambria Math" panose="02040503050406030204" pitchFamily="18" charset="0"/>
-                            <a:ea typeface="Cambria Math" panose="02040503050406030204" pitchFamily="18" charset="0"/>
-                          </a:rPr>
-                        </m:ctrlPr>
-                      </m:accPr>
-                      <m:e>
-                        <m:r>
-                          <a:rPr lang="es-ES_tradnl" i="1">
-                            <a:latin typeface="Cambria Math" panose="02040503050406030204" pitchFamily="18" charset="0"/>
-                            <a:ea typeface="Cambria Math" panose="02040503050406030204" pitchFamily="18" charset="0"/>
-                          </a:rPr>
-                          <m:t>𝑌</m:t>
-                        </m:r>
-                      </m:e>
-                    </m:acc>
-                    <m:r>
-                      <a:rPr lang="en-US" b="0" i="1" smtClean="0">
-                        <a:latin typeface="Cambria Math" panose="02040503050406030204" pitchFamily="18" charset="0"/>
-                        <a:ea typeface="Cambria Math" panose="02040503050406030204" pitchFamily="18" charset="0"/>
-                      </a:rPr>
-                      <m:t>=1</m:t>
-                    </m:r>
-                  </m:oMath>
-                </a14:m>
-                <a:r>
-                  <a:rPr lang="es-ES_tradnl" dirty="0"/>
-                  <a:t> si </a:t>
-                </a:r>
-                <a14:m>
-                  <m:oMath xmlns:m="http://schemas.openxmlformats.org/officeDocument/2006/math">
-                    <m:r>
-                      <a:rPr lang="es-ES_tradnl" i="1">
-                        <a:latin typeface="Cambria Math" panose="02040503050406030204" pitchFamily="18" charset="0"/>
-                        <a:ea typeface="Cambria Math" panose="02040503050406030204" pitchFamily="18" charset="0"/>
-                      </a:rPr>
-                      <m:t>𝑝</m:t>
-                    </m:r>
-                    <m:r>
-                      <a:rPr lang="es-ES_tradnl" b="0" i="1" smtClean="0">
-                        <a:latin typeface="Cambria Math" panose="02040503050406030204" pitchFamily="18" charset="0"/>
-                        <a:ea typeface="Cambria Math" panose="02040503050406030204" pitchFamily="18" charset="0"/>
-                      </a:rPr>
-                      <m:t>&gt;0.5</m:t>
-                    </m:r>
-                  </m:oMath>
-                </a14:m>
-                <a:r>
-                  <a:rPr lang="es-ES_tradnl" dirty="0"/>
-                  <a:t> </a:t>
-                </a:r>
-              </a:p>
-              <a:p>
-                <a:pPr marL="1428750" lvl="2" indent="-514350">
-                  <a:lnSpc>
-                    <a:spcPct val="120000"/>
-                  </a:lnSpc>
-                  <a:buFont typeface="+mj-lt"/>
-                  <a:buAutoNum type="arabicPeriod"/>
-                </a:pPr>
-                <a14:m>
-                  <m:oMath xmlns:m="http://schemas.openxmlformats.org/officeDocument/2006/math">
-                    <m:acc>
-                      <m:accPr>
-                        <m:chr m:val="̂"/>
-                        <m:ctrlPr>
-                          <a:rPr lang="es-ES_tradnl" sz="2400" b="0" i="1" noProof="0" smtClean="0">
-                            <a:latin typeface="Cambria Math" panose="02040503050406030204" pitchFamily="18" charset="0"/>
-                            <a:ea typeface="Cambria Math" panose="02040503050406030204" pitchFamily="18" charset="0"/>
-                          </a:rPr>
-                        </m:ctrlPr>
-                      </m:accPr>
-                      <m:e>
-                        <m:r>
-                          <a:rPr lang="es-ES_tradnl" sz="2400" b="0" i="1" noProof="0" smtClean="0">
-                            <a:latin typeface="Cambria Math" panose="02040503050406030204" pitchFamily="18" charset="0"/>
-                            <a:ea typeface="Cambria Math" panose="02040503050406030204" pitchFamily="18" charset="0"/>
-                          </a:rPr>
-                          <m:t>𝑌</m:t>
-                        </m:r>
-                      </m:e>
-                    </m:acc>
-                    <m:r>
-                      <a:rPr lang="en-US" sz="2400" b="0" i="1" noProof="0" smtClean="0">
-                        <a:latin typeface="Cambria Math" panose="02040503050406030204" pitchFamily="18" charset="0"/>
-                        <a:ea typeface="Cambria Math" panose="02040503050406030204" pitchFamily="18" charset="0"/>
-                      </a:rPr>
-                      <m:t>=0</m:t>
-                    </m:r>
-                  </m:oMath>
-                </a14:m>
-                <a:r>
-                  <a:rPr lang="es-ES_tradnl" dirty="0"/>
-                  <a:t> en caso contrario </a:t>
-                </a:r>
-              </a:p>
-              <a:p>
-                <a:pPr>
-                  <a:lnSpc>
-                    <a:spcPct val="120000"/>
-                  </a:lnSpc>
-                </a:pPr>
-                <a:r>
-                  <a:rPr lang="es-ES_tradnl" dirty="0"/>
-                  <a:t>Es una probabilidad </a:t>
-                </a:r>
-                <a:r>
-                  <a:rPr lang="es-ES_tradnl" dirty="0">
-                    <a:solidFill>
-                      <a:srgbClr val="002060"/>
-                    </a:solidFill>
-                  </a:rPr>
-                  <a:t>condicional</a:t>
-                </a:r>
-              </a:p>
-              <a:p>
-                <a:pPr>
-                  <a:lnSpc>
-                    <a:spcPct val="120000"/>
-                  </a:lnSpc>
-                </a:pPr>
-                <a:r>
-                  <a:rPr lang="es-ES_tradnl" dirty="0">
-                    <a:solidFill>
-                      <a:srgbClr val="FF0000"/>
-                    </a:solidFill>
-                  </a:rPr>
-                  <a:t>Ojo</a:t>
-                </a:r>
-                <a:r>
-                  <a:rPr lang="es-ES_tradnl" dirty="0"/>
-                  <a:t>: la penalidad 0-1 es simétrica. ¿Bueno?</a:t>
-                </a:r>
-              </a:p>
-            </p:txBody>
-          </p:sp>
-        </mc:Choice>
-        <mc:Fallback xmlns="">
-          <p:sp>
-            <p:nvSpPr>
-              <p:cNvPr id="3" name="Content Placeholder 2">
-                <a:extLst>
-                  <a:ext uri="{FF2B5EF4-FFF2-40B4-BE49-F238E27FC236}">
-                    <a16:creationId xmlns:a16="http://schemas.microsoft.com/office/drawing/2014/main" id="{42DE2FE6-2D21-0373-E669-031C93ACF98C}"/>
-                  </a:ext>
-                </a:extLst>
-              </p:cNvPr>
-              <p:cNvSpPr>
-                <a:spLocks noGrp="1" noRot="1" noChangeAspect="1" noMove="1" noResize="1" noEditPoints="1" noAdjustHandles="1" noChangeArrowheads="1" noChangeShapeType="1" noTextEdit="1"/>
-              </p:cNvSpPr>
-              <p:nvPr>
-                <p:ph idx="1"/>
-              </p:nvPr>
-            </p:nvSpPr>
-            <p:spPr>
-              <a:blipFill>
-                <a:blip r:embed="rId2"/>
-                <a:stretch>
-                  <a:fillRect l="-1327" t="-291" b="-2035"/>
-                </a:stretch>
-              </a:blipFill>
-            </p:spPr>
-            <p:txBody>
-              <a:bodyPr/>
-              <a:lstStyle/>
-              <a:p>
-                <a:r>
-                  <a:rPr lang="es-ES_tradnl">
-                    <a:noFill/>
-                  </a:rPr>
-                  <a:t> </a:t>
-                </a:r>
-              </a:p>
-            </p:txBody>
-          </p:sp>
-        </mc:Fallback>
-      </mc:AlternateContent>
-    </p:spTree>
-    <p:extLst>
-      <p:ext uri="{BB962C8B-B14F-4D97-AF65-F5344CB8AC3E}">
-        <p14:creationId xmlns:p14="http://schemas.microsoft.com/office/powerpoint/2010/main" val="3902103125"/>
-      </p:ext>
-    </p:extLst>
-  </p:cSld>
-  <p:clrMapOvr>
-    <a:masterClrMapping/>
-  </p:clrMapOvr>
-</p:sld>
-</file>
-
-<file path=ppt/slides/slide17.xml><?xml version="1.0" encoding="utf-8"?>
-<p:sld xmlns:a="http://schemas.openxmlformats.org/drawingml/2006/main" xmlns:r="http://schemas.openxmlformats.org/officeDocument/2006/relationships" xmlns:p="http://schemas.openxmlformats.org/presentationml/2006/main">
-  <p:cSld>
-    <p:spTree>
-      <p:nvGrpSpPr>
-        <p:cNvPr id="1" name=""/>
-        <p:cNvGrpSpPr/>
-        <p:nvPr/>
-      </p:nvGrpSpPr>
-      <p:grpSpPr>
-        <a:xfrm>
-          <a:off x="0" y="0"/>
-          <a:ext cx="0" cy="0"/>
-          <a:chOff x="0" y="0"/>
-          <a:chExt cx="0" cy="0"/>
-        </a:xfrm>
-      </p:grpSpPr>
-      <p:sp>
-        <p:nvSpPr>
-          <p:cNvPr id="2" name="Title 1">
-            <a:extLst>
-              <a:ext uri="{FF2B5EF4-FFF2-40B4-BE49-F238E27FC236}">
-                <a16:creationId xmlns:a16="http://schemas.microsoft.com/office/drawing/2014/main" id="{2A19CDA2-FBFD-4435-09C4-88FAECC458A5}"/>
-              </a:ext>
-            </a:extLst>
-          </p:cNvPr>
-          <p:cNvSpPr>
-            <a:spLocks noGrp="1"/>
-          </p:cNvSpPr>
-          <p:nvPr>
-            <p:ph type="title"/>
-          </p:nvPr>
-        </p:nvSpPr>
-        <p:spPr/>
-        <p:txBody>
-          <a:bodyPr/>
-          <a:lstStyle/>
-          <a:p>
-            <a:r>
-              <a:rPr lang="es-ES_tradnl" dirty="0"/>
-              <a:t>Posibles soluciones</a:t>
-            </a:r>
-          </a:p>
-        </p:txBody>
-      </p:sp>
-      <mc:AlternateContent xmlns:mc="http://schemas.openxmlformats.org/markup-compatibility/2006" xmlns:a14="http://schemas.microsoft.com/office/drawing/2010/main">
-        <mc:Choice Requires="a14">
-          <p:sp>
-            <p:nvSpPr>
-              <p:cNvPr id="3" name="Content Placeholder 2">
-                <a:extLst>
-                  <a:ext uri="{FF2B5EF4-FFF2-40B4-BE49-F238E27FC236}">
-                    <a16:creationId xmlns:a16="http://schemas.microsoft.com/office/drawing/2014/main" id="{42DE2FE6-2D21-0373-E669-031C93ACF98C}"/>
-                  </a:ext>
-                </a:extLst>
-              </p:cNvPr>
-              <p:cNvSpPr>
-                <a:spLocks noGrp="1"/>
-              </p:cNvSpPr>
-              <p:nvPr>
-                <p:ph idx="1"/>
-              </p:nvPr>
-            </p:nvSpPr>
-            <p:spPr/>
-            <p:txBody>
-              <a:bodyPr>
-                <a:normAutofit/>
-              </a:bodyPr>
-              <a:lstStyle/>
-              <a:p>
-                <a:pPr marL="514350" indent="-514350">
-                  <a:lnSpc>
-                    <a:spcPct val="120000"/>
-                  </a:lnSpc>
-                  <a:buFont typeface="+mj-lt"/>
-                  <a:buAutoNum type="arabicPeriod"/>
-                </a:pPr>
-                <a:r>
-                  <a:rPr lang="es-ES_tradnl" dirty="0"/>
-                  <a:t>Tres modelos para </a:t>
-                </a:r>
-                <a14:m>
-                  <m:oMath xmlns:m="http://schemas.openxmlformats.org/officeDocument/2006/math">
-                    <m:r>
-                      <a:rPr lang="es-ES_tradnl" b="0" i="1" smtClean="0">
-                        <a:latin typeface="Cambria Math" panose="02040503050406030204" pitchFamily="18" charset="0"/>
-                        <a:ea typeface="Cambria Math" panose="02040503050406030204" pitchFamily="18" charset="0"/>
-                      </a:rPr>
-                      <m:t>𝑝</m:t>
-                    </m:r>
-                    <m:r>
-                      <a:rPr lang="es-ES_tradnl" b="0" i="1" smtClean="0">
-                        <a:latin typeface="Cambria Math" panose="02040503050406030204" pitchFamily="18" charset="0"/>
-                        <a:ea typeface="Cambria Math" panose="02040503050406030204" pitchFamily="18" charset="0"/>
-                      </a:rPr>
-                      <m:t>=</m:t>
-                    </m:r>
-                    <m:func>
-                      <m:funcPr>
-                        <m:ctrlPr>
-                          <a:rPr lang="es-ES_tradnl" b="0" i="1" smtClean="0">
-                            <a:latin typeface="Cambria Math" panose="02040503050406030204" pitchFamily="18" charset="0"/>
-                            <a:ea typeface="Cambria Math" panose="02040503050406030204" pitchFamily="18" charset="0"/>
-                          </a:rPr>
-                        </m:ctrlPr>
-                      </m:funcPr>
-                      <m:fName>
-                        <m:r>
-                          <m:rPr>
-                            <m:sty m:val="p"/>
-                          </m:rPr>
-                          <a:rPr lang="es-ES_tradnl" b="0" i="0" smtClean="0">
-                            <a:latin typeface="Cambria Math" panose="02040503050406030204" pitchFamily="18" charset="0"/>
-                            <a:ea typeface="Cambria Math" panose="02040503050406030204" pitchFamily="18" charset="0"/>
-                          </a:rPr>
-                          <m:t>Pr</m:t>
-                        </m:r>
-                      </m:fName>
-                      <m:e>
-                        <m:d>
-                          <m:dPr>
-                            <m:ctrlPr>
-                              <a:rPr lang="es-ES_tradnl" b="0" i="1" smtClean="0">
-                                <a:latin typeface="Cambria Math" panose="02040503050406030204" pitchFamily="18" charset="0"/>
-                                <a:ea typeface="Cambria Math" panose="02040503050406030204" pitchFamily="18" charset="0"/>
-                              </a:rPr>
-                            </m:ctrlPr>
-                          </m:dPr>
-                          <m:e>
-                            <m:r>
-                              <a:rPr lang="es-ES_tradnl" b="0" i="1" smtClean="0">
-                                <a:latin typeface="Cambria Math" panose="02040503050406030204" pitchFamily="18" charset="0"/>
-                                <a:ea typeface="Cambria Math" panose="02040503050406030204" pitchFamily="18" charset="0"/>
-                              </a:rPr>
-                              <m:t>𝑌</m:t>
-                            </m:r>
-                            <m:r>
-                              <a:rPr lang="es-ES_tradnl" b="0" i="1" smtClean="0">
-                                <a:latin typeface="Cambria Math" panose="02040503050406030204" pitchFamily="18" charset="0"/>
-                                <a:ea typeface="Cambria Math" panose="02040503050406030204" pitchFamily="18" charset="0"/>
-                              </a:rPr>
-                              <m:t>=1|</m:t>
-                            </m:r>
-                            <m:r>
-                              <a:rPr lang="es-ES_tradnl" b="0" i="1" smtClean="0">
-                                <a:latin typeface="Cambria Math" panose="02040503050406030204" pitchFamily="18" charset="0"/>
-                                <a:ea typeface="Cambria Math" panose="02040503050406030204" pitchFamily="18" charset="0"/>
-                              </a:rPr>
-                              <m:t>𝑋</m:t>
-                            </m:r>
-                          </m:e>
-                        </m:d>
-                      </m:e>
-                    </m:func>
-                  </m:oMath>
-                </a14:m>
-                <a:r>
-                  <a:rPr lang="es-ES_tradnl" dirty="0"/>
-                  <a:t>: </a:t>
-                </a:r>
-              </a:p>
-              <a:p>
-                <a:pPr marL="971550" lvl="1" indent="-514350">
-                  <a:lnSpc>
-                    <a:spcPct val="120000"/>
-                  </a:lnSpc>
-                  <a:buFont typeface="+mj-lt"/>
-                  <a:buAutoNum type="arabicPeriod"/>
-                </a:pPr>
-                <a:r>
-                  <a:rPr lang="es-ES_tradnl" dirty="0"/>
-                  <a:t>Logístico</a:t>
-                </a:r>
-              </a:p>
-              <a:p>
-                <a:pPr marL="971550" lvl="1" indent="-514350">
-                  <a:lnSpc>
-                    <a:spcPct val="120000"/>
-                  </a:lnSpc>
-                  <a:buFont typeface="+mj-lt"/>
-                  <a:buAutoNum type="arabicPeriod"/>
-                </a:pPr>
-                <a:r>
-                  <a:rPr lang="es-ES_tradnl" dirty="0"/>
-                  <a:t>Vecinos Cercanos</a:t>
-                </a:r>
-              </a:p>
-              <a:p>
-                <a:pPr marL="971550" lvl="1" indent="-514350">
-                  <a:lnSpc>
-                    <a:spcPct val="120000"/>
-                  </a:lnSpc>
-                  <a:buFont typeface="+mj-lt"/>
-                  <a:buAutoNum type="arabicPeriod"/>
-                </a:pPr>
-                <a:r>
-                  <a:rPr lang="es-ES_tradnl" dirty="0"/>
-                  <a:t>Análisis discriminante: lineal (LDA) o cuadrático (QDA)</a:t>
-                </a:r>
-              </a:p>
-              <a:p>
-                <a:pPr marL="971550" lvl="1" indent="-514350">
-                  <a:lnSpc>
-                    <a:spcPct val="120000"/>
-                  </a:lnSpc>
-                  <a:buFont typeface="+mj-lt"/>
-                  <a:buAutoNum type="arabicPeriod"/>
-                </a:pPr>
-                <a:r>
-                  <a:rPr lang="es-ES_tradnl" dirty="0"/>
-                  <a:t>Naive Bayes</a:t>
-                </a:r>
-              </a:p>
-              <a:p>
-                <a:pPr marL="514350" indent="-514350">
-                  <a:lnSpc>
-                    <a:spcPct val="120000"/>
-                  </a:lnSpc>
-                  <a:buFont typeface="+mj-lt"/>
-                  <a:buAutoNum type="arabicPeriod"/>
-                </a:pPr>
-                <a:r>
-                  <a:rPr lang="es-ES_tradnl" dirty="0"/>
-                  <a:t>Métricas de desempeño con perdida asimétrica: Análisis ROC.</a:t>
-                </a:r>
-              </a:p>
-            </p:txBody>
-          </p:sp>
-        </mc:Choice>
-        <mc:Fallback xmlns="">
-          <p:sp>
-            <p:nvSpPr>
-              <p:cNvPr id="3" name="Content Placeholder 2">
-                <a:extLst>
-                  <a:ext uri="{FF2B5EF4-FFF2-40B4-BE49-F238E27FC236}">
-                    <a16:creationId xmlns:a16="http://schemas.microsoft.com/office/drawing/2014/main" id="{42DE2FE6-2D21-0373-E669-031C93ACF98C}"/>
-                  </a:ext>
-                </a:extLst>
-              </p:cNvPr>
-              <p:cNvSpPr>
-                <a:spLocks noGrp="1" noRot="1" noChangeAspect="1" noMove="1" noResize="1" noEditPoints="1" noAdjustHandles="1" noChangeArrowheads="1" noChangeShapeType="1" noTextEdit="1"/>
-              </p:cNvSpPr>
-              <p:nvPr>
-                <p:ph idx="1"/>
-              </p:nvPr>
-            </p:nvSpPr>
-            <p:spPr>
-              <a:blipFill>
-                <a:blip r:embed="rId2"/>
-                <a:stretch>
-                  <a:fillRect l="-1809" t="-1163" r="-965"/>
-                </a:stretch>
-              </a:blipFill>
-            </p:spPr>
-            <p:txBody>
-              <a:bodyPr/>
-              <a:lstStyle/>
-              <a:p>
-                <a:r>
-                  <a:rPr lang="es-ES_tradnl">
-                    <a:noFill/>
-                  </a:rPr>
-                  <a:t> </a:t>
-                </a:r>
-              </a:p>
-            </p:txBody>
-          </p:sp>
-        </mc:Fallback>
-      </mc:AlternateContent>
-    </p:spTree>
-    <p:extLst>
-      <p:ext uri="{BB962C8B-B14F-4D97-AF65-F5344CB8AC3E}">
-        <p14:creationId xmlns:p14="http://schemas.microsoft.com/office/powerpoint/2010/main" val="3870464886"/>
-      </p:ext>
-    </p:extLst>
-  </p:cSld>
-  <p:clrMapOvr>
-    <a:masterClrMapping/>
-  </p:clrMapOvr>
-</p:sld>
-</file>
-
-<file path=ppt/slides/slide18.xml><?xml version="1.0" encoding="utf-8"?>
-<p:sld xmlns:a="http://schemas.openxmlformats.org/drawingml/2006/main" xmlns:r="http://schemas.openxmlformats.org/officeDocument/2006/relationships" xmlns:p="http://schemas.openxmlformats.org/presentationml/2006/main">
-  <p:cSld>
-    <p:spTree>
-      <p:nvGrpSpPr>
-        <p:cNvPr id="1" name=""/>
-        <p:cNvGrpSpPr/>
-        <p:nvPr/>
-      </p:nvGrpSpPr>
-      <p:grpSpPr>
-        <a:xfrm>
-          <a:off x="0" y="0"/>
-          <a:ext cx="0" cy="0"/>
-          <a:chOff x="0" y="0"/>
-          <a:chExt cx="0" cy="0"/>
-        </a:xfrm>
-      </p:grpSpPr>
-      <mc:AlternateContent xmlns:mc="http://schemas.openxmlformats.org/markup-compatibility/2006" xmlns:a14="http://schemas.microsoft.com/office/drawing/2010/main">
-        <mc:Choice Requires="a14">
-          <p:sp>
-            <p:nvSpPr>
-              <p:cNvPr id="2" name="Title 1">
-                <a:extLst>
-                  <a:ext uri="{FF2B5EF4-FFF2-40B4-BE49-F238E27FC236}">
-                    <a16:creationId xmlns:a16="http://schemas.microsoft.com/office/drawing/2014/main" id="{0E83D0DE-DCB7-E42A-D782-6E396A647B0C}"/>
-                  </a:ext>
-                </a:extLst>
-              </p:cNvPr>
-              <p:cNvSpPr>
-                <a:spLocks noGrp="1"/>
-              </p:cNvSpPr>
-              <p:nvPr>
-                <p:ph type="title"/>
-              </p:nvPr>
-            </p:nvSpPr>
-            <p:spPr/>
-            <p:txBody>
-              <a:bodyPr>
-                <a:normAutofit/>
-              </a:bodyPr>
-              <a:lstStyle/>
-              <a:p>
-                <a:r>
-                  <a:rPr lang="es-ES_tradnl" dirty="0"/>
-                  <a:t>Modelo lineal para Clasificar: </a:t>
-                </a:r>
-                <a:r>
-                  <a:rPr lang="es-ES_tradnl" i="1" dirty="0">
-                    <a:solidFill>
-                      <a:schemeClr val="tx1">
-                        <a:lumMod val="50000"/>
-                        <a:lumOff val="50000"/>
-                      </a:schemeClr>
-                    </a:solidFill>
-                  </a:rPr>
-                  <a:t>¿Por qué no </a:t>
-                </a:r>
-                <a14:m>
-                  <m:oMath xmlns:m="http://schemas.openxmlformats.org/officeDocument/2006/math">
-                    <m:r>
-                      <a:rPr lang="es-ES_tradnl" b="0" i="1" smtClean="0">
-                        <a:solidFill>
-                          <a:schemeClr val="tx1">
-                            <a:lumMod val="50000"/>
-                            <a:lumOff val="50000"/>
-                          </a:schemeClr>
-                        </a:solidFill>
-                        <a:latin typeface="Cambria Math" panose="02040503050406030204" pitchFamily="18" charset="0"/>
-                        <a:ea typeface="Cambria Math" panose="02040503050406030204" pitchFamily="18" charset="0"/>
-                      </a:rPr>
-                      <m:t>𝑝</m:t>
-                    </m:r>
-                    <m:r>
-                      <a:rPr lang="es-ES_tradnl" b="0" i="1" smtClean="0">
-                        <a:solidFill>
-                          <a:schemeClr val="tx1">
-                            <a:lumMod val="50000"/>
-                            <a:lumOff val="50000"/>
-                          </a:schemeClr>
-                        </a:solidFill>
-                        <a:latin typeface="Cambria Math" panose="02040503050406030204" pitchFamily="18" charset="0"/>
-                        <a:ea typeface="Cambria Math" panose="02040503050406030204" pitchFamily="18" charset="0"/>
-                      </a:rPr>
-                      <m:t>=</m:t>
-                    </m:r>
-                    <m:func>
-                      <m:funcPr>
-                        <m:ctrlPr>
-                          <a:rPr lang="en-US" b="0" i="1">
-                            <a:solidFill>
-                              <a:schemeClr val="tx1">
-                                <a:lumMod val="50000"/>
-                                <a:lumOff val="50000"/>
-                              </a:schemeClr>
-                            </a:solidFill>
-                            <a:latin typeface="Cambria Math" panose="02040503050406030204" pitchFamily="18" charset="0"/>
-                            <a:ea typeface="Cambria Math" panose="02040503050406030204" pitchFamily="18" charset="0"/>
-                          </a:rPr>
-                        </m:ctrlPr>
-                      </m:funcPr>
-                      <m:fName>
-                        <m:r>
-                          <m:rPr>
-                            <m:sty m:val="p"/>
-                          </m:rPr>
-                          <a:rPr lang="en-US" b="0">
-                            <a:solidFill>
-                              <a:schemeClr val="tx1">
-                                <a:lumMod val="50000"/>
-                                <a:lumOff val="50000"/>
-                              </a:schemeClr>
-                            </a:solidFill>
-                            <a:latin typeface="Cambria Math" panose="02040503050406030204" pitchFamily="18" charset="0"/>
-                            <a:ea typeface="Cambria Math" panose="02040503050406030204" pitchFamily="18" charset="0"/>
-                          </a:rPr>
-                          <m:t>Pr</m:t>
-                        </m:r>
-                      </m:fName>
-                      <m:e>
-                        <m:d>
-                          <m:dPr>
-                            <m:ctrlPr>
-                              <a:rPr lang="en-US" b="0" i="1">
-                                <a:solidFill>
-                                  <a:schemeClr val="tx1">
-                                    <a:lumMod val="50000"/>
-                                    <a:lumOff val="50000"/>
-                                  </a:schemeClr>
-                                </a:solidFill>
-                                <a:latin typeface="Cambria Math" panose="02040503050406030204" pitchFamily="18" charset="0"/>
-                                <a:ea typeface="Cambria Math" panose="02040503050406030204" pitchFamily="18" charset="0"/>
-                              </a:rPr>
-                            </m:ctrlPr>
-                          </m:dPr>
-                          <m:e>
-                            <m:r>
-                              <a:rPr lang="en-US" b="0" i="1">
-                                <a:solidFill>
-                                  <a:schemeClr val="tx1">
-                                    <a:lumMod val="50000"/>
-                                    <a:lumOff val="50000"/>
-                                  </a:schemeClr>
-                                </a:solidFill>
-                                <a:latin typeface="Cambria Math" panose="02040503050406030204" pitchFamily="18" charset="0"/>
-                                <a:ea typeface="Cambria Math" panose="02040503050406030204" pitchFamily="18" charset="0"/>
-                              </a:rPr>
-                              <m:t>𝑌</m:t>
-                            </m:r>
-                            <m:r>
-                              <a:rPr lang="en-US" b="0" i="1">
-                                <a:solidFill>
-                                  <a:schemeClr val="tx1">
-                                    <a:lumMod val="50000"/>
-                                    <a:lumOff val="50000"/>
-                                  </a:schemeClr>
-                                </a:solidFill>
-                                <a:latin typeface="Cambria Math" panose="02040503050406030204" pitchFamily="18" charset="0"/>
-                                <a:ea typeface="Cambria Math" panose="02040503050406030204" pitchFamily="18" charset="0"/>
-                              </a:rPr>
-                              <m:t>=1|</m:t>
-                            </m:r>
-                            <m:r>
-                              <a:rPr lang="en-US" b="0" i="1">
-                                <a:solidFill>
-                                  <a:schemeClr val="tx1">
-                                    <a:lumMod val="50000"/>
-                                    <a:lumOff val="50000"/>
-                                  </a:schemeClr>
-                                </a:solidFill>
-                                <a:latin typeface="Cambria Math" panose="02040503050406030204" pitchFamily="18" charset="0"/>
-                                <a:ea typeface="Cambria Math" panose="02040503050406030204" pitchFamily="18" charset="0"/>
-                              </a:rPr>
-                              <m:t>𝑋</m:t>
-                            </m:r>
-                          </m:e>
-                        </m:d>
-                      </m:e>
-                    </m:func>
-                    <m:r>
-                      <a:rPr lang="en-US" b="0" i="1" smtClean="0">
-                        <a:solidFill>
-                          <a:schemeClr val="tx1">
-                            <a:lumMod val="50000"/>
-                            <a:lumOff val="50000"/>
-                          </a:schemeClr>
-                        </a:solidFill>
-                        <a:latin typeface="Cambria Math" panose="02040503050406030204" pitchFamily="18" charset="0"/>
-                        <a:ea typeface="Cambria Math" panose="02040503050406030204" pitchFamily="18" charset="0"/>
-                      </a:rPr>
-                      <m:t>=</m:t>
-                    </m:r>
-                    <m:r>
-                      <a:rPr lang="en-US" b="0" i="1" smtClean="0">
-                        <a:solidFill>
-                          <a:schemeClr val="tx1">
-                            <a:lumMod val="50000"/>
-                            <a:lumOff val="50000"/>
-                          </a:schemeClr>
-                        </a:solidFill>
-                        <a:latin typeface="Cambria Math" panose="02040503050406030204" pitchFamily="18" charset="0"/>
-                        <a:ea typeface="Cambria Math" panose="02040503050406030204" pitchFamily="18" charset="0"/>
-                      </a:rPr>
-                      <m:t>𝑋</m:t>
-                    </m:r>
-                    <m:r>
-                      <a:rPr lang="en-US" b="0" i="1" smtClean="0">
-                        <a:solidFill>
-                          <a:schemeClr val="tx1">
-                            <a:lumMod val="50000"/>
-                            <a:lumOff val="50000"/>
-                          </a:schemeClr>
-                        </a:solidFill>
-                        <a:latin typeface="Cambria Math" panose="02040503050406030204" pitchFamily="18" charset="0"/>
-                        <a:ea typeface="Cambria Math" panose="02040503050406030204" pitchFamily="18" charset="0"/>
-                      </a:rPr>
-                      <m:t>𝛽</m:t>
-                    </m:r>
-                  </m:oMath>
-                </a14:m>
-                <a:r>
-                  <a:rPr lang="es-ES_tradnl" i="1" dirty="0">
-                    <a:solidFill>
-                      <a:schemeClr val="tx1">
-                        <a:lumMod val="50000"/>
-                        <a:lumOff val="50000"/>
-                      </a:schemeClr>
-                    </a:solidFill>
-                  </a:rPr>
-                  <a:t>?</a:t>
-                </a:r>
-                <a:endParaRPr lang="es-ES_tradnl" i="1" dirty="0"/>
-              </a:p>
-            </p:txBody>
-          </p:sp>
-        </mc:Choice>
-        <mc:Fallback xmlns="">
-          <p:sp>
-            <p:nvSpPr>
-              <p:cNvPr id="2" name="Title 1">
-                <a:extLst>
-                  <a:ext uri="{FF2B5EF4-FFF2-40B4-BE49-F238E27FC236}">
-                    <a16:creationId xmlns:a16="http://schemas.microsoft.com/office/drawing/2014/main" id="{0E83D0DE-DCB7-E42A-D782-6E396A647B0C}"/>
-                  </a:ext>
-                </a:extLst>
-              </p:cNvPr>
-              <p:cNvSpPr>
-                <a:spLocks noGrp="1" noRot="1" noChangeAspect="1" noMove="1" noResize="1" noEditPoints="1" noAdjustHandles="1" noChangeArrowheads="1" noChangeShapeType="1" noTextEdit="1"/>
-              </p:cNvSpPr>
-              <p:nvPr>
-                <p:ph type="title"/>
-              </p:nvPr>
-            </p:nvSpPr>
-            <p:spPr>
-              <a:blipFill>
-                <a:blip r:embed="rId3"/>
-                <a:stretch>
-                  <a:fillRect l="-2413" t="-14286" b="-21905"/>
-                </a:stretch>
-              </a:blipFill>
-            </p:spPr>
-            <p:txBody>
-              <a:bodyPr/>
-              <a:lstStyle/>
-              <a:p>
-                <a:r>
-                  <a:rPr lang="es-ES_tradnl">
-                    <a:noFill/>
-                  </a:rPr>
-                  <a:t> </a:t>
-                </a:r>
-              </a:p>
-            </p:txBody>
-          </p:sp>
-        </mc:Fallback>
-      </mc:AlternateContent>
-      <mc:AlternateContent xmlns:mc="http://schemas.openxmlformats.org/markup-compatibility/2006" xmlns:a14="http://schemas.microsoft.com/office/drawing/2010/main">
-        <mc:Choice Requires="a14">
-          <p:sp>
-            <p:nvSpPr>
-              <p:cNvPr id="3" name="Content Placeholder 2">
-                <a:extLst>
-                  <a:ext uri="{FF2B5EF4-FFF2-40B4-BE49-F238E27FC236}">
-                    <a16:creationId xmlns:a16="http://schemas.microsoft.com/office/drawing/2014/main" id="{226CE70E-DF44-F112-1149-056C52EBB750}"/>
-                  </a:ext>
-                </a:extLst>
-              </p:cNvPr>
-              <p:cNvSpPr>
-                <a:spLocks noGrp="1"/>
-              </p:cNvSpPr>
-              <p:nvPr>
-                <p:ph sz="half" idx="1"/>
-              </p:nvPr>
-            </p:nvSpPr>
-            <p:spPr/>
-            <p:txBody>
-              <a:bodyPr>
-                <a:normAutofit fontScale="92500" lnSpcReduction="20000"/>
-              </a:bodyPr>
-              <a:lstStyle/>
-              <a:p>
-                <a:pPr>
-                  <a:lnSpc>
-                    <a:spcPct val="120000"/>
-                  </a:lnSpc>
-                </a:pPr>
-                <a:r>
-                  <a:rPr lang="es-ES_tradnl" dirty="0">
-                    <a:solidFill>
-                      <a:srgbClr val="FF0000"/>
-                    </a:solidFill>
-                  </a:rPr>
-                  <a:t>Se sale del rango </a:t>
-                </a:r>
-                <a14:m>
-                  <m:oMath xmlns:m="http://schemas.openxmlformats.org/officeDocument/2006/math">
-                    <m:d>
-                      <m:dPr>
-                        <m:ctrlPr>
-                          <a:rPr lang="en-US" b="0" i="1" smtClean="0">
-                            <a:solidFill>
-                              <a:srgbClr val="FF0000"/>
-                            </a:solidFill>
-                            <a:latin typeface="Cambria Math" panose="02040503050406030204" pitchFamily="18" charset="0"/>
-                            <a:ea typeface="Cambria Math" panose="02040503050406030204" pitchFamily="18" charset="0"/>
-                          </a:rPr>
-                        </m:ctrlPr>
-                      </m:dPr>
-                      <m:e>
-                        <m:r>
-                          <a:rPr lang="en-US" b="0" i="1" smtClean="0">
-                            <a:solidFill>
-                              <a:srgbClr val="FF0000"/>
-                            </a:solidFill>
-                            <a:latin typeface="Cambria Math" panose="02040503050406030204" pitchFamily="18" charset="0"/>
-                            <a:ea typeface="Cambria Math" panose="02040503050406030204" pitchFamily="18" charset="0"/>
-                          </a:rPr>
-                          <m:t>0,</m:t>
-                        </m:r>
-                        <m:r>
-                          <a:rPr lang="es-ES_tradnl" b="0" i="1" smtClean="0">
-                            <a:solidFill>
-                              <a:srgbClr val="FF0000"/>
-                            </a:solidFill>
-                            <a:latin typeface="Cambria Math" panose="02040503050406030204" pitchFamily="18" charset="0"/>
-                            <a:ea typeface="Cambria Math" panose="02040503050406030204" pitchFamily="18" charset="0"/>
-                          </a:rPr>
-                          <m:t>1</m:t>
-                        </m:r>
-                      </m:e>
-                    </m:d>
-                  </m:oMath>
-                </a14:m>
-                <a:endParaRPr lang="es-ES_tradnl" dirty="0">
-                  <a:solidFill>
-                    <a:srgbClr val="FF0000"/>
-                  </a:solidFill>
-                </a:endParaRPr>
-              </a:p>
-              <a:p>
-                <a:pPr>
-                  <a:lnSpc>
-                    <a:spcPct val="120000"/>
-                  </a:lnSpc>
-                </a:pPr>
-                <a:r>
-                  <a:rPr lang="es-ES_tradnl" dirty="0"/>
-                  <a:t>Relaciones no lineales entre </a:t>
-                </a:r>
-                <a14:m>
-                  <m:oMath xmlns:m="http://schemas.openxmlformats.org/officeDocument/2006/math">
-                    <m:r>
-                      <a:rPr lang="es-ES_tradnl" b="0" i="1" smtClean="0">
-                        <a:latin typeface="Cambria Math" panose="02040503050406030204" pitchFamily="18" charset="0"/>
-                      </a:rPr>
-                      <m:t>𝑌</m:t>
-                    </m:r>
-                  </m:oMath>
-                </a14:m>
-                <a:r>
-                  <a:rPr lang="es-ES_tradnl" dirty="0"/>
-                  <a:t> e </a:t>
-                </a:r>
-                <a14:m>
-                  <m:oMath xmlns:m="http://schemas.openxmlformats.org/officeDocument/2006/math">
-                    <m:r>
-                      <a:rPr lang="en-US" i="1">
-                        <a:latin typeface="Cambria Math" panose="02040503050406030204" pitchFamily="18" charset="0"/>
-                        <a:ea typeface="Cambria Math" panose="02040503050406030204" pitchFamily="18" charset="0"/>
-                      </a:rPr>
-                      <m:t>𝑋</m:t>
-                    </m:r>
-                  </m:oMath>
-                </a14:m>
-                <a:endParaRPr lang="es-ES_tradnl" dirty="0"/>
-              </a:p>
-              <a:p>
-                <a:pPr>
-                  <a:lnSpc>
-                    <a:spcPct val="120000"/>
-                  </a:lnSpc>
-                </a:pPr>
-                <a:r>
-                  <a:rPr lang="es-ES_tradnl" dirty="0"/>
-                  <a:t>Problemas de alta multicolinealidad entre las </a:t>
-                </a:r>
-                <a14:m>
-                  <m:oMath xmlns:m="http://schemas.openxmlformats.org/officeDocument/2006/math">
-                    <m:r>
-                      <a:rPr lang="en-US" i="1" smtClean="0">
-                        <a:latin typeface="Cambria Math" panose="02040503050406030204" pitchFamily="18" charset="0"/>
-                        <a:ea typeface="Cambria Math" panose="02040503050406030204" pitchFamily="18" charset="0"/>
-                      </a:rPr>
-                      <m:t>𝑋</m:t>
-                    </m:r>
-                  </m:oMath>
-                </a14:m>
-                <a:endParaRPr lang="es-ES_tradnl" dirty="0"/>
-              </a:p>
-              <a:p>
-                <a:pPr>
-                  <a:lnSpc>
-                    <a:spcPct val="120000"/>
-                  </a:lnSpc>
-                </a:pPr>
-                <a:r>
-                  <a:rPr lang="es-ES_tradnl" dirty="0"/>
-                  <a:t>Logit/análisis discriminante es </a:t>
-                </a:r>
-                <a:r>
-                  <a:rPr lang="es-ES_tradnl" b="1" dirty="0"/>
-                  <a:t>fácil</a:t>
-                </a:r>
-                <a:r>
-                  <a:rPr lang="es-ES_tradnl" dirty="0"/>
-                  <a:t> de generalizar al caso de </a:t>
-                </a:r>
-                <a14:m>
-                  <m:oMath xmlns:m="http://schemas.openxmlformats.org/officeDocument/2006/math">
-                    <m:r>
-                      <a:rPr lang="en-US" b="0" i="1" smtClean="0">
-                        <a:latin typeface="Cambria Math" panose="02040503050406030204" pitchFamily="18" charset="0"/>
-                        <a:ea typeface="Cambria Math" panose="02040503050406030204" pitchFamily="18" charset="0"/>
-                      </a:rPr>
-                      <m:t>𝑃</m:t>
-                    </m:r>
-                  </m:oMath>
-                </a14:m>
-                <a:r>
-                  <a:rPr lang="es-ES_tradnl" dirty="0"/>
-                  <a:t> categorías no ordenadas.</a:t>
-                </a:r>
-              </a:p>
-              <a:p>
-                <a:pPr>
-                  <a:lnSpc>
-                    <a:spcPct val="120000"/>
-                  </a:lnSpc>
-                </a:pPr>
-                <a:endParaRPr lang="es-ES_tradnl" dirty="0"/>
-              </a:p>
-            </p:txBody>
-          </p:sp>
-        </mc:Choice>
-        <mc:Fallback xmlns="">
-          <p:sp>
-            <p:nvSpPr>
-              <p:cNvPr id="3" name="Content Placeholder 2">
-                <a:extLst>
-                  <a:ext uri="{FF2B5EF4-FFF2-40B4-BE49-F238E27FC236}">
-                    <a16:creationId xmlns:a16="http://schemas.microsoft.com/office/drawing/2014/main" id="{226CE70E-DF44-F112-1149-056C52EBB750}"/>
-                  </a:ext>
-                </a:extLst>
-              </p:cNvPr>
-              <p:cNvSpPr>
-                <a:spLocks noGrp="1" noRot="1" noChangeAspect="1" noMove="1" noResize="1" noEditPoints="1" noAdjustHandles="1" noChangeArrowheads="1" noChangeShapeType="1" noTextEdit="1"/>
-              </p:cNvSpPr>
-              <p:nvPr>
-                <p:ph sz="half" idx="1"/>
-              </p:nvPr>
-            </p:nvSpPr>
-            <p:spPr>
-              <a:blipFill>
-                <a:blip r:embed="rId4"/>
-                <a:stretch>
-                  <a:fillRect l="-2445" t="-1453" r="-2934"/>
-                </a:stretch>
-              </a:blipFill>
-            </p:spPr>
-            <p:txBody>
-              <a:bodyPr/>
-              <a:lstStyle/>
-              <a:p>
-                <a:r>
-                  <a:rPr lang="es-ES_tradnl">
-                    <a:noFill/>
-                  </a:rPr>
-                  <a:t> </a:t>
-                </a:r>
-              </a:p>
-            </p:txBody>
-          </p:sp>
-        </mc:Fallback>
-      </mc:AlternateContent>
-      <p:pic>
-        <p:nvPicPr>
-          <p:cNvPr id="6" name="Content Placeholder 5" descr="A graph with a line and a line&#10;&#10;Description automatically generated">
-            <a:extLst>
-              <a:ext uri="{FF2B5EF4-FFF2-40B4-BE49-F238E27FC236}">
-                <a16:creationId xmlns:a16="http://schemas.microsoft.com/office/drawing/2014/main" id="{5BDE54AD-E4B7-6E7D-200E-C79D8A1DB71E}"/>
-              </a:ext>
-            </a:extLst>
-          </p:cNvPr>
-          <p:cNvPicPr>
-            <a:picLocks noGrp="1" noChangeAspect="1"/>
-          </p:cNvPicPr>
-          <p:nvPr>
-            <p:ph sz="half" idx="2"/>
-          </p:nvPr>
-        </p:nvPicPr>
-        <p:blipFill>
-          <a:blip r:embed="rId5"/>
-          <a:stretch>
-            <a:fillRect/>
-          </a:stretch>
-        </p:blipFill>
-        <p:spPr>
-          <a:xfrm>
-            <a:off x="6019800" y="1604963"/>
-            <a:ext cx="5900615" cy="4572000"/>
-          </a:xfrm>
-        </p:spPr>
-      </p:pic>
-      <p:sp>
-        <p:nvSpPr>
-          <p:cNvPr id="7" name="TextBox 6">
-            <a:extLst>
-              <a:ext uri="{FF2B5EF4-FFF2-40B4-BE49-F238E27FC236}">
-                <a16:creationId xmlns:a16="http://schemas.microsoft.com/office/drawing/2014/main" id="{BBEE4864-CBC5-C3AC-3FA2-3943E6E1B6BE}"/>
-              </a:ext>
-            </a:extLst>
-          </p:cNvPr>
-          <p:cNvSpPr txBox="1"/>
-          <p:nvPr/>
-        </p:nvSpPr>
-        <p:spPr>
-          <a:xfrm>
-            <a:off x="6566014" y="6120984"/>
-            <a:ext cx="5181599" cy="338554"/>
-          </a:xfrm>
-          <a:prstGeom prst="rect">
-            <a:avLst/>
-          </a:prstGeom>
-          <a:noFill/>
-        </p:spPr>
-        <p:txBody>
-          <a:bodyPr wrap="square">
-            <a:spAutoFit/>
-          </a:bodyPr>
-          <a:lstStyle/>
-          <a:p>
-            <a:r>
-              <a:rPr lang="en-US" sz="1600" dirty="0">
-                <a:effectLst/>
-                <a:latin typeface="Gill Sans Nova Light" panose="020B0302020104020203" pitchFamily="34" charset="0"/>
-              </a:rPr>
-              <a:t>Fuente: James, Witten, Hastie y Tibshirani, 2013. p.131 </a:t>
-            </a:r>
-            <a:endParaRPr lang="en-US" sz="4400" dirty="0">
-              <a:effectLst/>
-              <a:latin typeface="Gill Sans Nova Light" panose="020B0302020104020203" pitchFamily="34" charset="0"/>
-            </a:endParaRPr>
-          </a:p>
-        </p:txBody>
-      </p:sp>
-    </p:spTree>
-    <p:extLst>
-      <p:ext uri="{BB962C8B-B14F-4D97-AF65-F5344CB8AC3E}">
-        <p14:creationId xmlns:p14="http://schemas.microsoft.com/office/powerpoint/2010/main" val="468922351"/>
-      </p:ext>
-    </p:extLst>
-  </p:cSld>
-  <p:clrMapOvr>
-    <a:masterClrMapping/>
-  </p:clrMapOvr>
-  <p:timing>
-    <p:tnLst>
-      <p:par>
-        <p:cTn id="1" dur="indefinite" restart="never" nodeType="tmRoot">
-          <p:childTnLst>
-            <p:seq concurrent="1" nextAc="seek">
-              <p:cTn id="2" dur="indefinite" nodeType="mainSeq">
-                <p:childTnLst>
-                  <p:par>
-                    <p:cTn id="3" fill="hold">
-                      <p:stCondLst>
-                        <p:cond delay="indefinite"/>
-                      </p:stCondLst>
-                      <p:childTnLst>
-                        <p:par>
-                          <p:cTn id="4" fill="hold">
-                            <p:stCondLst>
-                              <p:cond delay="0"/>
-                            </p:stCondLst>
-                            <p:childTnLst>
-                              <p:par>
-                                <p:cTn id="5" presetID="1" presetClass="entr" presetSubtype="0" fill="hold" grpId="0" nodeType="clickEffect">
-                                  <p:stCondLst>
-                                    <p:cond delay="0"/>
-                                  </p:stCondLst>
-                                  <p:childTnLst>
-                                    <p:set>
-                                      <p:cBhvr>
-                                        <p:cTn id="6" dur="1" fill="hold">
-                                          <p:stCondLst>
-                                            <p:cond delay="0"/>
-                                          </p:stCondLst>
-                                        </p:cTn>
-                                        <p:tgtEl>
-                                          <p:spTgt spid="3">
-                                            <p:txEl>
-                                              <p:pRg st="0" end="0"/>
-                                            </p:txEl>
-                                          </p:spTgt>
-                                        </p:tgtEl>
-                                        <p:attrNameLst>
-                                          <p:attrName>style.visibility</p:attrName>
-                                        </p:attrNameLst>
-                                      </p:cBhvr>
-                                      <p:to>
-                                        <p:strVal val="visible"/>
-                                      </p:to>
-                                    </p:set>
-                                  </p:childTnLst>
-                                </p:cTn>
-                              </p:par>
-                            </p:childTnLst>
-                          </p:cTn>
-                        </p:par>
-                      </p:childTnLst>
-                    </p:cTn>
-                  </p:par>
-                  <p:par>
-                    <p:cTn id="7" fill="hold">
-                      <p:stCondLst>
-                        <p:cond delay="indefinite"/>
-                      </p:stCondLst>
-                      <p:childTnLst>
-                        <p:par>
-                          <p:cTn id="8" fill="hold">
-                            <p:stCondLst>
-                              <p:cond delay="0"/>
-                            </p:stCondLst>
-                            <p:childTnLst>
-                              <p:par>
-                                <p:cTn id="9" presetID="1" presetClass="entr" presetSubtype="0" fill="hold" grpId="0" nodeType="clickEffect">
-                                  <p:stCondLst>
-                                    <p:cond delay="0"/>
-                                  </p:stCondLst>
-                                  <p:childTnLst>
-                                    <p:set>
-                                      <p:cBhvr>
-                                        <p:cTn id="10" dur="1" fill="hold">
-                                          <p:stCondLst>
-                                            <p:cond delay="0"/>
-                                          </p:stCondLst>
-                                        </p:cTn>
-                                        <p:tgtEl>
-                                          <p:spTgt spid="3">
-                                            <p:txEl>
-                                              <p:pRg st="1" end="1"/>
-                                            </p:txEl>
-                                          </p:spTgt>
-                                        </p:tgtEl>
-                                        <p:attrNameLst>
-                                          <p:attrName>style.visibility</p:attrName>
-                                        </p:attrNameLst>
-                                      </p:cBhvr>
-                                      <p:to>
-                                        <p:strVal val="visible"/>
-                                      </p:to>
-                                    </p:set>
-                                  </p:childTnLst>
-                                </p:cTn>
-                              </p:par>
-                            </p:childTnLst>
-                          </p:cTn>
-                        </p:par>
-                      </p:childTnLst>
-                    </p:cTn>
-                  </p:par>
-                  <p:par>
-                    <p:cTn id="11" fill="hold">
-                      <p:stCondLst>
-                        <p:cond delay="indefinite"/>
-                      </p:stCondLst>
-                      <p:childTnLst>
-                        <p:par>
-                          <p:cTn id="12" fill="hold">
-                            <p:stCondLst>
-                              <p:cond delay="0"/>
-                            </p:stCondLst>
-                            <p:childTnLst>
-                              <p:par>
-                                <p:cTn id="13" presetID="1" presetClass="entr" presetSubtype="0" fill="hold" grpId="0" nodeType="clickEffect">
-                                  <p:stCondLst>
-                                    <p:cond delay="0"/>
-                                  </p:stCondLst>
-                                  <p:childTnLst>
-                                    <p:set>
-                                      <p:cBhvr>
-                                        <p:cTn id="14" dur="1" fill="hold">
-                                          <p:stCondLst>
-                                            <p:cond delay="0"/>
-                                          </p:stCondLst>
-                                        </p:cTn>
-                                        <p:tgtEl>
-                                          <p:spTgt spid="3">
-                                            <p:txEl>
-                                              <p:pRg st="2" end="2"/>
-                                            </p:txEl>
-                                          </p:spTgt>
-                                        </p:tgtEl>
-                                        <p:attrNameLst>
-                                          <p:attrName>style.visibility</p:attrName>
-                                        </p:attrNameLst>
-                                      </p:cBhvr>
-                                      <p:to>
-                                        <p:strVal val="visible"/>
-                                      </p:to>
-                                    </p:set>
-                                  </p:childTnLst>
-                                </p:cTn>
-                              </p:par>
-                            </p:childTnLst>
-                          </p:cTn>
-                        </p:par>
-                      </p:childTnLst>
-                    </p:cTn>
-                  </p:par>
-                  <p:par>
-                    <p:cTn id="15" fill="hold">
-                      <p:stCondLst>
-                        <p:cond delay="indefinite"/>
-                      </p:stCondLst>
-                      <p:childTnLst>
-                        <p:par>
-                          <p:cTn id="16" fill="hold">
-                            <p:stCondLst>
-                              <p:cond delay="0"/>
-                            </p:stCondLst>
-                            <p:childTnLst>
-                              <p:par>
-                                <p:cTn id="17" presetID="1" presetClass="entr" presetSubtype="0" fill="hold" grpId="0" nodeType="clickEffect">
-                                  <p:stCondLst>
-                                    <p:cond delay="0"/>
-                                  </p:stCondLst>
-                                  <p:childTnLst>
-                                    <p:set>
-                                      <p:cBhvr>
-                                        <p:cTn id="18" dur="1" fill="hold">
-                                          <p:stCondLst>
-                                            <p:cond delay="0"/>
-                                          </p:stCondLst>
-                                        </p:cTn>
-                                        <p:tgtEl>
-                                          <p:spTgt spid="3">
-                                            <p:txEl>
-                                              <p:pRg st="3" end="3"/>
-                                            </p:txEl>
-                                          </p:spTgt>
-                                        </p:tgtEl>
-                                        <p:attrNameLst>
-                                          <p:attrName>style.visibility</p:attrName>
-                                        </p:attrNameLst>
-                                      </p:cBhvr>
-                                      <p:to>
-                                        <p:strVal val="visible"/>
-                                      </p:to>
-                                    </p:set>
-                                  </p:childTnLst>
-                                </p:cTn>
-                              </p:par>
-                            </p:childTnLst>
-                          </p:cTn>
-                        </p:par>
-                      </p:childTnLst>
-                    </p:cTn>
-                  </p:par>
-                </p:childTnLst>
-              </p:cTn>
-              <p:prevCondLst>
-                <p:cond evt="onPrev" delay="0">
-                  <p:tgtEl>
-                    <p:sldTgt/>
-                  </p:tgtEl>
-                </p:cond>
-              </p:prevCondLst>
-              <p:nextCondLst>
-                <p:cond evt="onNext" delay="0">
-                  <p:tgtEl>
-                    <p:sldTgt/>
-                  </p:tgtEl>
-                </p:cond>
-              </p:nextCondLst>
-            </p:seq>
-          </p:childTnLst>
-        </p:cTn>
-      </p:par>
-    </p:tnLst>
-    <p:bldLst>
-      <p:bldP spid="3" grpId="0" build="p"/>
-    </p:bldLst>
-  </p:timing>
-</p:sld>
-</file>
-
-<file path=ppt/slides/slide19.xml><?xml version="1.0" encoding="utf-8"?>
-<p:sld xmlns:a="http://schemas.openxmlformats.org/drawingml/2006/main" xmlns:r="http://schemas.openxmlformats.org/officeDocument/2006/relationships" xmlns:p="http://schemas.openxmlformats.org/presentationml/2006/main">
-  <p:cSld>
-    <p:spTree>
-      <p:nvGrpSpPr>
-        <p:cNvPr id="1" name=""/>
-        <p:cNvGrpSpPr/>
-        <p:nvPr/>
-      </p:nvGrpSpPr>
-      <p:grpSpPr>
-        <a:xfrm>
-          <a:off x="0" y="0"/>
-          <a:ext cx="0" cy="0"/>
-          <a:chOff x="0" y="0"/>
-          <a:chExt cx="0" cy="0"/>
-        </a:xfrm>
-      </p:grpSpPr>
-      <p:sp>
-        <p:nvSpPr>
-          <p:cNvPr id="2" name="Title 1">
-            <a:extLst>
-              <a:ext uri="{FF2B5EF4-FFF2-40B4-BE49-F238E27FC236}">
                 <a16:creationId xmlns:a16="http://schemas.microsoft.com/office/drawing/2014/main" id="{7BE7C4D0-34F1-0A94-834E-05390C487B39}"/>
               </a:ext>
             </a:extLst>
@@ -16860,158 +14263,7 @@
 </p:sld>
 </file>
 
-<file path=ppt/slides/slide2.xml><?xml version="1.0" encoding="utf-8"?>
-<p:sld xmlns:a="http://schemas.openxmlformats.org/drawingml/2006/main" xmlns:r="http://schemas.openxmlformats.org/officeDocument/2006/relationships" xmlns:p="http://schemas.openxmlformats.org/presentationml/2006/main">
-  <p:cSld>
-    <p:spTree>
-      <p:nvGrpSpPr>
-        <p:cNvPr id="1" name=""/>
-        <p:cNvGrpSpPr/>
-        <p:nvPr/>
-      </p:nvGrpSpPr>
-      <p:grpSpPr>
-        <a:xfrm>
-          <a:off x="0" y="0"/>
-          <a:ext cx="0" cy="0"/>
-          <a:chOff x="0" y="0"/>
-          <a:chExt cx="0" cy="0"/>
-        </a:xfrm>
-      </p:grpSpPr>
-      <p:sp>
-        <p:nvSpPr>
-          <p:cNvPr id="2" name="Title 1">
-            <a:extLst>
-              <a:ext uri="{FF2B5EF4-FFF2-40B4-BE49-F238E27FC236}">
-                <a16:creationId xmlns:a16="http://schemas.microsoft.com/office/drawing/2014/main" id="{EDAE00F5-C7EE-2CC9-E9BA-CD7EB57AFC01}"/>
-              </a:ext>
-            </a:extLst>
-          </p:cNvPr>
-          <p:cNvSpPr>
-            <a:spLocks noGrp="1"/>
-          </p:cNvSpPr>
-          <p:nvPr>
-            <p:ph type="title"/>
-          </p:nvPr>
-        </p:nvSpPr>
-        <p:spPr/>
-        <p:txBody>
-          <a:bodyPr/>
-          <a:lstStyle/>
-          <a:p>
-            <a:r>
-              <a:rPr lang="es-ES_tradnl"/>
-              <a:t>En la clase de hoy</a:t>
-            </a:r>
-          </a:p>
-        </p:txBody>
-      </p:sp>
-      <p:sp>
-        <p:nvSpPr>
-          <p:cNvPr id="3" name="Content Placeholder 2">
-            <a:extLst>
-              <a:ext uri="{FF2B5EF4-FFF2-40B4-BE49-F238E27FC236}">
-                <a16:creationId xmlns:a16="http://schemas.microsoft.com/office/drawing/2014/main" id="{F3A8327E-74B0-5F1D-D3E8-C9714B43F83E}"/>
-              </a:ext>
-            </a:extLst>
-          </p:cNvPr>
-          <p:cNvSpPr>
-            <a:spLocks noGrp="1"/>
-          </p:cNvSpPr>
-          <p:nvPr>
-            <p:ph idx="1"/>
-          </p:nvPr>
-        </p:nvSpPr>
-        <p:spPr/>
-        <p:txBody>
-          <a:bodyPr>
-            <a:normAutofit/>
-          </a:bodyPr>
-          <a:lstStyle/>
-          <a:p>
-            <a:pPr marL="0" indent="0">
-              <a:lnSpc>
-                <a:spcPct val="150000"/>
-              </a:lnSpc>
-              <a:buNone/>
-            </a:pPr>
-            <a:r>
-              <a:rPr lang="es-ES_tradnl" dirty="0"/>
-              <a:t>0. Repaso y Preguntas</a:t>
-            </a:r>
-          </a:p>
-          <a:p>
-            <a:pPr marL="514350" indent="-514350">
-              <a:lnSpc>
-                <a:spcPct val="150000"/>
-              </a:lnSpc>
-              <a:buAutoNum type="arabicPeriod"/>
-            </a:pPr>
-            <a:r>
-              <a:rPr lang="es-ES_tradnl" dirty="0"/>
-              <a:t>Motivación: Clasificación </a:t>
-            </a:r>
-          </a:p>
-          <a:p>
-            <a:pPr marL="514350" indent="-514350">
-              <a:lnSpc>
-                <a:spcPct val="150000"/>
-              </a:lnSpc>
-              <a:buAutoNum type="arabicPeriod"/>
-            </a:pPr>
-            <a:r>
-              <a:rPr lang="es-ES_tradnl" dirty="0"/>
-              <a:t>Clasificador de Bayes </a:t>
-            </a:r>
-          </a:p>
-          <a:p>
-            <a:pPr marL="514350" indent="-514350">
-              <a:lnSpc>
-                <a:spcPct val="150000"/>
-              </a:lnSpc>
-              <a:buAutoNum type="arabicPeriod"/>
-            </a:pPr>
-            <a:r>
-              <a:rPr lang="es-ES_tradnl" dirty="0"/>
-              <a:t>Regresión logística -&gt; Aplicación</a:t>
-            </a:r>
-          </a:p>
-          <a:p>
-            <a:pPr marL="514350" indent="-514350">
-              <a:lnSpc>
-                <a:spcPct val="150000"/>
-              </a:lnSpc>
-              <a:buAutoNum type="arabicPeriod"/>
-            </a:pPr>
-            <a:r>
-              <a:rPr lang="es-ES_tradnl" dirty="0"/>
-              <a:t>Vecinos cercanos (KNN) -&gt; Aplicación</a:t>
-            </a:r>
-          </a:p>
-          <a:p>
-            <a:pPr marL="0" indent="0">
-              <a:lnSpc>
-                <a:spcPct val="150000"/>
-              </a:lnSpc>
-              <a:buNone/>
-            </a:pPr>
-            <a:endParaRPr lang="es-ES_tradnl" dirty="0"/>
-          </a:p>
-        </p:txBody>
-      </p:sp>
-    </p:spTree>
-    <p:extLst>
-      <p:ext uri="{BB962C8B-B14F-4D97-AF65-F5344CB8AC3E}">
-        <p14:creationId xmlns:p14="http://schemas.microsoft.com/office/powerpoint/2010/main" val="4169880411"/>
-      </p:ext>
-    </p:extLst>
-  </p:cSld>
-  <p:clrMapOvr>
-    <a:masterClrMapping/>
-  </p:clrMapOvr>
-</p:sld>
-</file>
-
-<file path=ppt/slides/slide20.xml><?xml version="1.0" encoding="utf-8"?>
+<file path=ppt/slides/slide15.xml><?xml version="1.0" encoding="utf-8"?>
 <p:sld xmlns:a="http://schemas.openxmlformats.org/drawingml/2006/main" xmlns:r="http://schemas.openxmlformats.org/officeDocument/2006/relationships" xmlns:p="http://schemas.openxmlformats.org/presentationml/2006/main">
   <p:cSld>
     <p:spTree>
@@ -17108,10 +14360,7 @@
                 </a:pPr>
                 <a14:m>
                   <m:oMathPara xmlns:m="http://schemas.openxmlformats.org/officeDocument/2006/math">
-                    <m:oMathParaPr>
-                      <m:jc m:val="centerGroup"/>
-                    </m:oMathParaPr>
-                    <m:oMath xmlns:m="http://schemas.openxmlformats.org/officeDocument/2006/math">
+                    <m:oMath>
                       <m:r>
                         <a:rPr lang="es-ES_tradnl" b="0" i="1" smtClean="0">
                           <a:latin typeface="Cambria Math" panose="02040503050406030204" pitchFamily="18" charset="0"/>
@@ -17229,10 +14478,7 @@
                 </a:pPr>
                 <a14:m>
                   <m:oMathPara xmlns:m="http://schemas.openxmlformats.org/officeDocument/2006/math">
-                    <m:oMathParaPr>
-                      <m:jc m:val="centerGroup"/>
-                    </m:oMathParaPr>
-                    <m:oMath xmlns:m="http://schemas.openxmlformats.org/officeDocument/2006/math">
+                    <m:oMath>
                       <m:r>
                         <a:rPr lang="es-ES_tradnl" b="0" i="1" smtClean="0">
                           <a:latin typeface="Cambria Math" panose="02040503050406030204" pitchFamily="18" charset="0"/>
@@ -17315,10 +14561,7 @@
                 </a:pPr>
                 <a14:m>
                   <m:oMathPara xmlns:m="http://schemas.openxmlformats.org/officeDocument/2006/math">
-                    <m:oMathParaPr>
-                      <m:jc m:val="centerGroup"/>
-                    </m:oMathParaPr>
-                    <m:oMath xmlns:m="http://schemas.openxmlformats.org/officeDocument/2006/math">
+                    <m:oMath>
                       <m:r>
                         <a:rPr lang="es-ES_tradnl" b="0" i="1" smtClean="0">
                           <a:latin typeface="Cambria Math" panose="02040503050406030204" pitchFamily="18" charset="0"/>
@@ -17628,7 +14871,7 @@
 </p:sld>
 </file>
 
-<file path=ppt/slides/slide21.xml><?xml version="1.0" encoding="utf-8"?>
+<file path=ppt/slides/slide16.xml><?xml version="1.0" encoding="utf-8"?>
 <p:sld xmlns:a="http://schemas.openxmlformats.org/drawingml/2006/main" xmlns:r="http://schemas.openxmlformats.org/officeDocument/2006/relationships" xmlns:p="http://schemas.openxmlformats.org/presentationml/2006/main">
   <p:cSld>
     <p:spTree>
@@ -17733,14 +14976,11 @@
                 </a:pPr>
                 <a14:m>
                   <m:oMathPara xmlns:m="http://schemas.openxmlformats.org/officeDocument/2006/math">
-                    <m:oMathParaPr>
-                      <m:jc m:val="centerGroup"/>
-                    </m:oMathParaPr>
-                    <m:oMath xmlns:m="http://schemas.openxmlformats.org/officeDocument/2006/math">
+                    <m:oMath>
                       <m:f>
                         <m:fPr>
                           <m:ctrlPr>
-                            <a:rPr lang="en-US" i="1" smtClean="0">
+                            <a:rPr lang="en-US" i="1">
                               <a:latin typeface="Cambria Math" panose="02040503050406030204" pitchFamily="18" charset="0"/>
                               <a:ea typeface="Cambria Math" panose="02040503050406030204" pitchFamily="18" charset="0"/>
                             </a:rPr>
@@ -17860,7 +15100,7 @@
                     <m:func>
                       <m:funcPr>
                         <m:ctrlPr>
-                          <a:rPr lang="en-US" i="1">
+                          <a:rPr lang="en-US">
                             <a:latin typeface="Cambria Math" panose="02040503050406030204" pitchFamily="18" charset="0"/>
                             <a:ea typeface="Cambria Math" panose="02040503050406030204" pitchFamily="18" charset="0"/>
                           </a:rPr>
@@ -17960,7 +15200,7 @@
                     <m:func>
                       <m:funcPr>
                         <m:ctrlPr>
-                          <a:rPr lang="en-US" i="1">
+                          <a:rPr lang="en-US">
                             <a:latin typeface="Cambria Math" panose="02040503050406030204" pitchFamily="18" charset="0"/>
                             <a:ea typeface="Cambria Math" panose="02040503050406030204" pitchFamily="18" charset="0"/>
                           </a:rPr>
@@ -18101,7 +15341,7 @@
           <a:p>
             <a:fld id="{278C1CC4-2077-434E-BCF1-5D01C08A9B17}" type="slidenum">
               <a:rPr lang="en-US" smtClean="0"/>
-              <a:t>21</a:t>
+              <a:t>16</a:t>
             </a:fld>
             <a:endParaRPr lang="en-US"/>
           </a:p>
@@ -18292,7 +15532,7 @@
 </p:sld>
 </file>
 
-<file path=ppt/slides/slide22.xml><?xml version="1.0" encoding="utf-8"?>
+<file path=ppt/slides/slide17.xml><?xml version="1.0" encoding="utf-8"?>
 <p:sld xmlns:a="http://schemas.openxmlformats.org/drawingml/2006/main" xmlns:r="http://schemas.openxmlformats.org/officeDocument/2006/relationships" xmlns:p="http://schemas.openxmlformats.org/presentationml/2006/main">
   <p:cSld>
     <p:spTree>
@@ -18434,14 +15674,11 @@
                 </a:pPr>
                 <a14:m>
                   <m:oMathPara xmlns:m="http://schemas.openxmlformats.org/officeDocument/2006/math">
-                    <m:oMathParaPr>
-                      <m:jc m:val="centerGroup"/>
-                    </m:oMathParaPr>
-                    <m:oMath xmlns:m="http://schemas.openxmlformats.org/officeDocument/2006/math">
+                    <m:oMath>
                       <m:func>
                         <m:funcPr>
                           <m:ctrlPr>
-                            <a:rPr lang="en-US" b="0" i="1" smtClean="0">
+                            <a:rPr lang="en-US" b="0" i="0" smtClean="0">
                               <a:latin typeface="Cambria Math" panose="02040503050406030204" pitchFamily="18" charset="0"/>
                               <a:ea typeface="Cambria Math" panose="02040503050406030204" pitchFamily="18" charset="0"/>
                             </a:rPr>
@@ -18627,7 +15864,7 @@
                         <m:func>
                           <m:funcPr>
                             <m:ctrlPr>
-                              <a:rPr lang="en-US" i="1">
+                              <a:rPr lang="en-US">
                                 <a:latin typeface="Cambria Math" panose="02040503050406030204" pitchFamily="18" charset="0"/>
                                 <a:ea typeface="Cambria Math" panose="02040503050406030204" pitchFamily="18" charset="0"/>
                               </a:rPr>
@@ -18763,7 +16000,7 @@
                     <m:func>
                       <m:funcPr>
                         <m:ctrlPr>
-                          <a:rPr lang="en-US" i="1" smtClean="0">
+                          <a:rPr lang="en-US">
                             <a:latin typeface="Cambria Math" panose="02040503050406030204" pitchFamily="18" charset="0"/>
                             <a:ea typeface="Cambria Math" panose="02040503050406030204" pitchFamily="18" charset="0"/>
                           </a:rPr>
@@ -18965,7 +16202,7 @@
           <a:p>
             <a:fld id="{278C1CC4-2077-434E-BCF1-5D01C08A9B17}" type="slidenum">
               <a:rPr lang="en-US" smtClean="0"/>
-              <a:t>22</a:t>
+              <a:t>17</a:t>
             </a:fld>
             <a:endParaRPr lang="en-US"/>
           </a:p>
@@ -19241,7 +16478,7 @@
 </p:sld>
 </file>
 
-<file path=ppt/slides/slide23.xml><?xml version="1.0" encoding="utf-8"?>
+<file path=ppt/slides/slide18.xml><?xml version="1.0" encoding="utf-8"?>
 <p:sld xmlns:a="http://schemas.openxmlformats.org/drawingml/2006/main" xmlns:r="http://schemas.openxmlformats.org/officeDocument/2006/relationships" xmlns:p="http://schemas.openxmlformats.org/presentationml/2006/main">
   <p:cSld>
     <p:spTree>
@@ -19638,7 +16875,7 @@
 </p:sld>
 </file>
 
-<file path=ppt/slides/slide24.xml><?xml version="1.0" encoding="utf-8"?>
+<file path=ppt/slides/slide19.xml><?xml version="1.0" encoding="utf-8"?>
 <p:sld xmlns:a="http://schemas.openxmlformats.org/drawingml/2006/main" xmlns:r="http://schemas.openxmlformats.org/officeDocument/2006/relationships" xmlns:p="http://schemas.openxmlformats.org/presentationml/2006/main">
   <p:cSld>
     <p:spTree>
@@ -19731,10 +16968,7 @@
                 </a:pPr>
                 <a14:m>
                   <m:oMathPara xmlns:m="http://schemas.openxmlformats.org/officeDocument/2006/math">
-                    <m:oMathParaPr>
-                      <m:jc m:val="centerGroup"/>
-                    </m:oMathParaPr>
-                    <m:oMath xmlns:m="http://schemas.openxmlformats.org/officeDocument/2006/math">
+                    <m:oMath>
                       <m:func>
                         <m:funcPr>
                           <m:ctrlPr>
@@ -19939,7 +17173,7 @@
                     <m:sSub>
                       <m:sSubPr>
                         <m:ctrlPr>
-                          <a:rPr lang="en-US" b="0" i="1" smtClean="0">
+                          <a:rPr lang="es-ES_tradnl" b="0" i="1" smtClean="0">
                             <a:latin typeface="Cambria Math" panose="02040503050406030204" pitchFamily="18" charset="0"/>
                             <a:ea typeface="Cambria Math" panose="02040503050406030204" pitchFamily="18" charset="0"/>
                           </a:rPr>
@@ -20039,10 +17273,7 @@
                 </a:pPr>
                 <a14:m>
                   <m:oMathPara xmlns:m="http://schemas.openxmlformats.org/officeDocument/2006/math">
-                    <m:oMathParaPr>
-                      <m:jc m:val="centerGroup"/>
-                    </m:oMathParaPr>
-                    <m:oMath xmlns:m="http://schemas.openxmlformats.org/officeDocument/2006/math">
+                    <m:oMath>
                       <m:func>
                         <m:funcPr>
                           <m:ctrlPr>
@@ -20547,7 +17778,157 @@
 </p:sld>
 </file>
 
-<file path=ppt/slides/slide25.xml><?xml version="1.0" encoding="utf-8"?>
+<file path=ppt/slides/slide2.xml><?xml version="1.0" encoding="utf-8"?>
+<p:sld xmlns:a="http://schemas.openxmlformats.org/drawingml/2006/main" xmlns:r="http://schemas.openxmlformats.org/officeDocument/2006/relationships" xmlns:p="http://schemas.openxmlformats.org/presentationml/2006/main">
+  <p:cSld>
+    <p:spTree>
+      <p:nvGrpSpPr>
+        <p:cNvPr id="1" name=""/>
+        <p:cNvGrpSpPr/>
+        <p:nvPr/>
+      </p:nvGrpSpPr>
+      <p:grpSpPr>
+        <a:xfrm>
+          <a:off x="0" y="0"/>
+          <a:ext cx="0" cy="0"/>
+          <a:chOff x="0" y="0"/>
+          <a:chExt cx="0" cy="0"/>
+        </a:xfrm>
+      </p:grpSpPr>
+      <p:sp>
+        <p:nvSpPr>
+          <p:cNvPr id="2" name="Title 1">
+            <a:extLst>
+              <a:ext uri="{FF2B5EF4-FFF2-40B4-BE49-F238E27FC236}">
+                <a16:creationId xmlns:a16="http://schemas.microsoft.com/office/drawing/2014/main" id="{EDAE00F5-C7EE-2CC9-E9BA-CD7EB57AFC01}"/>
+              </a:ext>
+            </a:extLst>
+          </p:cNvPr>
+          <p:cNvSpPr>
+            <a:spLocks noGrp="1"/>
+          </p:cNvSpPr>
+          <p:nvPr>
+            <p:ph type="title"/>
+          </p:nvPr>
+        </p:nvSpPr>
+        <p:spPr/>
+        <p:txBody>
+          <a:bodyPr/>
+          <a:lstStyle/>
+          <a:p>
+            <a:r>
+              <a:rPr lang="es-ES_tradnl"/>
+              <a:t>En la clase de hoy</a:t>
+            </a:r>
+          </a:p>
+        </p:txBody>
+      </p:sp>
+      <p:sp>
+        <p:nvSpPr>
+          <p:cNvPr id="3" name="Content Placeholder 2">
+            <a:extLst>
+              <a:ext uri="{FF2B5EF4-FFF2-40B4-BE49-F238E27FC236}">
+                <a16:creationId xmlns:a16="http://schemas.microsoft.com/office/drawing/2014/main" id="{F3A8327E-74B0-5F1D-D3E8-C9714B43F83E}"/>
+              </a:ext>
+            </a:extLst>
+          </p:cNvPr>
+          <p:cNvSpPr>
+            <a:spLocks noGrp="1"/>
+          </p:cNvSpPr>
+          <p:nvPr>
+            <p:ph idx="1"/>
+          </p:nvPr>
+        </p:nvSpPr>
+        <p:spPr/>
+        <p:txBody>
+          <a:bodyPr>
+            <a:normAutofit/>
+          </a:bodyPr>
+          <a:lstStyle/>
+          <a:p>
+            <a:pPr marL="0" indent="0">
+              <a:lnSpc>
+                <a:spcPct val="150000"/>
+              </a:lnSpc>
+              <a:buNone/>
+            </a:pPr>
+            <a:r>
+              <a:rPr lang="es-ES_tradnl" dirty="0"/>
+              <a:t>0. Repaso y Preguntas</a:t>
+            </a:r>
+          </a:p>
+          <a:p>
+            <a:pPr marL="514350" indent="-514350">
+              <a:lnSpc>
+                <a:spcPct val="150000"/>
+              </a:lnSpc>
+              <a:buAutoNum type="arabicPeriod"/>
+            </a:pPr>
+            <a:r>
+              <a:rPr lang="es-ES_tradnl" dirty="0"/>
+              <a:t>Motivación: Problema de Clasificación </a:t>
+            </a:r>
+          </a:p>
+          <a:p>
+            <a:pPr lvl="1">
+              <a:lnSpc>
+                <a:spcPct val="150000"/>
+              </a:lnSpc>
+            </a:pPr>
+            <a:r>
+              <a:rPr lang="es-ES_tradnl" dirty="0"/>
+              <a:t>Intuición del Clasificador de Bayes </a:t>
+            </a:r>
+          </a:p>
+          <a:p>
+            <a:pPr marL="514350" indent="-514350">
+              <a:lnSpc>
+                <a:spcPct val="150000"/>
+              </a:lnSpc>
+              <a:buAutoNum type="arabicPeriod"/>
+            </a:pPr>
+            <a:r>
+              <a:rPr lang="es-ES_tradnl" dirty="0"/>
+              <a:t>Regresión logística -&gt; Aplicación</a:t>
+            </a:r>
+          </a:p>
+          <a:p>
+            <a:pPr marL="514350" indent="-514350">
+              <a:lnSpc>
+                <a:spcPct val="150000"/>
+              </a:lnSpc>
+              <a:buAutoNum type="arabicPeriod"/>
+            </a:pPr>
+            <a:r>
+              <a:rPr lang="es-ES_tradnl" dirty="0"/>
+              <a:t>Vecinos cercanos (KNN) -&gt; Aplicación</a:t>
+            </a:r>
+          </a:p>
+          <a:p>
+            <a:pPr marL="0" indent="0">
+              <a:lnSpc>
+                <a:spcPct val="150000"/>
+              </a:lnSpc>
+              <a:buNone/>
+            </a:pPr>
+            <a:endParaRPr lang="es-ES_tradnl" dirty="0"/>
+          </a:p>
+        </p:txBody>
+      </p:sp>
+    </p:spTree>
+    <p:extLst>
+      <p:ext uri="{BB962C8B-B14F-4D97-AF65-F5344CB8AC3E}">
+        <p14:creationId xmlns:p14="http://schemas.microsoft.com/office/powerpoint/2010/main" val="4169880411"/>
+      </p:ext>
+    </p:extLst>
+  </p:cSld>
+  <p:clrMapOvr>
+    <a:masterClrMapping/>
+  </p:clrMapOvr>
+</p:sld>
+</file>
+
+<file path=ppt/slides/slide20.xml><?xml version="1.0" encoding="utf-8"?>
 <p:sld xmlns:a="http://schemas.openxmlformats.org/drawingml/2006/main" xmlns:r="http://schemas.openxmlformats.org/officeDocument/2006/relationships" xmlns:p="http://schemas.openxmlformats.org/presentationml/2006/main">
   <p:cSld>
     <p:spTree>
@@ -20648,10 +18029,7 @@
                 </a:pPr>
                 <a14:m>
                   <m:oMathPara xmlns:m="http://schemas.openxmlformats.org/officeDocument/2006/math">
-                    <m:oMathParaPr>
-                      <m:jc m:val="centerGroup"/>
-                    </m:oMathParaPr>
-                    <m:oMath xmlns:m="http://schemas.openxmlformats.org/officeDocument/2006/math">
+                    <m:oMath>
                       <m:r>
                         <a:rPr lang="es-ES_tradnl" b="0" i="1" smtClean="0">
                           <a:latin typeface="Cambria Math" panose="02040503050406030204" pitchFamily="18" charset="0"/>
@@ -20831,7 +18209,7 @@
                     <m:sSub>
                       <m:sSubPr>
                         <m:ctrlPr>
-                          <a:rPr lang="es-ES_tradnl" i="1" smtClean="0">
+                          <a:rPr lang="es-ES_tradnl" b="0" i="1" smtClean="0">
                             <a:latin typeface="Cambria Math" panose="02040503050406030204" pitchFamily="18" charset="0"/>
                             <a:ea typeface="Cambria Math" panose="02040503050406030204" pitchFamily="18" charset="0"/>
                           </a:rPr>
@@ -20942,10 +18320,7 @@
                 </a:pPr>
                 <a14:m>
                   <m:oMathPara xmlns:m="http://schemas.openxmlformats.org/officeDocument/2006/math">
-                    <m:oMathParaPr>
-                      <m:jc m:val="centerGroup"/>
-                    </m:oMathParaPr>
-                    <m:oMath xmlns:m="http://schemas.openxmlformats.org/officeDocument/2006/math">
+                    <m:oMath>
                       <m:r>
                         <a:rPr lang="es-ES_tradnl" b="0" i="1" smtClean="0">
                           <a:latin typeface="Cambria Math" panose="02040503050406030204" pitchFamily="18" charset="0"/>
@@ -21003,7 +18378,7 @@
                       <m:d>
                         <m:dPr>
                           <m:ctrlPr>
-                            <a:rPr lang="es-ES_tradnl" i="1" smtClean="0">
+                            <a:rPr lang="es-ES_tradnl" b="1" i="1" smtClean="0">
                               <a:latin typeface="Cambria Math" panose="02040503050406030204" pitchFamily="18" charset="0"/>
                               <a:ea typeface="Cambria Math" panose="02040503050406030204" pitchFamily="18" charset="0"/>
                             </a:rPr>
@@ -21094,10 +18469,7 @@
                 </a:pPr>
                 <a14:m>
                   <m:oMathPara xmlns:m="http://schemas.openxmlformats.org/officeDocument/2006/math">
-                    <m:oMathParaPr>
-                      <m:jc m:val="centerGroup"/>
-                    </m:oMathParaPr>
-                    <m:oMath xmlns:m="http://schemas.openxmlformats.org/officeDocument/2006/math">
+                    <m:oMath>
                       <m:r>
                         <a:rPr lang="es-ES_tradnl" b="0" i="1" smtClean="0">
                           <a:latin typeface="Cambria Math" panose="02040503050406030204" pitchFamily="18" charset="0"/>
@@ -21687,7 +19059,7 @@
 </p:sld>
 </file>
 
-<file path=ppt/slides/slide26.xml><?xml version="1.0" encoding="utf-8"?>
+<file path=ppt/slides/slide21.xml><?xml version="1.0" encoding="utf-8"?>
 <p:sld xmlns:a="http://schemas.openxmlformats.org/drawingml/2006/main" xmlns:r="http://schemas.openxmlformats.org/officeDocument/2006/relationships" xmlns:p="http://schemas.openxmlformats.org/presentationml/2006/main">
   <p:cSld>
     <p:spTree>
@@ -21768,15 +19140,12 @@
                 </a:pPr>
                 <a14:m>
                   <m:oMathPara xmlns:m="http://schemas.openxmlformats.org/officeDocument/2006/math">
-                    <m:oMathParaPr>
-                      <m:jc m:val="centerGroup"/>
-                    </m:oMathParaPr>
-                    <m:oMath xmlns:m="http://schemas.openxmlformats.org/officeDocument/2006/math">
+                    <m:oMath>
                       <m:acc>
                         <m:accPr>
                           <m:chr m:val="̂"/>
                           <m:ctrlPr>
-                            <a:rPr lang="es-ES_tradnl" b="0" i="1" smtClean="0">
+                            <a:rPr lang="es-ES_tradnl" i="1">
                               <a:latin typeface="Cambria Math" panose="02040503050406030204" pitchFamily="18" charset="0"/>
                               <a:ea typeface="Cambria Math" panose="02040503050406030204" pitchFamily="18" charset="0"/>
                             </a:rPr>
@@ -21812,7 +19181,7 @@
                           <m:limLow>
                             <m:limLowPr>
                               <m:ctrlPr>
-                                <a:rPr lang="en-US" b="0" i="1" smtClean="0">
+                                <a:rPr lang="en-US" b="0" i="0" smtClean="0">
                                   <a:latin typeface="Cambria Math" panose="02040503050406030204" pitchFamily="18" charset="0"/>
                                   <a:ea typeface="Cambria Math" panose="02040503050406030204" pitchFamily="18" charset="0"/>
                                 </a:rPr>
@@ -21973,7 +19342,7 @@
                       <m:accPr>
                         <m:chr m:val="̂"/>
                         <m:ctrlPr>
-                          <a:rPr lang="es-ES_tradnl" b="0" i="1" smtClean="0">
+                          <a:rPr lang="es-ES_tradnl" i="1">
                             <a:solidFill>
                               <a:srgbClr val="002060"/>
                             </a:solidFill>
@@ -22072,7 +19441,7 @@
 </p:sld>
 </file>
 
-<file path=ppt/slides/slide27.xml><?xml version="1.0" encoding="utf-8"?>
+<file path=ppt/slides/slide22.xml><?xml version="1.0" encoding="utf-8"?>
 <p:sld xmlns:a="http://schemas.openxmlformats.org/drawingml/2006/main" xmlns:r="http://schemas.openxmlformats.org/officeDocument/2006/relationships" xmlns:p="http://schemas.openxmlformats.org/presentationml/2006/main">
   <p:cSld>
     <p:spTree>
@@ -22166,7 +19535,7 @@
                     <m:sSub>
                       <m:sSubPr>
                         <m:ctrlPr>
-                          <a:rPr lang="en-US" b="0" i="1" smtClean="0">
+                          <a:rPr lang="es-ES_tradnl" b="0" i="1" smtClean="0">
                             <a:latin typeface="Cambria Math" panose="02040503050406030204" pitchFamily="18" charset="0"/>
                             <a:ea typeface="Cambria Math" panose="02040503050406030204" pitchFamily="18" charset="0"/>
                           </a:rPr>
@@ -22382,7 +19751,7 @@
                             <m:sSub>
                               <m:sSubPr>
                                 <m:ctrlPr>
-                                  <a:rPr lang="en-US" b="0" i="1" smtClean="0">
+                                  <a:rPr lang="en-US" i="1">
                                     <a:latin typeface="Cambria Math" panose="02040503050406030204" pitchFamily="18" charset="0"/>
                                     <a:ea typeface="Cambria Math" panose="02040503050406030204" pitchFamily="18" charset="0"/>
                                   </a:rPr>
@@ -22515,10 +19884,7 @@
                 </a:pPr>
                 <a14:m>
                   <m:oMathPara xmlns:m="http://schemas.openxmlformats.org/officeDocument/2006/math">
-                    <m:oMathParaPr>
-                      <m:jc m:val="centerGroup"/>
-                    </m:oMathParaPr>
-                    <m:oMath xmlns:m="http://schemas.openxmlformats.org/officeDocument/2006/math">
+                    <m:oMath>
                       <m:r>
                         <a:rPr lang="es-ES_tradnl" b="0" i="1" smtClean="0">
                           <a:latin typeface="Cambria Math" panose="02040503050406030204" pitchFamily="18" charset="0"/>
@@ -22529,7 +19895,7 @@
                       <m:d>
                         <m:dPr>
                           <m:ctrlPr>
-                            <a:rPr lang="es-ES_tradnl" b="0" i="1" smtClean="0">
+                            <a:rPr lang="en-US" b="0" i="1" smtClean="0">
                               <a:latin typeface="Cambria Math" panose="02040503050406030204" pitchFamily="18" charset="0"/>
                               <a:ea typeface="Cambria Math" panose="02040503050406030204" pitchFamily="18" charset="0"/>
                             </a:rPr>
@@ -22571,7 +19937,7 @@
                           <m:chr m:val="∏"/>
                           <m:supHide m:val="on"/>
                           <m:ctrlPr>
-                            <a:rPr lang="es-ES_tradnl" b="0" i="1" smtClean="0">
+                            <a:rPr lang="en-US" b="0" i="1" smtClean="0">
                               <a:latin typeface="Cambria Math" panose="02040503050406030204" pitchFamily="18" charset="0"/>
                               <a:ea typeface="Cambria Math" panose="02040503050406030204" pitchFamily="18" charset="0"/>
                             </a:rPr>
@@ -22667,7 +20033,7 @@
                           <m:chr m:val="∏"/>
                           <m:supHide m:val="on"/>
                           <m:ctrlPr>
-                            <a:rPr lang="es-ES_tradnl" i="1">
+                            <a:rPr lang="en-US" i="1">
                               <a:latin typeface="Cambria Math" panose="02040503050406030204" pitchFamily="18" charset="0"/>
                               <a:ea typeface="Cambria Math" panose="02040503050406030204" pitchFamily="18" charset="0"/>
                             </a:rPr>
@@ -22856,7 +20222,7 @@
 </p:sld>
 </file>
 
-<file path=ppt/slides/slide28.xml><?xml version="1.0" encoding="utf-8"?>
+<file path=ppt/slides/slide23.xml><?xml version="1.0" encoding="utf-8"?>
 <p:sld xmlns:a="http://schemas.openxmlformats.org/drawingml/2006/main" xmlns:r="http://schemas.openxmlformats.org/officeDocument/2006/relationships" xmlns:p="http://schemas.openxmlformats.org/presentationml/2006/main">
   <p:cSld>
     <p:spTree>
@@ -23057,10 +20423,7 @@
                 </a:pPr>
                 <a14:m>
                   <m:oMathPara xmlns:m="http://schemas.openxmlformats.org/officeDocument/2006/math">
-                    <m:oMathParaPr>
-                      <m:jc m:val="centerGroup"/>
-                    </m:oMathParaPr>
-                    <m:oMath xmlns:m="http://schemas.openxmlformats.org/officeDocument/2006/math">
+                    <m:oMath>
                       <m:sSub>
                         <m:sSubPr>
                           <m:ctrlPr>
@@ -23251,7 +20614,7 @@
                       <m:accPr>
                         <m:chr m:val="̂"/>
                         <m:ctrlPr>
-                          <a:rPr lang="en-US" i="1" smtClean="0">
+                          <a:rPr lang="en-US" i="1">
                             <a:latin typeface="Cambria Math" panose="02040503050406030204" pitchFamily="18" charset="0"/>
                             <a:ea typeface="Cambria Math" panose="02040503050406030204" pitchFamily="18" charset="0"/>
                           </a:rPr>
@@ -23286,10 +20649,7 @@
                 </a:pPr>
                 <a14:m>
                   <m:oMathPara xmlns:m="http://schemas.openxmlformats.org/officeDocument/2006/math">
-                    <m:oMathParaPr>
-                      <m:jc m:val="centerGroup"/>
-                    </m:oMathParaPr>
-                    <m:oMath xmlns:m="http://schemas.openxmlformats.org/officeDocument/2006/math">
+                    <m:oMath>
                       <m:sSub>
                         <m:sSubPr>
                           <m:ctrlPr>
@@ -23561,10 +20921,7 @@
                 </a:pPr>
                 <a14:m>
                   <m:oMathPara xmlns:m="http://schemas.openxmlformats.org/officeDocument/2006/math">
-                    <m:oMathParaPr>
-                      <m:jc m:val="centerGroup"/>
-                    </m:oMathParaPr>
-                    <m:oMath xmlns:m="http://schemas.openxmlformats.org/officeDocument/2006/math">
+                    <m:oMath>
                       <m:acc>
                         <m:accPr>
                           <m:chr m:val="̂"/>
@@ -23618,7 +20975,7 @@
                           <m:begChr m:val="["/>
                           <m:endChr m:val="]"/>
                           <m:ctrlPr>
-                            <a:rPr lang="en-US" b="0" i="1" smtClean="0">
+                            <a:rPr lang="en-US" i="1">
                               <a:latin typeface="Cambria Math" panose="02040503050406030204" pitchFamily="18" charset="0"/>
                               <a:ea typeface="Cambria Math" panose="02040503050406030204" pitchFamily="18" charset="0"/>
                             </a:rPr>
@@ -23745,7 +21102,7 @@
 </p:sld>
 </file>
 
-<file path=ppt/slides/slide29.xml><?xml version="1.0" encoding="utf-8"?>
+<file path=ppt/slides/slide24.xml><?xml version="1.0" encoding="utf-8"?>
 <p:sld xmlns:a="http://schemas.openxmlformats.org/drawingml/2006/main" xmlns:r="http://schemas.openxmlformats.org/officeDocument/2006/relationships" xmlns:p="http://schemas.openxmlformats.org/presentationml/2006/main">
   <p:cSld>
     <p:spTree>
@@ -23972,139 +21329,7 @@
 </p:sld>
 </file>
 
-<file path=ppt/slides/slide3.xml><?xml version="1.0" encoding="utf-8"?>
-<p:sld xmlns:a="http://schemas.openxmlformats.org/drawingml/2006/main" xmlns:r="http://schemas.openxmlformats.org/officeDocument/2006/relationships" xmlns:p="http://schemas.openxmlformats.org/presentationml/2006/main">
-  <p:cSld>
-    <p:spTree>
-      <p:nvGrpSpPr>
-        <p:cNvPr id="1" name=""/>
-        <p:cNvGrpSpPr/>
-        <p:nvPr/>
-      </p:nvGrpSpPr>
-      <p:grpSpPr>
-        <a:xfrm>
-          <a:off x="0" y="0"/>
-          <a:ext cx="0" cy="0"/>
-          <a:chOff x="0" y="0"/>
-          <a:chExt cx="0" cy="0"/>
-        </a:xfrm>
-      </p:grpSpPr>
-      <p:sp>
-        <p:nvSpPr>
-          <p:cNvPr id="2" name="Title 1">
-            <a:extLst>
-              <a:ext uri="{FF2B5EF4-FFF2-40B4-BE49-F238E27FC236}">
-                <a16:creationId xmlns:a16="http://schemas.microsoft.com/office/drawing/2014/main" id="{0A98CDA9-EC41-2312-3939-2A1FFC5B4920}"/>
-              </a:ext>
-            </a:extLst>
-          </p:cNvPr>
-          <p:cNvSpPr>
-            <a:spLocks noGrp="1"/>
-          </p:cNvSpPr>
-          <p:nvPr>
-            <p:ph type="title"/>
-          </p:nvPr>
-        </p:nvSpPr>
-        <p:spPr/>
-        <p:txBody>
-          <a:bodyPr/>
-          <a:lstStyle/>
-          <a:p>
-            <a:r>
-              <a:rPr lang="es-ES_tradnl" dirty="0"/>
-              <a:t>Orden de Temas: </a:t>
-            </a:r>
-            <a:r>
-              <a:rPr lang="es-ES_tradnl" sz="3600" i="1" dirty="0">
-                <a:solidFill>
-                  <a:schemeClr val="tx1">
-                    <a:lumMod val="50000"/>
-                    <a:lumOff val="50000"/>
-                  </a:schemeClr>
-                </a:solidFill>
-              </a:rPr>
-              <a:t>Secuencia de Trabajo con Datos</a:t>
-            </a:r>
-            <a:endParaRPr lang="es-ES_tradnl" i="1" dirty="0">
-              <a:solidFill>
-                <a:schemeClr val="tx1">
-                  <a:lumMod val="50000"/>
-                  <a:lumOff val="50000"/>
-                </a:schemeClr>
-              </a:solidFill>
-            </a:endParaRPr>
-          </a:p>
-        </p:txBody>
-      </p:sp>
-      <p:graphicFrame>
-        <p:nvGraphicFramePr>
-          <p:cNvPr id="4" name="Content Placeholder 3">
-            <a:extLst>
-              <a:ext uri="{FF2B5EF4-FFF2-40B4-BE49-F238E27FC236}">
-                <a16:creationId xmlns:a16="http://schemas.microsoft.com/office/drawing/2014/main" id="{51ABD0DE-D47B-BE72-9389-1B9C88CB6F1B}"/>
-              </a:ext>
-            </a:extLst>
-          </p:cNvPr>
-          <p:cNvGraphicFramePr>
-            <a:graphicFrameLocks noGrp="1"/>
-          </p:cNvGraphicFramePr>
-          <p:nvPr>
-            <p:ph idx="1"/>
-          </p:nvPr>
-        </p:nvGraphicFramePr>
-        <p:xfrm>
-          <a:off x="449451" y="1100380"/>
-          <a:ext cx="11236271" cy="5548393"/>
-        </p:xfrm>
-        <a:graphic>
-          <a:graphicData uri="http://schemas.openxmlformats.org/drawingml/2006/diagram">
-            <dgm:relIds xmlns:dgm="http://schemas.openxmlformats.org/drawingml/2006/diagram" xmlns:r="http://schemas.openxmlformats.org/officeDocument/2006/relationships" r:dm="rId3" r:lo="rId4" r:qs="rId5" r:cs="rId6"/>
-          </a:graphicData>
-        </a:graphic>
-      </p:graphicFrame>
-      <p:sp>
-        <p:nvSpPr>
-          <p:cNvPr id="3" name="Slide Number Placeholder 2">
-            <a:extLst>
-              <a:ext uri="{FF2B5EF4-FFF2-40B4-BE49-F238E27FC236}">
-                <a16:creationId xmlns:a16="http://schemas.microsoft.com/office/drawing/2014/main" id="{FE42FF7C-6F94-55CC-F31A-3FC6C600EAFA}"/>
-              </a:ext>
-            </a:extLst>
-          </p:cNvPr>
-          <p:cNvSpPr>
-            <a:spLocks noGrp="1"/>
-          </p:cNvSpPr>
-          <p:nvPr>
-            <p:ph type="sldNum" sz="quarter" idx="12"/>
-          </p:nvPr>
-        </p:nvSpPr>
-        <p:spPr/>
-        <p:txBody>
-          <a:bodyPr/>
-          <a:lstStyle/>
-          <a:p>
-            <a:fld id="{278C1CC4-2077-434E-BCF1-5D01C08A9B17}" type="slidenum">
-              <a:rPr lang="en-US" smtClean="0"/>
-              <a:t>3</a:t>
-            </a:fld>
-            <a:endParaRPr lang="en-US"/>
-          </a:p>
-        </p:txBody>
-      </p:sp>
-    </p:spTree>
-    <p:extLst>
-      <p:ext uri="{BB962C8B-B14F-4D97-AF65-F5344CB8AC3E}">
-        <p14:creationId xmlns:p14="http://schemas.microsoft.com/office/powerpoint/2010/main" val="1565052807"/>
-      </p:ext>
-    </p:extLst>
-  </p:cSld>
-  <p:clrMapOvr>
-    <a:masterClrMapping/>
-  </p:clrMapOvr>
-</p:sld>
-</file>
-
-<file path=ppt/slides/slide30.xml><?xml version="1.0" encoding="utf-8"?>
+<file path=ppt/slides/slide25.xml><?xml version="1.0" encoding="utf-8"?>
 <p:sld xmlns:a="http://schemas.openxmlformats.org/drawingml/2006/main" xmlns:r="http://schemas.openxmlformats.org/officeDocument/2006/relationships" xmlns:p="http://schemas.openxmlformats.org/presentationml/2006/main">
   <p:cSld>
     <p:spTree>
@@ -24144,7 +21369,7 @@
           <a:p>
             <a:r>
               <a:rPr lang="es-ES_tradnl" dirty="0"/>
-              <a:t>Ejemplo: Estimación tradicional de pobreza</a:t>
+              <a:t>Visualización de efectos marginales</a:t>
             </a:r>
           </a:p>
         </p:txBody>
@@ -24220,7 +21445,7 @@
                     <m:oMathParaPr>
                       <m:jc m:val="center"/>
                     </m:oMathParaPr>
-                    <m:oMath xmlns:m="http://schemas.openxmlformats.org/officeDocument/2006/math">
+                    <m:oMath>
                       <m:r>
                         <a:rPr lang="en-US" sz="2800" b="0" i="1" smtClean="0">
                           <a:latin typeface="Cambria Math" panose="02040503050406030204" pitchFamily="18" charset="0"/>
@@ -24681,20 +21906,501 @@
           </a:p>
         </p:txBody>
       </p:sp>
+      <p:sp>
+        <p:nvSpPr>
+          <p:cNvPr id="3" name="Forma libre 2">
+            <a:extLst>
+              <a:ext uri="{FF2B5EF4-FFF2-40B4-BE49-F238E27FC236}">
+                <a16:creationId xmlns:a16="http://schemas.microsoft.com/office/drawing/2014/main" id="{3BB7D988-CE92-2B9F-015C-580A0C43C51A}"/>
+              </a:ext>
+            </a:extLst>
+          </p:cNvPr>
+          <p:cNvSpPr/>
+          <p:nvPr/>
+        </p:nvSpPr>
+        <p:spPr>
+          <a:xfrm>
+            <a:off x="7666072" y="2966484"/>
+            <a:ext cx="3466215" cy="1898041"/>
+          </a:xfrm>
+          <a:custGeom>
+            <a:avLst/>
+            <a:gdLst>
+              <a:gd name="connsiteX0" fmla="*/ 0 w 3540642"/>
+              <a:gd name="connsiteY0" fmla="*/ 0 h 1971581"/>
+              <a:gd name="connsiteX1" fmla="*/ 1254642 w 3540642"/>
+              <a:gd name="connsiteY1" fmla="*/ 1818168 h 1971581"/>
+              <a:gd name="connsiteX2" fmla="*/ 3540642 w 3540642"/>
+              <a:gd name="connsiteY2" fmla="*/ 1871330 h 1971581"/>
+            </a:gdLst>
+            <a:ahLst/>
+            <a:cxnLst>
+              <a:cxn ang="0">
+                <a:pos x="connsiteX0" y="connsiteY0"/>
+              </a:cxn>
+              <a:cxn ang="0">
+                <a:pos x="connsiteX1" y="connsiteY1"/>
+              </a:cxn>
+              <a:cxn ang="0">
+                <a:pos x="connsiteX2" y="connsiteY2"/>
+              </a:cxn>
+            </a:cxnLst>
+            <a:rect l="l" t="t" r="r" b="b"/>
+            <a:pathLst>
+              <a:path w="3540642" h="1971581">
+                <a:moveTo>
+                  <a:pt x="0" y="0"/>
+                </a:moveTo>
+                <a:cubicBezTo>
+                  <a:pt x="332267" y="753140"/>
+                  <a:pt x="664535" y="1506280"/>
+                  <a:pt x="1254642" y="1818168"/>
+                </a:cubicBezTo>
+                <a:cubicBezTo>
+                  <a:pt x="1844749" y="2130056"/>
+                  <a:pt x="3152554" y="1869558"/>
+                  <a:pt x="3540642" y="1871330"/>
+                </a:cubicBezTo>
+              </a:path>
+            </a:pathLst>
+          </a:custGeom>
+          <a:noFill/>
+          <a:ln w="57150">
+            <a:solidFill>
+              <a:srgbClr val="00B050"/>
+            </a:solidFill>
+          </a:ln>
+        </p:spPr>
+        <p:style>
+          <a:lnRef idx="2">
+            <a:schemeClr val="accent1">
+              <a:shade val="15000"/>
+            </a:schemeClr>
+          </a:lnRef>
+          <a:fillRef idx="1">
+            <a:schemeClr val="accent1"/>
+          </a:fillRef>
+          <a:effectRef idx="0">
+            <a:schemeClr val="accent1"/>
+          </a:effectRef>
+          <a:fontRef idx="minor">
+            <a:schemeClr val="lt1"/>
+          </a:fontRef>
+        </p:style>
+        <p:txBody>
+          <a:bodyPr rtlCol="0" anchor="ctr"/>
+          <a:lstStyle/>
+          <a:p>
+            <a:pPr algn="ctr"/>
+            <a:endParaRPr lang="es-ES_tradnl"/>
+          </a:p>
+        </p:txBody>
+      </p:sp>
+      <p:cxnSp>
+        <p:nvCxnSpPr>
+          <p:cNvPr id="6" name="Conector recto 5">
+            <a:extLst>
+              <a:ext uri="{FF2B5EF4-FFF2-40B4-BE49-F238E27FC236}">
+                <a16:creationId xmlns:a16="http://schemas.microsoft.com/office/drawing/2014/main" id="{49AA2198-75DD-5341-BC20-173EEA2BED77}"/>
+              </a:ext>
+            </a:extLst>
+          </p:cNvPr>
+          <p:cNvCxnSpPr/>
+          <p:nvPr/>
+        </p:nvCxnSpPr>
+        <p:spPr>
+          <a:xfrm>
+            <a:off x="8250865" y="2721935"/>
+            <a:ext cx="425302" cy="0"/>
+          </a:xfrm>
+          <a:prstGeom prst="line">
+            <a:avLst/>
+          </a:prstGeom>
+          <a:ln w="57150">
+            <a:solidFill>
+              <a:srgbClr val="00B050"/>
+            </a:solidFill>
+          </a:ln>
+        </p:spPr>
+        <p:style>
+          <a:lnRef idx="1">
+            <a:schemeClr val="accent1"/>
+          </a:lnRef>
+          <a:fillRef idx="0">
+            <a:schemeClr val="accent1"/>
+          </a:fillRef>
+          <a:effectRef idx="0">
+            <a:schemeClr val="accent1"/>
+          </a:effectRef>
+          <a:fontRef idx="minor">
+            <a:schemeClr val="tx1"/>
+          </a:fontRef>
+        </p:style>
+      </p:cxnSp>
+      <p:sp>
+        <p:nvSpPr>
+          <p:cNvPr id="10" name="Forma libre 9">
+            <a:extLst>
+              <a:ext uri="{FF2B5EF4-FFF2-40B4-BE49-F238E27FC236}">
+                <a16:creationId xmlns:a16="http://schemas.microsoft.com/office/drawing/2014/main" id="{CD9D11F0-45BA-50C6-0C5C-627CC60E655F}"/>
+              </a:ext>
+            </a:extLst>
+          </p:cNvPr>
+          <p:cNvSpPr/>
+          <p:nvPr/>
+        </p:nvSpPr>
+        <p:spPr>
+          <a:xfrm>
+            <a:off x="7740502" y="4001317"/>
+            <a:ext cx="3254763" cy="979320"/>
+          </a:xfrm>
+          <a:custGeom>
+            <a:avLst/>
+            <a:gdLst>
+              <a:gd name="connsiteX0" fmla="*/ 0 w 3221665"/>
+              <a:gd name="connsiteY0" fmla="*/ 0 h 967562"/>
+              <a:gd name="connsiteX1" fmla="*/ 712381 w 3221665"/>
+              <a:gd name="connsiteY1" fmla="*/ 797442 h 967562"/>
+              <a:gd name="connsiteX2" fmla="*/ 3221665 w 3221665"/>
+              <a:gd name="connsiteY2" fmla="*/ 967562 h 967562"/>
+            </a:gdLst>
+            <a:ahLst/>
+            <a:cxnLst>
+              <a:cxn ang="0">
+                <a:pos x="connsiteX0" y="connsiteY0"/>
+              </a:cxn>
+              <a:cxn ang="0">
+                <a:pos x="connsiteX1" y="connsiteY1"/>
+              </a:cxn>
+              <a:cxn ang="0">
+                <a:pos x="connsiteX2" y="connsiteY2"/>
+              </a:cxn>
+            </a:cxnLst>
+            <a:rect l="l" t="t" r="r" b="b"/>
+            <a:pathLst>
+              <a:path w="3221665" h="967562">
+                <a:moveTo>
+                  <a:pt x="0" y="0"/>
+                </a:moveTo>
+                <a:cubicBezTo>
+                  <a:pt x="87718" y="318091"/>
+                  <a:pt x="175437" y="636182"/>
+                  <a:pt x="712381" y="797442"/>
+                </a:cubicBezTo>
+                <a:cubicBezTo>
+                  <a:pt x="1249325" y="958702"/>
+                  <a:pt x="2235495" y="963132"/>
+                  <a:pt x="3221665" y="967562"/>
+                </a:cubicBezTo>
+              </a:path>
+            </a:pathLst>
+          </a:custGeom>
+          <a:noFill/>
+          <a:ln w="38100">
+            <a:solidFill>
+              <a:schemeClr val="accent2"/>
+            </a:solidFill>
+          </a:ln>
+        </p:spPr>
+        <p:style>
+          <a:lnRef idx="2">
+            <a:schemeClr val="accent1">
+              <a:shade val="15000"/>
+            </a:schemeClr>
+          </a:lnRef>
+          <a:fillRef idx="1">
+            <a:schemeClr val="accent1"/>
+          </a:fillRef>
+          <a:effectRef idx="0">
+            <a:schemeClr val="accent1"/>
+          </a:effectRef>
+          <a:fontRef idx="minor">
+            <a:schemeClr val="lt1"/>
+          </a:fontRef>
+        </p:style>
+        <p:txBody>
+          <a:bodyPr rtlCol="0" anchor="ctr"/>
+          <a:lstStyle/>
+          <a:p>
+            <a:pPr algn="ctr"/>
+            <a:endParaRPr lang="es-ES_tradnl"/>
+          </a:p>
+        </p:txBody>
+      </p:sp>
+      <p:cxnSp>
+        <p:nvCxnSpPr>
+          <p:cNvPr id="11" name="Conector recto 10">
+            <a:extLst>
+              <a:ext uri="{FF2B5EF4-FFF2-40B4-BE49-F238E27FC236}">
+                <a16:creationId xmlns:a16="http://schemas.microsoft.com/office/drawing/2014/main" id="{8C939574-6C89-6279-D716-CFDEC10972D2}"/>
+              </a:ext>
+            </a:extLst>
+          </p:cNvPr>
+          <p:cNvCxnSpPr/>
+          <p:nvPr/>
+        </p:nvCxnSpPr>
+        <p:spPr>
+          <a:xfrm>
+            <a:off x="8233138" y="3193322"/>
+            <a:ext cx="425302" cy="0"/>
+          </a:xfrm>
+          <a:prstGeom prst="line">
+            <a:avLst/>
+          </a:prstGeom>
+          <a:ln w="38100">
+            <a:solidFill>
+              <a:schemeClr val="accent2"/>
+            </a:solidFill>
+          </a:ln>
+        </p:spPr>
+        <p:style>
+          <a:lnRef idx="1">
+            <a:schemeClr val="accent1"/>
+          </a:lnRef>
+          <a:fillRef idx="0">
+            <a:schemeClr val="accent1"/>
+          </a:fillRef>
+          <a:effectRef idx="0">
+            <a:schemeClr val="accent1"/>
+          </a:effectRef>
+          <a:fontRef idx="minor">
+            <a:schemeClr val="tx1"/>
+          </a:fontRef>
+        </p:style>
+      </p:cxnSp>
+      <p:cxnSp>
+        <p:nvCxnSpPr>
+          <p:cNvPr id="13" name="Conector recto 12">
+            <a:extLst>
+              <a:ext uri="{FF2B5EF4-FFF2-40B4-BE49-F238E27FC236}">
+                <a16:creationId xmlns:a16="http://schemas.microsoft.com/office/drawing/2014/main" id="{A75C8F76-F895-CF9B-BEFA-D4646F173229}"/>
+              </a:ext>
+            </a:extLst>
+          </p:cNvPr>
+          <p:cNvCxnSpPr/>
+          <p:nvPr/>
+        </p:nvCxnSpPr>
+        <p:spPr>
+          <a:xfrm>
+            <a:off x="7591643" y="5001903"/>
+            <a:ext cx="4061640" cy="0"/>
+          </a:xfrm>
+          <a:prstGeom prst="line">
+            <a:avLst/>
+          </a:prstGeom>
+          <a:ln w="12700">
+            <a:solidFill>
+              <a:srgbClr val="FF0000"/>
+            </a:solidFill>
+          </a:ln>
+        </p:spPr>
+        <p:style>
+          <a:lnRef idx="1">
+            <a:schemeClr val="accent1"/>
+          </a:lnRef>
+          <a:fillRef idx="0">
+            <a:schemeClr val="accent1"/>
+          </a:fillRef>
+          <a:effectRef idx="0">
+            <a:schemeClr val="accent1"/>
+          </a:effectRef>
+          <a:fontRef idx="minor">
+            <a:schemeClr val="tx1"/>
+          </a:fontRef>
+        </p:style>
+      </p:cxnSp>
     </p:spTree>
     <p:extLst>
       <p:ext uri="{BB962C8B-B14F-4D97-AF65-F5344CB8AC3E}">
-        <p14:creationId xmlns:p14="http://schemas.microsoft.com/office/powerpoint/2010/main" val="3185084906"/>
+        <p14:creationId xmlns:p14="http://schemas.microsoft.com/office/powerpoint/2010/main" val="3421950475"/>
       </p:ext>
     </p:extLst>
   </p:cSld>
   <p:clrMapOvr>
     <a:masterClrMapping/>
   </p:clrMapOvr>
+  <p:timing>
+    <p:tnLst>
+      <p:par>
+        <p:cTn id="1" dur="indefinite" restart="never" nodeType="tmRoot">
+          <p:childTnLst>
+            <p:seq concurrent="1" nextAc="seek">
+              <p:cTn id="2" dur="indefinite" nodeType="mainSeq">
+                <p:childTnLst>
+                  <p:par>
+                    <p:cTn id="3" fill="hold">
+                      <p:stCondLst>
+                        <p:cond delay="indefinite"/>
+                      </p:stCondLst>
+                      <p:childTnLst>
+                        <p:par>
+                          <p:cTn id="4" fill="hold">
+                            <p:stCondLst>
+                              <p:cond delay="0"/>
+                            </p:stCondLst>
+                            <p:childTnLst>
+                              <p:par>
+                                <p:cTn id="5" presetID="1" presetClass="entr" presetSubtype="0" fill="hold" grpId="0" nodeType="clickEffect">
+                                  <p:stCondLst>
+                                    <p:cond delay="0"/>
+                                  </p:stCondLst>
+                                  <p:childTnLst>
+                                    <p:set>
+                                      <p:cBhvr>
+                                        <p:cTn id="6" dur="1" fill="hold">
+                                          <p:stCondLst>
+                                            <p:cond delay="0"/>
+                                          </p:stCondLst>
+                                        </p:cTn>
+                                        <p:tgtEl>
+                                          <p:spTgt spid="3"/>
+                                        </p:tgtEl>
+                                        <p:attrNameLst>
+                                          <p:attrName>style.visibility</p:attrName>
+                                        </p:attrNameLst>
+                                      </p:cBhvr>
+                                      <p:to>
+                                        <p:strVal val="visible"/>
+                                      </p:to>
+                                    </p:set>
+                                  </p:childTnLst>
+                                </p:cTn>
+                              </p:par>
+                              <p:par>
+                                <p:cTn id="7" presetID="1" presetClass="entr" presetSubtype="0" fill="hold" nodeType="withEffect">
+                                  <p:stCondLst>
+                                    <p:cond delay="0"/>
+                                  </p:stCondLst>
+                                  <p:childTnLst>
+                                    <p:set>
+                                      <p:cBhvr>
+                                        <p:cTn id="8" dur="1" fill="hold">
+                                          <p:stCondLst>
+                                            <p:cond delay="0"/>
+                                          </p:stCondLst>
+                                        </p:cTn>
+                                        <p:tgtEl>
+                                          <p:spTgt spid="6"/>
+                                        </p:tgtEl>
+                                        <p:attrNameLst>
+                                          <p:attrName>style.visibility</p:attrName>
+                                        </p:attrNameLst>
+                                      </p:cBhvr>
+                                      <p:to>
+                                        <p:strVal val="visible"/>
+                                      </p:to>
+                                    </p:set>
+                                  </p:childTnLst>
+                                </p:cTn>
+                              </p:par>
+                            </p:childTnLst>
+                          </p:cTn>
+                        </p:par>
+                      </p:childTnLst>
+                    </p:cTn>
+                  </p:par>
+                  <p:par>
+                    <p:cTn id="9" fill="hold">
+                      <p:stCondLst>
+                        <p:cond delay="indefinite"/>
+                      </p:stCondLst>
+                      <p:childTnLst>
+                        <p:par>
+                          <p:cTn id="10" fill="hold">
+                            <p:stCondLst>
+                              <p:cond delay="0"/>
+                            </p:stCondLst>
+                            <p:childTnLst>
+                              <p:par>
+                                <p:cTn id="11" presetID="1" presetClass="entr" presetSubtype="0" fill="hold" nodeType="clickEffect">
+                                  <p:stCondLst>
+                                    <p:cond delay="0"/>
+                                  </p:stCondLst>
+                                  <p:childTnLst>
+                                    <p:set>
+                                      <p:cBhvr>
+                                        <p:cTn id="12" dur="1" fill="hold">
+                                          <p:stCondLst>
+                                            <p:cond delay="0"/>
+                                          </p:stCondLst>
+                                        </p:cTn>
+                                        <p:tgtEl>
+                                          <p:spTgt spid="11"/>
+                                        </p:tgtEl>
+                                        <p:attrNameLst>
+                                          <p:attrName>style.visibility</p:attrName>
+                                        </p:attrNameLst>
+                                      </p:cBhvr>
+                                      <p:to>
+                                        <p:strVal val="visible"/>
+                                      </p:to>
+                                    </p:set>
+                                  </p:childTnLst>
+                                </p:cTn>
+                              </p:par>
+                              <p:par>
+                                <p:cTn id="13" presetID="1" presetClass="entr" presetSubtype="0" fill="hold" grpId="0" nodeType="withEffect">
+                                  <p:stCondLst>
+                                    <p:cond delay="0"/>
+                                  </p:stCondLst>
+                                  <p:childTnLst>
+                                    <p:set>
+                                      <p:cBhvr>
+                                        <p:cTn id="14" dur="1" fill="hold">
+                                          <p:stCondLst>
+                                            <p:cond delay="0"/>
+                                          </p:stCondLst>
+                                        </p:cTn>
+                                        <p:tgtEl>
+                                          <p:spTgt spid="10"/>
+                                        </p:tgtEl>
+                                        <p:attrNameLst>
+                                          <p:attrName>style.visibility</p:attrName>
+                                        </p:attrNameLst>
+                                      </p:cBhvr>
+                                      <p:to>
+                                        <p:strVal val="visible"/>
+                                      </p:to>
+                                    </p:set>
+                                  </p:childTnLst>
+                                </p:cTn>
+                              </p:par>
+                            </p:childTnLst>
+                          </p:cTn>
+                        </p:par>
+                      </p:childTnLst>
+                    </p:cTn>
+                  </p:par>
+                </p:childTnLst>
+              </p:cTn>
+              <p:prevCondLst>
+                <p:cond evt="onPrev" delay="0">
+                  <p:tgtEl>
+                    <p:sldTgt/>
+                  </p:tgtEl>
+                </p:cond>
+              </p:prevCondLst>
+              <p:nextCondLst>
+                <p:cond evt="onNext" delay="0">
+                  <p:tgtEl>
+                    <p:sldTgt/>
+                  </p:tgtEl>
+                </p:cond>
+              </p:nextCondLst>
+            </p:seq>
+          </p:childTnLst>
+        </p:cTn>
+      </p:par>
+    </p:tnLst>
+    <p:bldLst>
+      <p:bldP spid="3" grpId="0" animBg="1"/>
+      <p:bldP spid="10" grpId="0" animBg="1"/>
+    </p:bldLst>
+  </p:timing>
 </p:sld>
 </file>
 
-<file path=ppt/slides/slide31.xml><?xml version="1.0" encoding="utf-8"?>
+<file path=ppt/slides/slide26.xml><?xml version="1.0" encoding="utf-8"?>
 <p:sld xmlns:a="http://schemas.openxmlformats.org/drawingml/2006/main" xmlns:r="http://schemas.openxmlformats.org/officeDocument/2006/relationships" xmlns:p="http://schemas.openxmlformats.org/presentationml/2006/main">
   <p:cSld>
     <p:spTree>
@@ -24747,35 +22453,6 @@
           </a:p>
         </p:txBody>
       </p:sp>
-      <p:pic>
-        <p:nvPicPr>
-          <p:cNvPr id="8" name="Content Placeholder 7" descr="A screenshot of a graph&#10;&#10;AI-generated content may be incorrect.">
-            <a:extLst>
-              <a:ext uri="{FF2B5EF4-FFF2-40B4-BE49-F238E27FC236}">
-                <a16:creationId xmlns:a16="http://schemas.microsoft.com/office/drawing/2014/main" id="{DBCB9F9B-7754-4D27-E1AA-A2BF556EC67B}"/>
-              </a:ext>
-            </a:extLst>
-          </p:cNvPr>
-          <p:cNvPicPr>
-            <a:picLocks noGrp="1" noChangeAspect="1"/>
-          </p:cNvPicPr>
-          <p:nvPr>
-            <p:ph idx="1"/>
-          </p:nvPr>
-        </p:nvPicPr>
-        <p:blipFill>
-          <a:blip r:embed="rId2"/>
-          <a:stretch>
-            <a:fillRect/>
-          </a:stretch>
-        </p:blipFill>
-        <p:spPr>
-          <a:xfrm>
-            <a:off x="780876" y="1986192"/>
-            <a:ext cx="10630247" cy="3316637"/>
-          </a:xfrm>
-        </p:spPr>
-      </p:pic>
       <p:sp>
         <p:nvSpPr>
           <p:cNvPr id="9" name="TextBox 8">
@@ -24790,7 +22467,7 @@
         </p:nvSpPr>
         <p:spPr>
           <a:xfrm>
-            <a:off x="1026833" y="5598333"/>
+            <a:off x="1079500" y="6323598"/>
             <a:ext cx="5181599" cy="338554"/>
           </a:xfrm>
           <a:prstGeom prst="rect">
@@ -24815,7 +22492,19 @@
                 <a:effectLst/>
                 <a:latin typeface="Gill Sans Nova Light" panose="020B0302020104020203" pitchFamily="34" charset="0"/>
               </a:rPr>
-              <a:t>Fuente: Tollenaar &amp; van der Heijden (2013), p. 16</a:t>
+              <a:t>Fuente: Tollenaar &amp; van der Heijden (2013), p. </a:t>
+            </a:r>
+            <a:r>
+              <a:rPr lang="en-US" sz="1600" dirty="0">
+                <a:solidFill>
+                  <a:schemeClr val="tx1">
+                    <a:lumMod val="50000"/>
+                    <a:lumOff val="50000"/>
+                  </a:schemeClr>
+                </a:solidFill>
+                <a:latin typeface="Gill Sans Nova Light" panose="020B0302020104020203" pitchFamily="34" charset="0"/>
+              </a:rPr>
+              <a:t>580</a:t>
             </a:r>
             <a:endParaRPr lang="en-US" sz="4400" dirty="0">
               <a:solidFill>
@@ -24830,10 +22519,99 @@
           </a:p>
         </p:txBody>
       </p:sp>
+      <p:pic>
+        <p:nvPicPr>
+          <p:cNvPr id="6" name="Marcador de contenido 5">
+            <a:extLst>
+              <a:ext uri="{FF2B5EF4-FFF2-40B4-BE49-F238E27FC236}">
+                <a16:creationId xmlns:a16="http://schemas.microsoft.com/office/drawing/2014/main" id="{CEDC49C3-022A-34D3-905C-58065C75CF29}"/>
+              </a:ext>
+            </a:extLst>
+          </p:cNvPr>
+          <p:cNvPicPr>
+            <a:picLocks noGrp="1" noChangeAspect="1"/>
+          </p:cNvPicPr>
+          <p:nvPr>
+            <p:ph idx="1"/>
+          </p:nvPr>
+        </p:nvPicPr>
+        <p:blipFill>
+          <a:blip r:embed="rId3"/>
+          <a:stretch>
+            <a:fillRect/>
+          </a:stretch>
+        </p:blipFill>
+        <p:spPr>
+          <a:xfrm>
+            <a:off x="1079500" y="1606160"/>
+            <a:ext cx="10033000" cy="1358900"/>
+          </a:xfrm>
+        </p:spPr>
+      </p:pic>
+      <p:pic>
+        <p:nvPicPr>
+          <p:cNvPr id="10" name="Imagen 9">
+            <a:extLst>
+              <a:ext uri="{FF2B5EF4-FFF2-40B4-BE49-F238E27FC236}">
+                <a16:creationId xmlns:a16="http://schemas.microsoft.com/office/drawing/2014/main" id="{3F0786D2-71D0-AFD4-085B-DF6F27590CC3}"/>
+              </a:ext>
+            </a:extLst>
+          </p:cNvPr>
+          <p:cNvPicPr>
+            <a:picLocks noChangeAspect="1"/>
+          </p:cNvPicPr>
+          <p:nvPr/>
+        </p:nvPicPr>
+        <p:blipFill>
+          <a:blip r:embed="rId4"/>
+          <a:stretch>
+            <a:fillRect/>
+          </a:stretch>
+        </p:blipFill>
+        <p:spPr>
+          <a:xfrm>
+            <a:off x="1202273" y="2965060"/>
+            <a:ext cx="9910227" cy="1713730"/>
+          </a:xfrm>
+          <a:prstGeom prst="rect">
+            <a:avLst/>
+          </a:prstGeom>
+        </p:spPr>
+      </p:pic>
+      <p:pic>
+        <p:nvPicPr>
+          <p:cNvPr id="12" name="Imagen 11">
+            <a:extLst>
+              <a:ext uri="{FF2B5EF4-FFF2-40B4-BE49-F238E27FC236}">
+                <a16:creationId xmlns:a16="http://schemas.microsoft.com/office/drawing/2014/main" id="{DE5D0766-4ED6-DBE2-43FA-FA80D12744C6}"/>
+              </a:ext>
+            </a:extLst>
+          </p:cNvPr>
+          <p:cNvPicPr>
+            <a:picLocks noChangeAspect="1"/>
+          </p:cNvPicPr>
+          <p:nvPr/>
+        </p:nvPicPr>
+        <p:blipFill>
+          <a:blip r:embed="rId5"/>
+          <a:stretch>
+            <a:fillRect/>
+          </a:stretch>
+        </p:blipFill>
+        <p:spPr>
+          <a:xfrm>
+            <a:off x="1277558" y="4678790"/>
+            <a:ext cx="9787792" cy="1538081"/>
+          </a:xfrm>
+          <a:prstGeom prst="rect">
+            <a:avLst/>
+          </a:prstGeom>
+        </p:spPr>
+      </p:pic>
     </p:spTree>
     <p:extLst>
       <p:ext uri="{BB962C8B-B14F-4D97-AF65-F5344CB8AC3E}">
-        <p14:creationId xmlns:p14="http://schemas.microsoft.com/office/powerpoint/2010/main" val="1769995523"/>
+        <p14:creationId xmlns:p14="http://schemas.microsoft.com/office/powerpoint/2010/main" val="658863819"/>
       </p:ext>
     </p:extLst>
   </p:cSld>
@@ -24843,7 +22621,7 @@
 </p:sld>
 </file>
 
-<file path=ppt/slides/slide32.xml><?xml version="1.0" encoding="utf-8"?>
+<file path=ppt/slides/slide27.xml><?xml version="1.0" encoding="utf-8"?>
 <p:sld xmlns:a="http://schemas.openxmlformats.org/drawingml/2006/main" xmlns:r="http://schemas.openxmlformats.org/officeDocument/2006/relationships" xmlns:p="http://schemas.openxmlformats.org/presentationml/2006/main">
   <p:cSld>
     <p:spTree>
@@ -24957,7 +22735,7 @@
 </p:sld>
 </file>
 
-<file path=ppt/slides/slide33.xml><?xml version="1.0" encoding="utf-8"?>
+<file path=ppt/slides/slide28.xml><?xml version="1.0" encoding="utf-8"?>
 <p:sld xmlns:a="http://schemas.openxmlformats.org/drawingml/2006/main" xmlns:r="http://schemas.openxmlformats.org/officeDocument/2006/relationships" xmlns:p="http://schemas.openxmlformats.org/presentationml/2006/main">
   <p:cSld>
     <p:spTree>
@@ -25316,7 +23094,7 @@
                         <m:sSub>
                           <m:sSubPr>
                             <m:ctrlPr>
-                              <a:rPr lang="en-US" i="1">
+                              <a:rPr lang="en-US" b="0" i="1" smtClean="0">
                                 <a:latin typeface="Cambria Math" panose="02040503050406030204" pitchFamily="18" charset="0"/>
                                 <a:ea typeface="Cambria Math" panose="02040503050406030204" pitchFamily="18" charset="0"/>
                               </a:rPr>
@@ -25444,7 +23222,7 @@
                       <m:accPr>
                         <m:chr m:val="̂"/>
                         <m:ctrlPr>
-                          <a:rPr lang="es-ES_tradnl" b="0" i="1" smtClean="0">
+                          <a:rPr lang="en-US" b="0" i="1" smtClean="0">
                             <a:latin typeface="Cambria Math" panose="02040503050406030204" pitchFamily="18" charset="0"/>
                             <a:ea typeface="Cambria Math" panose="02040503050406030204" pitchFamily="18" charset="0"/>
                           </a:rPr>
@@ -25572,10 +23350,7 @@
                 <a:pPr/>
                 <a14:m>
                   <m:oMathPara xmlns:m="http://schemas.openxmlformats.org/officeDocument/2006/math">
-                    <m:oMathParaPr>
-                      <m:jc m:val="centerGroup"/>
-                    </m:oMathParaPr>
-                    <m:oMath xmlns:m="http://schemas.openxmlformats.org/officeDocument/2006/math">
+                    <m:oMath>
                       <m:sSub>
                         <m:sSubPr>
                           <m:ctrlPr>
@@ -25690,10 +23465,7 @@
                 <a:pPr/>
                 <a14:m>
                   <m:oMathPara xmlns:m="http://schemas.openxmlformats.org/officeDocument/2006/math">
-                    <m:oMathParaPr>
-                      <m:jc m:val="centerGroup"/>
-                    </m:oMathParaPr>
-                    <m:oMath xmlns:m="http://schemas.openxmlformats.org/officeDocument/2006/math">
+                    <m:oMath>
                       <m:sSub>
                         <m:sSubPr>
                           <m:ctrlPr>
@@ -25808,10 +23580,7 @@
                 <a:pPr/>
                 <a14:m>
                   <m:oMathPara xmlns:m="http://schemas.openxmlformats.org/officeDocument/2006/math">
-                    <m:oMathParaPr>
-                      <m:jc m:val="centerGroup"/>
-                    </m:oMathParaPr>
-                    <m:oMath xmlns:m="http://schemas.openxmlformats.org/officeDocument/2006/math">
+                    <m:oMath>
                       <m:r>
                         <a:rPr lang="en-US" sz="3200" b="0" i="1" smtClean="0">
                           <a:solidFill>
@@ -25911,10 +23680,7 @@
                 <a:pPr/>
                 <a14:m>
                   <m:oMathPara xmlns:m="http://schemas.openxmlformats.org/officeDocument/2006/math">
-                    <m:oMathParaPr>
-                      <m:jc m:val="centerGroup"/>
-                    </m:oMathParaPr>
-                    <m:oMath xmlns:m="http://schemas.openxmlformats.org/officeDocument/2006/math">
+                    <m:oMath>
                       <m:r>
                         <a:rPr lang="en-US" sz="3200" b="0" i="1" smtClean="0">
                           <a:solidFill>
@@ -25994,7 +23760,7 @@
 </p:sld>
 </file>
 
-<file path=ppt/slides/slide34.xml><?xml version="1.0" encoding="utf-8"?>
+<file path=ppt/slides/slide29.xml><?xml version="1.0" encoding="utf-8"?>
 <p:sld xmlns:a="http://schemas.openxmlformats.org/drawingml/2006/main" xmlns:r="http://schemas.openxmlformats.org/officeDocument/2006/relationships" xmlns:p="http://schemas.openxmlformats.org/presentationml/2006/main">
   <p:cSld>
     <p:spTree>
@@ -26570,7 +24336,139 @@
 </p:sld>
 </file>
 
-<file path=ppt/slides/slide35.xml><?xml version="1.0" encoding="utf-8"?>
+<file path=ppt/slides/slide3.xml><?xml version="1.0" encoding="utf-8"?>
+<p:sld xmlns:a="http://schemas.openxmlformats.org/drawingml/2006/main" xmlns:r="http://schemas.openxmlformats.org/officeDocument/2006/relationships" xmlns:p="http://schemas.openxmlformats.org/presentationml/2006/main">
+  <p:cSld>
+    <p:spTree>
+      <p:nvGrpSpPr>
+        <p:cNvPr id="1" name=""/>
+        <p:cNvGrpSpPr/>
+        <p:nvPr/>
+      </p:nvGrpSpPr>
+      <p:grpSpPr>
+        <a:xfrm>
+          <a:off x="0" y="0"/>
+          <a:ext cx="0" cy="0"/>
+          <a:chOff x="0" y="0"/>
+          <a:chExt cx="0" cy="0"/>
+        </a:xfrm>
+      </p:grpSpPr>
+      <p:sp>
+        <p:nvSpPr>
+          <p:cNvPr id="2" name="Title 1">
+            <a:extLst>
+              <a:ext uri="{FF2B5EF4-FFF2-40B4-BE49-F238E27FC236}">
+                <a16:creationId xmlns:a16="http://schemas.microsoft.com/office/drawing/2014/main" id="{0A98CDA9-EC41-2312-3939-2A1FFC5B4920}"/>
+              </a:ext>
+            </a:extLst>
+          </p:cNvPr>
+          <p:cNvSpPr>
+            <a:spLocks noGrp="1"/>
+          </p:cNvSpPr>
+          <p:nvPr>
+            <p:ph type="title"/>
+          </p:nvPr>
+        </p:nvSpPr>
+        <p:spPr/>
+        <p:txBody>
+          <a:bodyPr/>
+          <a:lstStyle/>
+          <a:p>
+            <a:r>
+              <a:rPr lang="es-ES_tradnl" dirty="0"/>
+              <a:t>Orden de Temas: </a:t>
+            </a:r>
+            <a:r>
+              <a:rPr lang="es-ES_tradnl" sz="3600" i="1" dirty="0">
+                <a:solidFill>
+                  <a:schemeClr val="tx1">
+                    <a:lumMod val="50000"/>
+                    <a:lumOff val="50000"/>
+                  </a:schemeClr>
+                </a:solidFill>
+              </a:rPr>
+              <a:t>Secuencia de Trabajo con Datos</a:t>
+            </a:r>
+            <a:endParaRPr lang="es-ES_tradnl" i="1" dirty="0">
+              <a:solidFill>
+                <a:schemeClr val="tx1">
+                  <a:lumMod val="50000"/>
+                  <a:lumOff val="50000"/>
+                </a:schemeClr>
+              </a:solidFill>
+            </a:endParaRPr>
+          </a:p>
+        </p:txBody>
+      </p:sp>
+      <p:graphicFrame>
+        <p:nvGraphicFramePr>
+          <p:cNvPr id="4" name="Content Placeholder 3">
+            <a:extLst>
+              <a:ext uri="{FF2B5EF4-FFF2-40B4-BE49-F238E27FC236}">
+                <a16:creationId xmlns:a16="http://schemas.microsoft.com/office/drawing/2014/main" id="{51ABD0DE-D47B-BE72-9389-1B9C88CB6F1B}"/>
+              </a:ext>
+            </a:extLst>
+          </p:cNvPr>
+          <p:cNvGraphicFramePr>
+            <a:graphicFrameLocks noGrp="1"/>
+          </p:cNvGraphicFramePr>
+          <p:nvPr>
+            <p:ph idx="1"/>
+          </p:nvPr>
+        </p:nvGraphicFramePr>
+        <p:xfrm>
+          <a:off x="449451" y="1100380"/>
+          <a:ext cx="11236271" cy="5548393"/>
+        </p:xfrm>
+        <a:graphic>
+          <a:graphicData uri="http://schemas.openxmlformats.org/drawingml/2006/diagram">
+            <dgm:relIds xmlns:dgm="http://schemas.openxmlformats.org/drawingml/2006/diagram" xmlns:r="http://schemas.openxmlformats.org/officeDocument/2006/relationships" r:dm="rId3" r:lo="rId4" r:qs="rId5" r:cs="rId6"/>
+          </a:graphicData>
+        </a:graphic>
+      </p:graphicFrame>
+      <p:sp>
+        <p:nvSpPr>
+          <p:cNvPr id="3" name="Slide Number Placeholder 2">
+            <a:extLst>
+              <a:ext uri="{FF2B5EF4-FFF2-40B4-BE49-F238E27FC236}">
+                <a16:creationId xmlns:a16="http://schemas.microsoft.com/office/drawing/2014/main" id="{FE42FF7C-6F94-55CC-F31A-3FC6C600EAFA}"/>
+              </a:ext>
+            </a:extLst>
+          </p:cNvPr>
+          <p:cNvSpPr>
+            <a:spLocks noGrp="1"/>
+          </p:cNvSpPr>
+          <p:nvPr>
+            <p:ph type="sldNum" sz="quarter" idx="12"/>
+          </p:nvPr>
+        </p:nvSpPr>
+        <p:spPr/>
+        <p:txBody>
+          <a:bodyPr/>
+          <a:lstStyle/>
+          <a:p>
+            <a:fld id="{278C1CC4-2077-434E-BCF1-5D01C08A9B17}" type="slidenum">
+              <a:rPr lang="en-US" smtClean="0"/>
+              <a:t>3</a:t>
+            </a:fld>
+            <a:endParaRPr lang="en-US"/>
+          </a:p>
+        </p:txBody>
+      </p:sp>
+    </p:spTree>
+    <p:extLst>
+      <p:ext uri="{BB962C8B-B14F-4D97-AF65-F5344CB8AC3E}">
+        <p14:creationId xmlns:p14="http://schemas.microsoft.com/office/powerpoint/2010/main" val="1565052807"/>
+      </p:ext>
+    </p:extLst>
+  </p:cSld>
+  <p:clrMapOvr>
+    <a:masterClrMapping/>
+  </p:clrMapOvr>
+</p:sld>
+</file>
+
+<file path=ppt/slides/slide30.xml><?xml version="1.0" encoding="utf-8"?>
 <p:sld xmlns:a="http://schemas.openxmlformats.org/drawingml/2006/main" xmlns:r="http://schemas.openxmlformats.org/officeDocument/2006/relationships" xmlns:p="http://schemas.openxmlformats.org/presentationml/2006/main">
   <p:cSld>
     <p:spTree>
@@ -26657,7 +24555,7 @@
 </p:sld>
 </file>
 
-<file path=ppt/slides/slide36.xml><?xml version="1.0" encoding="utf-8"?>
+<file path=ppt/slides/slide31.xml><?xml version="1.0" encoding="utf-8"?>
 <p:sld xmlns:a="http://schemas.openxmlformats.org/drawingml/2006/main" xmlns:r="http://schemas.openxmlformats.org/officeDocument/2006/relationships" xmlns:p="http://schemas.openxmlformats.org/presentationml/2006/main">
   <p:cSld>
     <p:spTree>
@@ -27085,7 +24983,7 @@
 </p:sld>
 </file>
 
-<file path=ppt/slides/slide37.xml><?xml version="1.0" encoding="utf-8"?>
+<file path=ppt/slides/slide32.xml><?xml version="1.0" encoding="utf-8"?>
 <p:sld xmlns:a="http://schemas.openxmlformats.org/drawingml/2006/main" xmlns:r="http://schemas.openxmlformats.org/officeDocument/2006/relationships" xmlns:p="http://schemas.openxmlformats.org/presentationml/2006/main">
   <p:cSld>
     <p:spTree>
@@ -27229,10 +25127,7 @@
                 <a:pPr/>
                 <a14:m>
                   <m:oMathPara xmlns:m="http://schemas.openxmlformats.org/officeDocument/2006/math">
-                    <m:oMathParaPr>
-                      <m:jc m:val="centerGroup"/>
-                    </m:oMathParaPr>
-                    <m:oMath xmlns:m="http://schemas.openxmlformats.org/officeDocument/2006/math">
+                    <m:oMath>
                       <m:sSub>
                         <m:sSubPr>
                           <m:ctrlPr>
@@ -27361,7 +25256,7 @@
 </p:sld>
 </file>
 
-<file path=ppt/slides/slide38.xml><?xml version="1.0" encoding="utf-8"?>
+<file path=ppt/slides/slide33.xml><?xml version="1.0" encoding="utf-8"?>
 <p:sld xmlns:a="http://schemas.openxmlformats.org/drawingml/2006/main" xmlns:r="http://schemas.openxmlformats.org/officeDocument/2006/relationships" xmlns:p="http://schemas.openxmlformats.org/presentationml/2006/main">
   <p:cSld>
     <p:spTree>
@@ -27481,7 +25376,7 @@
 </p:sld>
 </file>
 
-<file path=ppt/slides/slide39.xml><?xml version="1.0" encoding="utf-8"?>
+<file path=ppt/slides/slide34.xml><?xml version="1.0" encoding="utf-8"?>
 <p:sld xmlns:a="http://schemas.openxmlformats.org/drawingml/2006/main" xmlns:r="http://schemas.openxmlformats.org/officeDocument/2006/relationships" xmlns:p="http://schemas.openxmlformats.org/presentationml/2006/main">
   <p:cSld>
     <p:spTree>
@@ -27765,6 +25660,524 @@
 </p:sld>
 </file>
 
+<file path=ppt/slides/slide35.xml><?xml version="1.0" encoding="utf-8"?>
+<p:sld xmlns:a="http://schemas.openxmlformats.org/drawingml/2006/main" xmlns:r="http://schemas.openxmlformats.org/officeDocument/2006/relationships" xmlns:p="http://schemas.openxmlformats.org/presentationml/2006/main">
+  <p:cSld>
+    <p:spTree>
+      <p:nvGrpSpPr>
+        <p:cNvPr id="1" name=""/>
+        <p:cNvGrpSpPr/>
+        <p:nvPr/>
+      </p:nvGrpSpPr>
+      <p:grpSpPr>
+        <a:xfrm>
+          <a:off x="0" y="0"/>
+          <a:ext cx="0" cy="0"/>
+          <a:chOff x="0" y="0"/>
+          <a:chExt cx="0" cy="0"/>
+        </a:xfrm>
+      </p:grpSpPr>
+      <p:sp>
+        <p:nvSpPr>
+          <p:cNvPr id="2" name="Title 1">
+            <a:extLst>
+              <a:ext uri="{FF2B5EF4-FFF2-40B4-BE49-F238E27FC236}">
+                <a16:creationId xmlns:a16="http://schemas.microsoft.com/office/drawing/2014/main" id="{B9E357CD-60DB-7599-DBBF-E7E34F55F067}"/>
+              </a:ext>
+            </a:extLst>
+          </p:cNvPr>
+          <p:cNvSpPr>
+            <a:spLocks noGrp="1"/>
+          </p:cNvSpPr>
+          <p:nvPr>
+            <p:ph type="title"/>
+          </p:nvPr>
+        </p:nvSpPr>
+        <p:spPr/>
+        <p:txBody>
+          <a:bodyPr/>
+          <a:lstStyle/>
+          <a:p>
+            <a:r>
+              <a:rPr lang="es-ES_tradnl" dirty="0"/>
+              <a:t>Conclusiones finales</a:t>
+            </a:r>
+          </a:p>
+        </p:txBody>
+      </p:sp>
+      <p:sp>
+        <p:nvSpPr>
+          <p:cNvPr id="4" name="Text Placeholder 3">
+            <a:extLst>
+              <a:ext uri="{FF2B5EF4-FFF2-40B4-BE49-F238E27FC236}">
+                <a16:creationId xmlns:a16="http://schemas.microsoft.com/office/drawing/2014/main" id="{808E002C-8C25-F567-04EE-6365B0376417}"/>
+              </a:ext>
+            </a:extLst>
+          </p:cNvPr>
+          <p:cNvSpPr>
+            <a:spLocks noGrp="1"/>
+          </p:cNvSpPr>
+          <p:nvPr>
+            <p:ph type="body" idx="1"/>
+          </p:nvPr>
+        </p:nvSpPr>
+        <p:spPr/>
+        <p:txBody>
+          <a:bodyPr/>
+          <a:lstStyle/>
+          <a:p>
+            <a:r>
+              <a:rPr lang="es-ES_tradnl" dirty="0"/>
+              <a:t>¿Qué aprendimos hoy?</a:t>
+            </a:r>
+          </a:p>
+        </p:txBody>
+      </p:sp>
+      <p:sp>
+        <p:nvSpPr>
+          <p:cNvPr id="3" name="Slide Number Placeholder 2">
+            <a:extLst>
+              <a:ext uri="{FF2B5EF4-FFF2-40B4-BE49-F238E27FC236}">
+                <a16:creationId xmlns:a16="http://schemas.microsoft.com/office/drawing/2014/main" id="{1A580811-4E8A-0CFA-2D7A-CC97B0990DF8}"/>
+              </a:ext>
+            </a:extLst>
+          </p:cNvPr>
+          <p:cNvSpPr>
+            <a:spLocks noGrp="1"/>
+          </p:cNvSpPr>
+          <p:nvPr>
+            <p:ph type="sldNum" sz="quarter" idx="12"/>
+          </p:nvPr>
+        </p:nvSpPr>
+        <p:spPr/>
+        <p:txBody>
+          <a:bodyPr/>
+          <a:lstStyle/>
+          <a:p>
+            <a:fld id="{278C1CC4-2077-434E-BCF1-5D01C08A9B17}" type="slidenum">
+              <a:rPr lang="en-US" smtClean="0"/>
+              <a:t>35</a:t>
+            </a:fld>
+            <a:endParaRPr lang="en-US"/>
+          </a:p>
+        </p:txBody>
+      </p:sp>
+    </p:spTree>
+    <p:extLst>
+      <p:ext uri="{BB962C8B-B14F-4D97-AF65-F5344CB8AC3E}">
+        <p14:creationId xmlns:p14="http://schemas.microsoft.com/office/powerpoint/2010/main" val="1583056128"/>
+      </p:ext>
+    </p:extLst>
+  </p:cSld>
+  <p:clrMapOvr>
+    <a:masterClrMapping/>
+  </p:clrMapOvr>
+</p:sld>
+</file>
+
+<file path=ppt/slides/slide36.xml><?xml version="1.0" encoding="utf-8"?>
+<p:sld xmlns:a="http://schemas.openxmlformats.org/drawingml/2006/main" xmlns:r="http://schemas.openxmlformats.org/officeDocument/2006/relationships" xmlns:p="http://schemas.openxmlformats.org/presentationml/2006/main">
+  <p:cSld>
+    <p:spTree>
+      <p:nvGrpSpPr>
+        <p:cNvPr id="1" name=""/>
+        <p:cNvGrpSpPr/>
+        <p:nvPr/>
+      </p:nvGrpSpPr>
+      <p:grpSpPr>
+        <a:xfrm>
+          <a:off x="0" y="0"/>
+          <a:ext cx="0" cy="0"/>
+          <a:chOff x="0" y="0"/>
+          <a:chExt cx="0" cy="0"/>
+        </a:xfrm>
+      </p:grpSpPr>
+      <p:sp>
+        <p:nvSpPr>
+          <p:cNvPr id="2" name="Title 1">
+            <a:extLst>
+              <a:ext uri="{FF2B5EF4-FFF2-40B4-BE49-F238E27FC236}">
+                <a16:creationId xmlns:a16="http://schemas.microsoft.com/office/drawing/2014/main" id="{3043BB58-5855-ACF9-ED81-BEC9A8A857DC}"/>
+              </a:ext>
+            </a:extLst>
+          </p:cNvPr>
+          <p:cNvSpPr>
+            <a:spLocks noGrp="1"/>
+          </p:cNvSpPr>
+          <p:nvPr>
+            <p:ph type="title"/>
+          </p:nvPr>
+        </p:nvSpPr>
+        <p:spPr/>
+        <p:txBody>
+          <a:bodyPr/>
+          <a:lstStyle/>
+          <a:p>
+            <a:r>
+              <a:rPr lang="es-ES_tradnl" dirty="0"/>
+              <a:t>¿Que aprendimos hoy?</a:t>
+            </a:r>
+          </a:p>
+        </p:txBody>
+      </p:sp>
+      <p:sp>
+        <p:nvSpPr>
+          <p:cNvPr id="3" name="Content Placeholder 2">
+            <a:extLst>
+              <a:ext uri="{FF2B5EF4-FFF2-40B4-BE49-F238E27FC236}">
+                <a16:creationId xmlns:a16="http://schemas.microsoft.com/office/drawing/2014/main" id="{8A1A5571-2769-CCAB-A4A1-42266B991BF9}"/>
+              </a:ext>
+            </a:extLst>
+          </p:cNvPr>
+          <p:cNvSpPr>
+            <a:spLocks noGrp="1"/>
+          </p:cNvSpPr>
+          <p:nvPr>
+            <p:ph idx="1"/>
+          </p:nvPr>
+        </p:nvSpPr>
+        <p:spPr/>
+        <p:txBody>
+          <a:bodyPr>
+            <a:normAutofit fontScale="85000" lnSpcReduction="10000"/>
+          </a:bodyPr>
+          <a:lstStyle/>
+          <a:p>
+            <a:pPr>
+              <a:lnSpc>
+                <a:spcPct val="120000"/>
+              </a:lnSpc>
+            </a:pPr>
+            <a:r>
+              <a:rPr lang="es-ES_tradnl" dirty="0">
+                <a:solidFill>
+                  <a:srgbClr val="002060"/>
+                </a:solidFill>
+              </a:rPr>
+              <a:t>Partimos</a:t>
+            </a:r>
+            <a:r>
+              <a:rPr lang="es-ES_tradnl" dirty="0"/>
+              <a:t> de las tomas de decisiones como </a:t>
+            </a:r>
+            <a:r>
+              <a:rPr lang="es-ES_tradnl" dirty="0">
+                <a:solidFill>
+                  <a:srgbClr val="002060"/>
+                </a:solidFill>
+              </a:rPr>
+              <a:t>motivación</a:t>
+            </a:r>
+            <a:r>
+              <a:rPr lang="es-ES_tradnl" dirty="0"/>
+              <a:t> para la clasificación</a:t>
+            </a:r>
+          </a:p>
+          <a:p>
+            <a:pPr>
+              <a:lnSpc>
+                <a:spcPct val="120000"/>
+              </a:lnSpc>
+            </a:pPr>
+            <a:r>
+              <a:rPr lang="es-ES_tradnl" dirty="0">
+                <a:solidFill>
+                  <a:srgbClr val="002060"/>
+                </a:solidFill>
+              </a:rPr>
+              <a:t>Definimos</a:t>
+            </a:r>
+            <a:r>
+              <a:rPr lang="es-ES_tradnl" dirty="0"/>
+              <a:t> la función de riesgo esperado para introducir </a:t>
+            </a:r>
+            <a:r>
+              <a:rPr lang="es-ES_tradnl" dirty="0">
+                <a:solidFill>
+                  <a:srgbClr val="002060"/>
+                </a:solidFill>
+              </a:rPr>
+              <a:t>formalmente</a:t>
+            </a:r>
+            <a:r>
+              <a:rPr lang="es-ES_tradnl" dirty="0"/>
+              <a:t> el </a:t>
+            </a:r>
+            <a:r>
+              <a:rPr lang="es-ES_tradnl" dirty="0">
+                <a:solidFill>
+                  <a:srgbClr val="002060"/>
+                </a:solidFill>
+              </a:rPr>
+              <a:t>clasificador de Bayes </a:t>
+            </a:r>
+          </a:p>
+          <a:p>
+            <a:pPr>
+              <a:lnSpc>
+                <a:spcPct val="120000"/>
+              </a:lnSpc>
+            </a:pPr>
+            <a:r>
+              <a:rPr lang="es-ES_tradnl" dirty="0">
+                <a:solidFill>
+                  <a:srgbClr val="002060"/>
+                </a:solidFill>
+              </a:rPr>
+              <a:t>Desarrollamos</a:t>
+            </a:r>
+            <a:r>
+              <a:rPr lang="es-ES_tradnl" dirty="0"/>
+              <a:t> métodos más usados de Clasificación y </a:t>
+            </a:r>
+            <a:r>
+              <a:rPr lang="es-ES_tradnl" dirty="0">
+                <a:solidFill>
+                  <a:srgbClr val="002060"/>
+                </a:solidFill>
+              </a:rPr>
+              <a:t>mencionamos</a:t>
+            </a:r>
+            <a:r>
+              <a:rPr lang="es-ES_tradnl" dirty="0"/>
+              <a:t> un par de aplicaciones</a:t>
+            </a:r>
+          </a:p>
+          <a:p>
+            <a:pPr lvl="1">
+              <a:lnSpc>
+                <a:spcPct val="120000"/>
+              </a:lnSpc>
+            </a:pPr>
+            <a:r>
+              <a:rPr lang="es-ES_tradnl" dirty="0">
+                <a:solidFill>
+                  <a:srgbClr val="002060"/>
+                </a:solidFill>
+              </a:rPr>
+              <a:t>Regresión Logística </a:t>
+            </a:r>
+            <a:r>
+              <a:rPr lang="es-ES_tradnl" dirty="0"/>
+              <a:t>con introducción estimador de </a:t>
+            </a:r>
+            <a:r>
+              <a:rPr lang="es-ES_tradnl" dirty="0">
+                <a:solidFill>
+                  <a:srgbClr val="00B050"/>
+                </a:solidFill>
+              </a:rPr>
+              <a:t>máxima verosimilitud</a:t>
+            </a:r>
+          </a:p>
+          <a:p>
+            <a:pPr lvl="1">
+              <a:lnSpc>
+                <a:spcPct val="120000"/>
+              </a:lnSpc>
+            </a:pPr>
+            <a:r>
+              <a:rPr lang="es-ES_tradnl" dirty="0">
+                <a:solidFill>
+                  <a:srgbClr val="002060"/>
+                </a:solidFill>
+              </a:rPr>
+              <a:t>Describimos </a:t>
+            </a:r>
+            <a:r>
+              <a:rPr lang="es-ES_tradnl" dirty="0"/>
+              <a:t>el problema y solución práctica para </a:t>
+            </a:r>
+            <a:r>
+              <a:rPr lang="es-ES_tradnl" dirty="0">
+                <a:solidFill>
+                  <a:srgbClr val="002060"/>
+                </a:solidFill>
+              </a:rPr>
+              <a:t>Vecinos cercanos </a:t>
+            </a:r>
+          </a:p>
+          <a:p>
+            <a:pPr>
+              <a:lnSpc>
+                <a:spcPct val="120000"/>
+              </a:lnSpc>
+            </a:pPr>
+            <a:r>
+              <a:rPr lang="es-ES_tradnl" dirty="0"/>
+              <a:t>Análisis discriminante (LDA y QDA) &amp; Naive Bayes -&gt; </a:t>
+            </a:r>
+            <a:r>
+              <a:rPr lang="es-ES_tradnl" dirty="0">
+                <a:solidFill>
+                  <a:schemeClr val="accent1"/>
+                </a:solidFill>
+              </a:rPr>
+              <a:t>bonus</a:t>
+            </a:r>
+          </a:p>
+          <a:p>
+            <a:pPr lvl="1">
+              <a:lnSpc>
+                <a:spcPct val="120000"/>
+              </a:lnSpc>
+            </a:pPr>
+            <a:endParaRPr lang="es-ES_tradnl" dirty="0"/>
+          </a:p>
+        </p:txBody>
+      </p:sp>
+    </p:spTree>
+    <p:extLst>
+      <p:ext uri="{BB962C8B-B14F-4D97-AF65-F5344CB8AC3E}">
+        <p14:creationId xmlns:p14="http://schemas.microsoft.com/office/powerpoint/2010/main" val="2967380855"/>
+      </p:ext>
+    </p:extLst>
+  </p:cSld>
+  <p:clrMapOvr>
+    <a:masterClrMapping/>
+  </p:clrMapOvr>
+</p:sld>
+</file>
+
+<file path=ppt/slides/slide37.xml><?xml version="1.0" encoding="utf-8"?>
+<p:sld xmlns:a="http://schemas.openxmlformats.org/drawingml/2006/main" xmlns:r="http://schemas.openxmlformats.org/officeDocument/2006/relationships" xmlns:p="http://schemas.openxmlformats.org/presentationml/2006/main">
+  <p:cSld>
+    <p:spTree>
+      <p:nvGrpSpPr>
+        <p:cNvPr id="1" name=""/>
+        <p:cNvGrpSpPr/>
+        <p:nvPr/>
+      </p:nvGrpSpPr>
+      <p:grpSpPr>
+        <a:xfrm>
+          <a:off x="0" y="0"/>
+          <a:ext cx="0" cy="0"/>
+          <a:chOff x="0" y="0"/>
+          <a:chExt cx="0" cy="0"/>
+        </a:xfrm>
+      </p:grpSpPr>
+      <p:sp>
+        <p:nvSpPr>
+          <p:cNvPr id="2" name="Title 1">
+            <a:extLst>
+              <a:ext uri="{FF2B5EF4-FFF2-40B4-BE49-F238E27FC236}">
+                <a16:creationId xmlns:a16="http://schemas.microsoft.com/office/drawing/2014/main" id="{6E0D55B1-4C9E-9A68-CAC5-2D5211025F54}"/>
+              </a:ext>
+            </a:extLst>
+          </p:cNvPr>
+          <p:cNvSpPr>
+            <a:spLocks noGrp="1"/>
+          </p:cNvSpPr>
+          <p:nvPr>
+            <p:ph type="title"/>
+          </p:nvPr>
+        </p:nvSpPr>
+        <p:spPr/>
+        <p:txBody>
+          <a:bodyPr/>
+          <a:lstStyle/>
+          <a:p>
+            <a:pPr algn="ctr"/>
+            <a:r>
+              <a:rPr lang="es-ES_tradnl" dirty="0"/>
+              <a:t>¿Dudas, consultas?</a:t>
+            </a:r>
+          </a:p>
+        </p:txBody>
+      </p:sp>
+      <p:sp>
+        <p:nvSpPr>
+          <p:cNvPr id="3" name="Text Placeholder 2">
+            <a:extLst>
+              <a:ext uri="{FF2B5EF4-FFF2-40B4-BE49-F238E27FC236}">
+                <a16:creationId xmlns:a16="http://schemas.microsoft.com/office/drawing/2014/main" id="{706DE542-4031-D126-7AAF-A0332014D17F}"/>
+              </a:ext>
+            </a:extLst>
+          </p:cNvPr>
+          <p:cNvSpPr>
+            <a:spLocks noGrp="1"/>
+          </p:cNvSpPr>
+          <p:nvPr>
+            <p:ph type="body" idx="1"/>
+          </p:nvPr>
+        </p:nvSpPr>
+        <p:spPr/>
+        <p:txBody>
+          <a:bodyPr>
+            <a:normAutofit/>
+          </a:bodyPr>
+          <a:lstStyle/>
+          <a:p>
+            <a:pPr algn="ctr"/>
+            <a:r>
+              <a:rPr lang="es-ES_tradnl" dirty="0"/>
+              <a:t>Consultas: </a:t>
+            </a:r>
+            <a:r>
+              <a:rPr lang="en-US" dirty="0">
+                <a:solidFill>
+                  <a:srgbClr val="000000"/>
+                </a:solidFill>
+                <a:effectLst/>
+                <a:hlinkClick r:id="rId2"/>
+              </a:rPr>
+              <a:t>25RO35480961@campus.economicas.uba.ar</a:t>
+            </a:r>
+            <a:r>
+              <a:rPr lang="en-US" dirty="0">
+                <a:solidFill>
+                  <a:srgbClr val="000000"/>
+                </a:solidFill>
+                <a:effectLst/>
+              </a:rPr>
+              <a:t> </a:t>
+            </a:r>
+            <a:endParaRPr lang="es-ES_tradnl" dirty="0"/>
+          </a:p>
+        </p:txBody>
+      </p:sp>
+      <p:sp>
+        <p:nvSpPr>
+          <p:cNvPr id="4" name="Slide Number Placeholder 3">
+            <a:extLst>
+              <a:ext uri="{FF2B5EF4-FFF2-40B4-BE49-F238E27FC236}">
+                <a16:creationId xmlns:a16="http://schemas.microsoft.com/office/drawing/2014/main" id="{FA42557C-64E1-99EA-732F-3F53925CF2FD}"/>
+              </a:ext>
+            </a:extLst>
+          </p:cNvPr>
+          <p:cNvSpPr>
+            <a:spLocks noGrp="1"/>
+          </p:cNvSpPr>
+          <p:nvPr>
+            <p:ph type="sldNum" sz="quarter" idx="12"/>
+          </p:nvPr>
+        </p:nvSpPr>
+        <p:spPr/>
+        <p:txBody>
+          <a:bodyPr/>
+          <a:lstStyle/>
+          <a:p>
+            <a:fld id="{278C1CC4-2077-434E-BCF1-5D01C08A9B17}" type="slidenum">
+              <a:rPr lang="en-US" smtClean="0"/>
+              <a:t>37</a:t>
+            </a:fld>
+            <a:endParaRPr lang="en-US"/>
+          </a:p>
+        </p:txBody>
+      </p:sp>
+    </p:spTree>
+    <p:extLst>
+      <p:ext uri="{BB962C8B-B14F-4D97-AF65-F5344CB8AC3E}">
+        <p14:creationId xmlns:p14="http://schemas.microsoft.com/office/powerpoint/2010/main" val="3787366145"/>
+      </p:ext>
+    </p:extLst>
+  </p:cSld>
+  <p:clrMapOvr>
+    <a:masterClrMapping/>
+  </p:clrMapOvr>
+</p:sld>
+</file>
+
 <file path=ppt/slides/slide4.xml><?xml version="1.0" encoding="utf-8"?>
 <p:sld xmlns:a="http://schemas.openxmlformats.org/drawingml/2006/main" xmlns:r="http://schemas.openxmlformats.org/officeDocument/2006/relationships" xmlns:p="http://schemas.openxmlformats.org/presentationml/2006/main">
   <p:cSld>
@@ -28134,7 +26547,7 @@
                                   <m:sSub>
                                     <m:sSubPr>
                                       <m:ctrlPr>
-                                        <a:rPr lang="en-US" sz="2200" b="0" i="1" dirty="0" smtClean="0">
+                                        <a:rPr lang="en-US" sz="2200" b="0" dirty="0" smtClean="0">
                                           <a:latin typeface="Cambria Math" panose="02040503050406030204" pitchFamily="18" charset="0"/>
                                         </a:rPr>
                                       </m:ctrlPr>
@@ -28165,7 +26578,7 @@
                                   <m:sSub>
                                     <m:sSubPr>
                                       <m:ctrlPr>
-                                        <a:rPr lang="en-US" sz="2200" b="0" i="1" dirty="0" smtClean="0">
+                                        <a:rPr lang="en-US" sz="2200" b="0" dirty="0" smtClean="0">
                                           <a:latin typeface="Cambria Math" panose="02040503050406030204" pitchFamily="18" charset="0"/>
                                         </a:rPr>
                                       </m:ctrlPr>
@@ -28363,7 +26776,7 @@
                               <m:d>
                                 <m:dPr>
                                   <m:ctrlPr>
-                                    <a:rPr lang="en-US" sz="2200" b="0" i="1" dirty="0" smtClean="0">
+                                    <a:rPr lang="es-ES_tradnl" sz="2200" b="0" dirty="0" smtClean="0">
                                       <a:latin typeface="Cambria Math" panose="02040503050406030204" pitchFamily="18" charset="0"/>
                                     </a:rPr>
                                   </m:ctrlPr>
@@ -28607,7 +27020,7 @@
                               <m:sSub>
                                 <m:sSubPr>
                                   <m:ctrlPr>
-                                    <a:rPr lang="en-US" sz="2200" i="1" dirty="0" smtClean="0">
+                                    <a:rPr lang="es-ES_tradnl" sz="2200" b="0" dirty="0" smtClean="0">
                                       <a:latin typeface="Cambria Math" panose="02040503050406030204" pitchFamily="18" charset="0"/>
                                     </a:rPr>
                                   </m:ctrlPr>
@@ -28638,7 +27051,7 @@
                               <m:sSub>
                                 <m:sSubPr>
                                   <m:ctrlPr>
-                                    <a:rPr lang="en-US" sz="2200" i="1" dirty="0" smtClean="0">
+                                    <a:rPr lang="en-US" sz="2200" b="0" dirty="0" smtClean="0">
                                       <a:latin typeface="Cambria Math" panose="02040503050406030204" pitchFamily="18" charset="0"/>
                                     </a:rPr>
                                   </m:ctrlPr>
@@ -28684,7 +27097,7 @@
                               <m:sSup>
                                 <m:sSupPr>
                                   <m:ctrlPr>
-                                    <a:rPr lang="en-US" sz="2200" b="0" i="1" dirty="0" smtClean="0">
+                                    <a:rPr lang="en-US" sz="2200" b="0" dirty="0" smtClean="0">
                                       <a:latin typeface="Cambria Math" panose="02040503050406030204" pitchFamily="18" charset="0"/>
                                     </a:rPr>
                                   </m:ctrlPr>
@@ -28715,7 +27128,7 @@
                               <m:sSub>
                                 <m:sSubPr>
                                   <m:ctrlPr>
-                                    <a:rPr lang="en-US" sz="2200" i="1" dirty="0" smtClean="0">
+                                    <a:rPr lang="en-US" sz="2200" b="0" dirty="0" smtClean="0">
                                       <a:latin typeface="Cambria Math" panose="02040503050406030204" pitchFamily="18" charset="0"/>
                                     </a:rPr>
                                   </m:ctrlPr>
@@ -28746,7 +27159,7 @@
                               <m:sSub>
                                 <m:sSubPr>
                                   <m:ctrlPr>
-                                    <a:rPr lang="en-US" sz="2200" i="1" dirty="0" smtClean="0">
+                                    <a:rPr lang="en-US" sz="2200" b="0" dirty="0" smtClean="0">
                                       <a:latin typeface="Cambria Math" panose="02040503050406030204" pitchFamily="18" charset="0"/>
                                     </a:rPr>
                                   </m:ctrlPr>
@@ -29969,524 +28382,6 @@
       <p:bldP spid="3" grpId="0" animBg="1"/>
     </p:bldLst>
   </p:timing>
-</p:sld>
-</file>
-
-<file path=ppt/slides/slide40.xml><?xml version="1.0" encoding="utf-8"?>
-<p:sld xmlns:a="http://schemas.openxmlformats.org/drawingml/2006/main" xmlns:r="http://schemas.openxmlformats.org/officeDocument/2006/relationships" xmlns:p="http://schemas.openxmlformats.org/presentationml/2006/main">
-  <p:cSld>
-    <p:spTree>
-      <p:nvGrpSpPr>
-        <p:cNvPr id="1" name=""/>
-        <p:cNvGrpSpPr/>
-        <p:nvPr/>
-      </p:nvGrpSpPr>
-      <p:grpSpPr>
-        <a:xfrm>
-          <a:off x="0" y="0"/>
-          <a:ext cx="0" cy="0"/>
-          <a:chOff x="0" y="0"/>
-          <a:chExt cx="0" cy="0"/>
-        </a:xfrm>
-      </p:grpSpPr>
-      <p:sp>
-        <p:nvSpPr>
-          <p:cNvPr id="2" name="Title 1">
-            <a:extLst>
-              <a:ext uri="{FF2B5EF4-FFF2-40B4-BE49-F238E27FC236}">
-                <a16:creationId xmlns:a16="http://schemas.microsoft.com/office/drawing/2014/main" id="{B9E357CD-60DB-7599-DBBF-E7E34F55F067}"/>
-              </a:ext>
-            </a:extLst>
-          </p:cNvPr>
-          <p:cNvSpPr>
-            <a:spLocks noGrp="1"/>
-          </p:cNvSpPr>
-          <p:nvPr>
-            <p:ph type="title"/>
-          </p:nvPr>
-        </p:nvSpPr>
-        <p:spPr/>
-        <p:txBody>
-          <a:bodyPr/>
-          <a:lstStyle/>
-          <a:p>
-            <a:r>
-              <a:rPr lang="es-ES_tradnl" dirty="0"/>
-              <a:t>Conclusiones finales</a:t>
-            </a:r>
-          </a:p>
-        </p:txBody>
-      </p:sp>
-      <p:sp>
-        <p:nvSpPr>
-          <p:cNvPr id="4" name="Text Placeholder 3">
-            <a:extLst>
-              <a:ext uri="{FF2B5EF4-FFF2-40B4-BE49-F238E27FC236}">
-                <a16:creationId xmlns:a16="http://schemas.microsoft.com/office/drawing/2014/main" id="{808E002C-8C25-F567-04EE-6365B0376417}"/>
-              </a:ext>
-            </a:extLst>
-          </p:cNvPr>
-          <p:cNvSpPr>
-            <a:spLocks noGrp="1"/>
-          </p:cNvSpPr>
-          <p:nvPr>
-            <p:ph type="body" idx="1"/>
-          </p:nvPr>
-        </p:nvSpPr>
-        <p:spPr/>
-        <p:txBody>
-          <a:bodyPr/>
-          <a:lstStyle/>
-          <a:p>
-            <a:r>
-              <a:rPr lang="es-ES_tradnl" dirty="0"/>
-              <a:t>¿Qué aprendimos hoy?</a:t>
-            </a:r>
-          </a:p>
-        </p:txBody>
-      </p:sp>
-      <p:sp>
-        <p:nvSpPr>
-          <p:cNvPr id="3" name="Slide Number Placeholder 2">
-            <a:extLst>
-              <a:ext uri="{FF2B5EF4-FFF2-40B4-BE49-F238E27FC236}">
-                <a16:creationId xmlns:a16="http://schemas.microsoft.com/office/drawing/2014/main" id="{1A580811-4E8A-0CFA-2D7A-CC97B0990DF8}"/>
-              </a:ext>
-            </a:extLst>
-          </p:cNvPr>
-          <p:cNvSpPr>
-            <a:spLocks noGrp="1"/>
-          </p:cNvSpPr>
-          <p:nvPr>
-            <p:ph type="sldNum" sz="quarter" idx="12"/>
-          </p:nvPr>
-        </p:nvSpPr>
-        <p:spPr/>
-        <p:txBody>
-          <a:bodyPr/>
-          <a:lstStyle/>
-          <a:p>
-            <a:fld id="{278C1CC4-2077-434E-BCF1-5D01C08A9B17}" type="slidenum">
-              <a:rPr lang="en-US" smtClean="0"/>
-              <a:t>40</a:t>
-            </a:fld>
-            <a:endParaRPr lang="en-US"/>
-          </a:p>
-        </p:txBody>
-      </p:sp>
-    </p:spTree>
-    <p:extLst>
-      <p:ext uri="{BB962C8B-B14F-4D97-AF65-F5344CB8AC3E}">
-        <p14:creationId xmlns:p14="http://schemas.microsoft.com/office/powerpoint/2010/main" val="1583056128"/>
-      </p:ext>
-    </p:extLst>
-  </p:cSld>
-  <p:clrMapOvr>
-    <a:masterClrMapping/>
-  </p:clrMapOvr>
-</p:sld>
-</file>
-
-<file path=ppt/slides/slide41.xml><?xml version="1.0" encoding="utf-8"?>
-<p:sld xmlns:a="http://schemas.openxmlformats.org/drawingml/2006/main" xmlns:r="http://schemas.openxmlformats.org/officeDocument/2006/relationships" xmlns:p="http://schemas.openxmlformats.org/presentationml/2006/main">
-  <p:cSld>
-    <p:spTree>
-      <p:nvGrpSpPr>
-        <p:cNvPr id="1" name=""/>
-        <p:cNvGrpSpPr/>
-        <p:nvPr/>
-      </p:nvGrpSpPr>
-      <p:grpSpPr>
-        <a:xfrm>
-          <a:off x="0" y="0"/>
-          <a:ext cx="0" cy="0"/>
-          <a:chOff x="0" y="0"/>
-          <a:chExt cx="0" cy="0"/>
-        </a:xfrm>
-      </p:grpSpPr>
-      <p:sp>
-        <p:nvSpPr>
-          <p:cNvPr id="2" name="Title 1">
-            <a:extLst>
-              <a:ext uri="{FF2B5EF4-FFF2-40B4-BE49-F238E27FC236}">
-                <a16:creationId xmlns:a16="http://schemas.microsoft.com/office/drawing/2014/main" id="{3043BB58-5855-ACF9-ED81-BEC9A8A857DC}"/>
-              </a:ext>
-            </a:extLst>
-          </p:cNvPr>
-          <p:cNvSpPr>
-            <a:spLocks noGrp="1"/>
-          </p:cNvSpPr>
-          <p:nvPr>
-            <p:ph type="title"/>
-          </p:nvPr>
-        </p:nvSpPr>
-        <p:spPr/>
-        <p:txBody>
-          <a:bodyPr/>
-          <a:lstStyle/>
-          <a:p>
-            <a:r>
-              <a:rPr lang="es-ES_tradnl" dirty="0"/>
-              <a:t>¿Que aprendimos hoy?</a:t>
-            </a:r>
-          </a:p>
-        </p:txBody>
-      </p:sp>
-      <p:sp>
-        <p:nvSpPr>
-          <p:cNvPr id="3" name="Content Placeholder 2">
-            <a:extLst>
-              <a:ext uri="{FF2B5EF4-FFF2-40B4-BE49-F238E27FC236}">
-                <a16:creationId xmlns:a16="http://schemas.microsoft.com/office/drawing/2014/main" id="{8A1A5571-2769-CCAB-A4A1-42266B991BF9}"/>
-              </a:ext>
-            </a:extLst>
-          </p:cNvPr>
-          <p:cNvSpPr>
-            <a:spLocks noGrp="1"/>
-          </p:cNvSpPr>
-          <p:nvPr>
-            <p:ph idx="1"/>
-          </p:nvPr>
-        </p:nvSpPr>
-        <p:spPr/>
-        <p:txBody>
-          <a:bodyPr>
-            <a:normAutofit fontScale="85000" lnSpcReduction="10000"/>
-          </a:bodyPr>
-          <a:lstStyle/>
-          <a:p>
-            <a:pPr>
-              <a:lnSpc>
-                <a:spcPct val="120000"/>
-              </a:lnSpc>
-            </a:pPr>
-            <a:r>
-              <a:rPr lang="es-ES_tradnl" dirty="0">
-                <a:solidFill>
-                  <a:srgbClr val="002060"/>
-                </a:solidFill>
-              </a:rPr>
-              <a:t>Partimos</a:t>
-            </a:r>
-            <a:r>
-              <a:rPr lang="es-ES_tradnl" dirty="0"/>
-              <a:t> de las tomas de decisiones como </a:t>
-            </a:r>
-            <a:r>
-              <a:rPr lang="es-ES_tradnl" dirty="0">
-                <a:solidFill>
-                  <a:srgbClr val="002060"/>
-                </a:solidFill>
-              </a:rPr>
-              <a:t>motivación</a:t>
-            </a:r>
-            <a:r>
-              <a:rPr lang="es-ES_tradnl" dirty="0"/>
-              <a:t> para la clasificación</a:t>
-            </a:r>
-          </a:p>
-          <a:p>
-            <a:pPr>
-              <a:lnSpc>
-                <a:spcPct val="120000"/>
-              </a:lnSpc>
-            </a:pPr>
-            <a:r>
-              <a:rPr lang="es-ES_tradnl" dirty="0">
-                <a:solidFill>
-                  <a:srgbClr val="002060"/>
-                </a:solidFill>
-              </a:rPr>
-              <a:t>Definimos</a:t>
-            </a:r>
-            <a:r>
-              <a:rPr lang="es-ES_tradnl" dirty="0"/>
-              <a:t> la función de riesgo esperado para introducir </a:t>
-            </a:r>
-            <a:r>
-              <a:rPr lang="es-ES_tradnl" dirty="0">
-                <a:solidFill>
-                  <a:srgbClr val="002060"/>
-                </a:solidFill>
-              </a:rPr>
-              <a:t>formalmente</a:t>
-            </a:r>
-            <a:r>
-              <a:rPr lang="es-ES_tradnl" dirty="0"/>
-              <a:t> el </a:t>
-            </a:r>
-            <a:r>
-              <a:rPr lang="es-ES_tradnl" dirty="0">
-                <a:solidFill>
-                  <a:srgbClr val="002060"/>
-                </a:solidFill>
-              </a:rPr>
-              <a:t>clasificador de Bayes </a:t>
-            </a:r>
-          </a:p>
-          <a:p>
-            <a:pPr>
-              <a:lnSpc>
-                <a:spcPct val="120000"/>
-              </a:lnSpc>
-            </a:pPr>
-            <a:r>
-              <a:rPr lang="es-ES_tradnl" dirty="0">
-                <a:solidFill>
-                  <a:srgbClr val="002060"/>
-                </a:solidFill>
-              </a:rPr>
-              <a:t>Desarrollamos</a:t>
-            </a:r>
-            <a:r>
-              <a:rPr lang="es-ES_tradnl" dirty="0"/>
-              <a:t> métodos más usados de Clasificación y </a:t>
-            </a:r>
-            <a:r>
-              <a:rPr lang="es-ES_tradnl" dirty="0">
-                <a:solidFill>
-                  <a:srgbClr val="002060"/>
-                </a:solidFill>
-              </a:rPr>
-              <a:t>mencionamos</a:t>
-            </a:r>
-            <a:r>
-              <a:rPr lang="es-ES_tradnl" dirty="0"/>
-              <a:t> un par de aplicaciones</a:t>
-            </a:r>
-          </a:p>
-          <a:p>
-            <a:pPr lvl="1">
-              <a:lnSpc>
-                <a:spcPct val="120000"/>
-              </a:lnSpc>
-            </a:pPr>
-            <a:r>
-              <a:rPr lang="es-ES_tradnl" dirty="0">
-                <a:solidFill>
-                  <a:srgbClr val="002060"/>
-                </a:solidFill>
-              </a:rPr>
-              <a:t>Regresión Logística </a:t>
-            </a:r>
-            <a:r>
-              <a:rPr lang="es-ES_tradnl" dirty="0"/>
-              <a:t>con introducción estimador de </a:t>
-            </a:r>
-            <a:r>
-              <a:rPr lang="es-ES_tradnl" dirty="0">
-                <a:solidFill>
-                  <a:srgbClr val="00B050"/>
-                </a:solidFill>
-              </a:rPr>
-              <a:t>máxima verosimilitud</a:t>
-            </a:r>
-          </a:p>
-          <a:p>
-            <a:pPr lvl="1">
-              <a:lnSpc>
-                <a:spcPct val="120000"/>
-              </a:lnSpc>
-            </a:pPr>
-            <a:r>
-              <a:rPr lang="es-ES_tradnl" dirty="0">
-                <a:solidFill>
-                  <a:srgbClr val="002060"/>
-                </a:solidFill>
-              </a:rPr>
-              <a:t>Describimos </a:t>
-            </a:r>
-            <a:r>
-              <a:rPr lang="es-ES_tradnl" dirty="0"/>
-              <a:t>el problema y solución práctica para </a:t>
-            </a:r>
-            <a:r>
-              <a:rPr lang="es-ES_tradnl" dirty="0">
-                <a:solidFill>
-                  <a:srgbClr val="002060"/>
-                </a:solidFill>
-              </a:rPr>
-              <a:t>Vecinos cercanos </a:t>
-            </a:r>
-          </a:p>
-          <a:p>
-            <a:pPr>
-              <a:lnSpc>
-                <a:spcPct val="120000"/>
-              </a:lnSpc>
-            </a:pPr>
-            <a:r>
-              <a:rPr lang="es-ES_tradnl" dirty="0"/>
-              <a:t>Análisis discriminante (LDA y QDA) &amp; Naive Bayes -&gt; </a:t>
-            </a:r>
-            <a:r>
-              <a:rPr lang="es-ES_tradnl" dirty="0">
-                <a:solidFill>
-                  <a:schemeClr val="accent1"/>
-                </a:solidFill>
-              </a:rPr>
-              <a:t>bonus</a:t>
-            </a:r>
-          </a:p>
-          <a:p>
-            <a:pPr lvl="1">
-              <a:lnSpc>
-                <a:spcPct val="120000"/>
-              </a:lnSpc>
-            </a:pPr>
-            <a:endParaRPr lang="es-ES_tradnl" dirty="0"/>
-          </a:p>
-        </p:txBody>
-      </p:sp>
-    </p:spTree>
-    <p:extLst>
-      <p:ext uri="{BB962C8B-B14F-4D97-AF65-F5344CB8AC3E}">
-        <p14:creationId xmlns:p14="http://schemas.microsoft.com/office/powerpoint/2010/main" val="2967380855"/>
-      </p:ext>
-    </p:extLst>
-  </p:cSld>
-  <p:clrMapOvr>
-    <a:masterClrMapping/>
-  </p:clrMapOvr>
-</p:sld>
-</file>
-
-<file path=ppt/slides/slide42.xml><?xml version="1.0" encoding="utf-8"?>
-<p:sld xmlns:a="http://schemas.openxmlformats.org/drawingml/2006/main" xmlns:r="http://schemas.openxmlformats.org/officeDocument/2006/relationships" xmlns:p="http://schemas.openxmlformats.org/presentationml/2006/main">
-  <p:cSld>
-    <p:spTree>
-      <p:nvGrpSpPr>
-        <p:cNvPr id="1" name=""/>
-        <p:cNvGrpSpPr/>
-        <p:nvPr/>
-      </p:nvGrpSpPr>
-      <p:grpSpPr>
-        <a:xfrm>
-          <a:off x="0" y="0"/>
-          <a:ext cx="0" cy="0"/>
-          <a:chOff x="0" y="0"/>
-          <a:chExt cx="0" cy="0"/>
-        </a:xfrm>
-      </p:grpSpPr>
-      <p:sp>
-        <p:nvSpPr>
-          <p:cNvPr id="2" name="Title 1">
-            <a:extLst>
-              <a:ext uri="{FF2B5EF4-FFF2-40B4-BE49-F238E27FC236}">
-                <a16:creationId xmlns:a16="http://schemas.microsoft.com/office/drawing/2014/main" id="{6E0D55B1-4C9E-9A68-CAC5-2D5211025F54}"/>
-              </a:ext>
-            </a:extLst>
-          </p:cNvPr>
-          <p:cNvSpPr>
-            <a:spLocks noGrp="1"/>
-          </p:cNvSpPr>
-          <p:nvPr>
-            <p:ph type="title"/>
-          </p:nvPr>
-        </p:nvSpPr>
-        <p:spPr/>
-        <p:txBody>
-          <a:bodyPr/>
-          <a:lstStyle/>
-          <a:p>
-            <a:pPr algn="ctr"/>
-            <a:r>
-              <a:rPr lang="es-ES_tradnl" dirty="0"/>
-              <a:t>¿Dudas, consultas?</a:t>
-            </a:r>
-          </a:p>
-        </p:txBody>
-      </p:sp>
-      <p:sp>
-        <p:nvSpPr>
-          <p:cNvPr id="3" name="Text Placeholder 2">
-            <a:extLst>
-              <a:ext uri="{FF2B5EF4-FFF2-40B4-BE49-F238E27FC236}">
-                <a16:creationId xmlns:a16="http://schemas.microsoft.com/office/drawing/2014/main" id="{706DE542-4031-D126-7AAF-A0332014D17F}"/>
-              </a:ext>
-            </a:extLst>
-          </p:cNvPr>
-          <p:cNvSpPr>
-            <a:spLocks noGrp="1"/>
-          </p:cNvSpPr>
-          <p:nvPr>
-            <p:ph type="body" idx="1"/>
-          </p:nvPr>
-        </p:nvSpPr>
-        <p:spPr/>
-        <p:txBody>
-          <a:bodyPr>
-            <a:normAutofit/>
-          </a:bodyPr>
-          <a:lstStyle/>
-          <a:p>
-            <a:pPr algn="ctr"/>
-            <a:r>
-              <a:rPr lang="es-ES_tradnl" dirty="0"/>
-              <a:t>Consultas: </a:t>
-            </a:r>
-            <a:r>
-              <a:rPr lang="en-US" dirty="0">
-                <a:solidFill>
-                  <a:srgbClr val="000000"/>
-                </a:solidFill>
-                <a:effectLst/>
-                <a:hlinkClick r:id="rId2"/>
-              </a:rPr>
-              <a:t>25RO35480961@campus.economicas.uba.ar</a:t>
-            </a:r>
-            <a:r>
-              <a:rPr lang="en-US" dirty="0">
-                <a:solidFill>
-                  <a:srgbClr val="000000"/>
-                </a:solidFill>
-                <a:effectLst/>
-              </a:rPr>
-              <a:t> </a:t>
-            </a:r>
-            <a:endParaRPr lang="es-ES_tradnl" dirty="0"/>
-          </a:p>
-        </p:txBody>
-      </p:sp>
-      <p:sp>
-        <p:nvSpPr>
-          <p:cNvPr id="4" name="Slide Number Placeholder 3">
-            <a:extLst>
-              <a:ext uri="{FF2B5EF4-FFF2-40B4-BE49-F238E27FC236}">
-                <a16:creationId xmlns:a16="http://schemas.microsoft.com/office/drawing/2014/main" id="{FA42557C-64E1-99EA-732F-3F53925CF2FD}"/>
-              </a:ext>
-            </a:extLst>
-          </p:cNvPr>
-          <p:cNvSpPr>
-            <a:spLocks noGrp="1"/>
-          </p:cNvSpPr>
-          <p:nvPr>
-            <p:ph type="sldNum" sz="quarter" idx="12"/>
-          </p:nvPr>
-        </p:nvSpPr>
-        <p:spPr/>
-        <p:txBody>
-          <a:bodyPr/>
-          <a:lstStyle/>
-          <a:p>
-            <a:fld id="{278C1CC4-2077-434E-BCF1-5D01C08A9B17}" type="slidenum">
-              <a:rPr lang="en-US" smtClean="0"/>
-              <a:t>42</a:t>
-            </a:fld>
-            <a:endParaRPr lang="en-US"/>
-          </a:p>
-        </p:txBody>
-      </p:sp>
-    </p:spTree>
-    <p:extLst>
-      <p:ext uri="{BB962C8B-B14F-4D97-AF65-F5344CB8AC3E}">
-        <p14:creationId xmlns:p14="http://schemas.microsoft.com/office/powerpoint/2010/main" val="3787366145"/>
-      </p:ext>
-    </p:extLst>
-  </p:cSld>
-  <p:clrMapOvr>
-    <a:masterClrMapping/>
-  </p:clrMapOvr>
 </p:sld>
 </file>
 
@@ -31729,7 +29624,7 @@
                       <m:accPr>
                         <m:chr m:val="̂"/>
                         <m:ctrlPr>
-                          <a:rPr lang="es-ES_tradnl" b="0" i="1" smtClean="0">
+                          <a:rPr lang="en-US" b="0" i="1" smtClean="0">
                             <a:latin typeface="Cambria Math" panose="02040503050406030204" pitchFamily="18" charset="0"/>
                             <a:ea typeface="Cambria Math" panose="02040503050406030204" pitchFamily="18" charset="0"/>
                           </a:rPr>
@@ -32586,10 +30481,7 @@
                           </a:pPr>
                           <a14:m>
                             <m:oMathPara xmlns:m="http://schemas.openxmlformats.org/officeDocument/2006/math">
-                              <m:oMathParaPr>
-                                <m:jc m:val="centerGroup"/>
-                              </m:oMathParaPr>
-                              <m:oMath xmlns:m="http://schemas.openxmlformats.org/officeDocument/2006/math">
+                              <m:oMath>
                                 <m:r>
                                   <a:rPr lang="es-ES_tradnl" sz="2300" i="1" noProof="0" dirty="0" smtClean="0">
                                     <a:latin typeface="Cambria Math" panose="02040503050406030204" pitchFamily="18" charset="0"/>
@@ -32783,10 +30675,7 @@
                           <a:pPr algn="ctr"/>
                           <a14:m>
                             <m:oMathPara xmlns:m="http://schemas.openxmlformats.org/officeDocument/2006/math">
-                              <m:oMathParaPr>
-                                <m:jc m:val="centerGroup"/>
-                              </m:oMathParaPr>
-                              <m:oMath xmlns:m="http://schemas.openxmlformats.org/officeDocument/2006/math">
+                              <m:oMath>
                                 <m:r>
                                   <a:rPr lang="es-ES_tradnl" sz="2300" i="1" noProof="0" dirty="0" smtClean="0">
                                     <a:latin typeface="Cambria Math" panose="02040503050406030204" pitchFamily="18" charset="0"/>
@@ -32861,10 +30750,7 @@
                           <a:pPr algn="ctr"/>
                           <a14:m>
                             <m:oMathPara xmlns:m="http://schemas.openxmlformats.org/officeDocument/2006/math">
-                              <m:oMathParaPr>
-                                <m:jc m:val="centerGroup"/>
-                              </m:oMathParaPr>
-                              <m:oMath xmlns:m="http://schemas.openxmlformats.org/officeDocument/2006/math">
+                              <m:oMath>
                                 <m:r>
                                   <a:rPr lang="es-ES_tradnl" sz="2300" i="1" noProof="0" dirty="0" smtClean="0">
                                     <a:latin typeface="Cambria Math" panose="02040503050406030204" pitchFamily="18" charset="0"/>
